--- a/decks/train-your-attention-lesson-v2.pptx
+++ b/decks/train-your-attention-lesson-v2.pptx
@@ -19,6 +19,7 @@
     <p:sldId id="267" r:id="rId19"/>
     <p:sldId id="268" r:id="rId20"/>
     <p:sldId id="269" r:id="rId21"/>
+    <p:sldId id="270" r:id="rId22"/>
   </p:sldIdLst>
   <p:sldSz cx="12192000" cy="6858000" type="screen4x3"/>
   <p:notesSz cx="6858000" cy="9144000"/>
@@ -515,7 +516,7 @@
           <a:lstStyle/>
           <a:p>
             <a:r>
-              <a:t>This page and the next three are hidden. They stay in the deck for you and are skipped when you present.</a:t>
+              <a:t>This page is hidden and skipped when you present. The full plan, care notes and research are on the hidden pages at the end of the deck, if you want them.</a:t>
             </a:r>
           </a:p>
         </p:txBody>
@@ -656,6 +657,76 @@
           <a:p>
             <a:r>
               <a:t>5 MINUTES. Collect cards anonymously. Share the student page and the five practice cards (post them on your class page). Remind students a counselor is available for anyone whose stress, sleep or worry feels bigger than a practice can handle.</a:t>
+            </a:r>
+          </a:p>
+        </p:txBody>
+      </p:sp>
+      <p:sp>
+        <p:nvSpPr>
+          <p:cNvPr id="4" name="Slide Number Placeholder 3"/>
+          <p:cNvSpPr>
+            <a:spLocks noGrp="1"/>
+          </p:cNvSpPr>
+          <p:nvPr>
+            <p:ph type="sldNum" idx="5" sz="quarter"/>
+          </p:nvPr>
+        </p:nvSpPr>
+        <p:spPr/>
+      </p:sp>
+    </p:spTree>
+  </p:cSld>
+  <p:clrMapOvr>
+    <a:masterClrMapping/>
+  </p:clrMapOvr>
+</p:notes>
+</file>
+
+<file path=ppt/notesSlides/notesSlide12.xml><?xml version="1.0" encoding="utf-8"?>
+<p:notes xmlns:a="http://schemas.openxmlformats.org/drawingml/2006/main" xmlns:p="http://schemas.openxmlformats.org/presentationml/2006/main" xmlns:r="http://schemas.openxmlformats.org/officeDocument/2006/relationships">
+  <p:cSld>
+    <p:spTree>
+      <p:nvGrpSpPr>
+        <p:cNvPr id="1" name=""/>
+        <p:cNvGrpSpPr/>
+        <p:nvPr/>
+      </p:nvGrpSpPr>
+      <p:grpSpPr>
+        <a:xfrm>
+          <a:off x="0" y="0"/>
+          <a:ext cx="0" cy="0"/>
+          <a:chOff x="0" y="0"/>
+          <a:chExt cx="0" cy="0"/>
+        </a:xfrm>
+      </p:grpSpPr>
+      <p:sp>
+        <p:nvSpPr>
+          <p:cNvPr id="2" name="Slide Image Placeholder 1"/>
+          <p:cNvSpPr>
+            <a:spLocks noGrp="1"/>
+          </p:cNvSpPr>
+          <p:nvPr>
+            <p:ph type="sldImg" idx="2"/>
+          </p:nvPr>
+        </p:nvSpPr>
+        <p:spPr/>
+      </p:sp>
+      <p:sp>
+        <p:nvSpPr>
+          <p:cNvPr id="3" name="Notes Placeholder 2"/>
+          <p:cNvSpPr>
+            <a:spLocks noGrp="1"/>
+          </p:cNvSpPr>
+          <p:nvPr>
+            <p:ph type="body" idx="3" sz="quarter"/>
+          </p:nvPr>
+        </p:nvSpPr>
+        <p:spPr/>
+        <p:txBody>
+          <a:bodyPr/>
+          <a:lstStyle/>
+          <a:p>
+            <a:r>
+              <a:t>If you want more: this page and the next three are hidden and skipped when you present.</a:t>
             </a:r>
           </a:p>
         </p:txBody>
@@ -4307,7 +4378,7 @@
                 </a:solidFill>
                 <a:latin typeface="Inter Tight"/>
               </a:rPr>
-              <a:t>TEACHER PAGE  ·  skipped when you present  ·  Lesson plan</a:t>
+              <a:t>TEACHER PAGE  ·  skipped when you present  ·  Before you start</a:t>
             </a:r>
           </a:p>
         </p:txBody>
@@ -4398,8 +4469,8 @@
         </p:nvSpPr>
         <p:spPr>
           <a:xfrm>
-            <a:off x="548640" y="1828800"/>
-            <a:ext cx="5120640" cy="4389120"/>
+            <a:off x="548640" y="2011680"/>
+            <a:ext cx="11064240" cy="4206240"/>
           </a:xfrm>
           <a:prstGeom prst="rect">
             <a:avLst/>
@@ -4414,43 +4485,43 @@
           <a:p>
             <a:pPr algn="l">
               <a:spcAft>
-                <a:spcPts val="675"/>
-              </a:spcAft>
-            </a:pPr>
-            <a:r>
-              <a:rPr sz="1100" b="1" i="0">
+                <a:spcPts val="810"/>
+              </a:spcAft>
+            </a:pPr>
+            <a:r>
+              <a:rPr sz="1200" b="1" i="0">
                 <a:solidFill>
                   <a:srgbClr val="0B2D5B"/>
                 </a:solidFill>
                 <a:latin typeface="Inter Tight"/>
               </a:rPr>
-              <a:t>GOAL</a:t>
-            </a:r>
-          </a:p>
-          <a:p>
-            <a:pPr algn="l">
-              <a:spcAft>
-                <a:spcPts val="675"/>
-              </a:spcAft>
-            </a:pPr>
-            <a:r>
-              <a:rPr sz="1500" b="0" i="0">
+              <a:t>BEFORE YOU START</a:t>
+            </a:r>
+          </a:p>
+          <a:p>
+            <a:pPr algn="l">
+              <a:spcAft>
+                <a:spcPts val="810"/>
+              </a:spcAft>
+            </a:pPr>
+            <a:r>
+              <a:rPr sz="1800" b="0" i="0">
                 <a:solidFill>
                   <a:srgbClr val="1C1B19"/>
                 </a:solidFill>
                 <a:latin typeface="Source Serif 4"/>
               </a:rPr>
-              <a:t>Students can explain what mindfulness is and isn't, describe what the research does and doesn't show about attention and the brain, and try one short practice of their choosing. Nobody has to close their eyes, share what they noticed, or keep practicing.</a:t>
-            </a:r>
-          </a:p>
-          <a:p>
-            <a:pPr algn="l">
-              <a:spcAft>
-                <a:spcPts val="675"/>
-              </a:spcAft>
-            </a:pPr>
-            <a:r>
-              <a:rPr sz="1500" b="0" i="0">
+              <a:t>Students learn what mindfulness is and isn't, what the research honestly shows, and try one short practice of their choosing. Bring a timer, say before every practice that eyes can stay open and anyone can opt out, and offer an anchor other than the breath.</a:t>
+            </a:r>
+          </a:p>
+          <a:p>
+            <a:pPr algn="l">
+              <a:spcAft>
+                <a:spcPts val="810"/>
+              </a:spcAft>
+            </a:pPr>
+            <a:r>
+              <a:rPr sz="1800" b="0" i="0">
                 <a:solidFill>
                   <a:srgbClr val="1C1B19"/>
                 </a:solidFill>
@@ -4462,321 +4533,75 @@
           <a:p>
             <a:pPr algn="l">
               <a:spcAft>
-                <a:spcPts val="675"/>
-              </a:spcAft>
-            </a:pPr>
-            <a:r>
-              <a:rPr sz="1100" b="1" i="0">
+                <a:spcPts val="810"/>
+              </a:spcAft>
+            </a:pPr>
+            <a:r>
+              <a:rPr sz="1200" b="1" i="0">
                 <a:solidFill>
                   <a:srgbClr val="0B2D5B"/>
                 </a:solidFill>
                 <a:latin typeface="Inter Tight"/>
               </a:rPr>
-              <a:t>MATERIALS</a:t>
-            </a:r>
-          </a:p>
-          <a:p>
-            <a:pPr algn="l">
-              <a:spcAft>
-                <a:spcPts val="675"/>
-              </a:spcAft>
-            </a:pPr>
-            <a:r>
-              <a:rPr sz="1500" b="0" i="0">
+              <a:t>EVERY STUDENT IN THE ROOM</a:t>
+            </a:r>
+          </a:p>
+          <a:p>
+            <a:pPr algn="l">
+              <a:spcAft>
+                <a:spcPts val="810"/>
+              </a:spcAft>
+            </a:pPr>
+            <a:r>
+              <a:rPr sz="1800" b="0" i="0">
                 <a:solidFill>
                   <a:srgbClr val="1C1B19"/>
                 </a:solidFill>
                 <a:latin typeface="Source Serif 4"/>
               </a:rPr>
-              <a:t>A timer you can see or hear</a:t>
-            </a:r>
-          </a:p>
-          <a:p>
-            <a:pPr algn="l">
-              <a:spcAft>
-                <a:spcPts val="675"/>
-              </a:spcAft>
-            </a:pPr>
-            <a:r>
-              <a:rPr sz="1500" b="0" i="0">
+              <a:t>Many traditions already do this and some families will be wary, so keep it secular, credit the roots, and adjust any instruction that doesn't fit a student's body.</a:t>
+            </a:r>
+          </a:p>
+          <a:p>
+            <a:pPr algn="l">
+              <a:spcAft>
+                <a:spcPts val="810"/>
+              </a:spcAft>
+            </a:pPr>
+            <a:r>
+              <a:rPr sz="1800" b="0" i="0">
                 <a:solidFill>
                   <a:srgbClr val="1C1B19"/>
                 </a:solidFill>
                 <a:latin typeface="Source Serif 4"/>
               </a:rPr>
-              <a:t>Index cards, one per student</a:t>
-            </a:r>
-          </a:p>
-          <a:p>
-            <a:pPr algn="l">
-              <a:spcAft>
-                <a:spcPts val="675"/>
-              </a:spcAft>
-            </a:pPr>
-            <a:r>
-              <a:rPr sz="1500" b="0" i="0">
-                <a:solidFill>
-                  <a:srgbClr val="1C1B19"/>
-                </a:solidFill>
-                <a:latin typeface="Source Serif 4"/>
-              </a:rPr>
-              <a:t>The five practice cards (links on the last slide) to share after class</a:t>
-            </a:r>
-          </a:p>
-        </p:txBody>
-      </p:sp>
-      <p:sp>
-        <p:nvSpPr>
-          <p:cNvPr id="7" name="TextBox 6"/>
-          <p:cNvSpPr txBox="1"/>
-          <p:nvPr/>
-        </p:nvSpPr>
-        <p:spPr>
-          <a:xfrm>
-            <a:off x="6126480" y="1828800"/>
-            <a:ext cx="5486400" cy="4389120"/>
-          </a:xfrm>
-          <a:prstGeom prst="rect">
-            <a:avLst/>
-          </a:prstGeom>
-          <a:noFill/>
-        </p:spPr>
-        <p:txBody>
-          <a:bodyPr wrap="square" anchor="t" lIns="0" rIns="0" tIns="0" bIns="0">
-            <a:spAutoFit/>
-          </a:bodyPr>
-          <a:lstStyle/>
-          <a:p>
-            <a:pPr algn="l">
-              <a:spcAft>
-                <a:spcPts val="630"/>
-              </a:spcAft>
-            </a:pPr>
-            <a:r>
-              <a:rPr sz="1100" b="1" i="0">
+              <a:t/>
+            </a:r>
+          </a:p>
+          <a:p>
+            <a:pPr algn="l">
+              <a:spcAft>
+                <a:spcPts val="810"/>
+              </a:spcAft>
+            </a:pPr>
+            <a:r>
+              <a:rPr sz="1200" b="1" i="0">
                 <a:solidFill>
                   <a:srgbClr val="0B2D5B"/>
                 </a:solidFill>
                 <a:latin typeface="Inter Tight"/>
               </a:rPr>
-              <a:t>FLOW</a:t>
-            </a:r>
-          </a:p>
-          <a:p>
-            <a:pPr algn="l">
-              <a:spcAft>
-                <a:spcPts val="630"/>
-              </a:spcAft>
-            </a:pPr>
-            <a:r>
-              <a:rPr sz="1300" b="1" i="0">
-                <a:solidFill>
-                  <a:srgbClr val="F47B20"/>
-                </a:solidFill>
-                <a:latin typeface="Inter Tight"/>
-              </a:rPr>
-              <a:t>5 min   </a:t>
-            </a:r>
-            <a:r>
-              <a:rPr sz="1400" b="0" i="0">
-                <a:solidFill>
-                  <a:srgbClr val="1C1B19"/>
-                </a:solidFill>
-                <a:latin typeface="Source Serif 4"/>
-              </a:rPr>
-              <a:t>One minute of noticing</a:t>
-            </a:r>
-          </a:p>
-          <a:p>
-            <a:pPr algn="l">
-              <a:spcAft>
-                <a:spcPts val="630"/>
-              </a:spcAft>
-            </a:pPr>
-            <a:r>
-              <a:rPr sz="1300" b="1" i="0">
-                <a:solidFill>
-                  <a:srgbClr val="F47B20"/>
-                </a:solidFill>
-                <a:latin typeface="Inter Tight"/>
-              </a:rPr>
-              <a:t>5 min   </a:t>
-            </a:r>
-            <a:r>
-              <a:rPr sz="1400" b="0" i="0">
-                <a:solidFill>
-                  <a:srgbClr val="1C1B19"/>
-                </a:solidFill>
-                <a:latin typeface="Source Serif 4"/>
-              </a:rPr>
-              <a:t>What mindfulness is (and isn't)</a:t>
-            </a:r>
-          </a:p>
-          <a:p>
-            <a:pPr algn="l">
-              <a:spcAft>
-                <a:spcPts val="630"/>
-              </a:spcAft>
-            </a:pPr>
-            <a:r>
-              <a:rPr sz="1300" b="1" i="0">
-                <a:solidFill>
-                  <a:srgbClr val="F47B20"/>
-                </a:solidFill>
-                <a:latin typeface="Inter Tight"/>
-              </a:rPr>
-              <a:t>10 min   </a:t>
-            </a:r>
-            <a:r>
-              <a:rPr sz="1400" b="0" i="0">
-                <a:solidFill>
-                  <a:srgbClr val="1C1B19"/>
-                </a:solidFill>
-                <a:latin typeface="Source Serif 4"/>
-              </a:rPr>
-              <a:t>The research: attention, the brain, and honest limits</a:t>
-            </a:r>
-          </a:p>
-          <a:p>
-            <a:pPr algn="l">
-              <a:spcAft>
-                <a:spcPts val="630"/>
-              </a:spcAft>
-            </a:pPr>
-            <a:r>
-              <a:rPr sz="1300" b="1" i="0">
-                <a:solidFill>
-                  <a:srgbClr val="F47B20"/>
-                </a:solidFill>
-                <a:latin typeface="Inter Tight"/>
-              </a:rPr>
-              <a:t>5 min   </a:t>
-            </a:r>
-            <a:r>
-              <a:rPr sz="1400" b="0" i="0">
-                <a:solidFill>
-                  <a:srgbClr val="1C1B19"/>
-                </a:solidFill>
-                <a:latin typeface="Source Serif 4"/>
-              </a:rPr>
-              <a:t>Where it comes from</a:t>
-            </a:r>
-          </a:p>
-          <a:p>
-            <a:pPr algn="l">
-              <a:spcAft>
-                <a:spcPts val="630"/>
-              </a:spcAft>
-            </a:pPr>
-            <a:r>
-              <a:rPr sz="1300" b="1" i="0">
-                <a:solidFill>
-                  <a:srgbClr val="F47B20"/>
-                </a:solidFill>
-                <a:latin typeface="Inter Tight"/>
-              </a:rPr>
-              <a:t>5 min   </a:t>
-            </a:r>
-            <a:r>
-              <a:rPr sz="1400" b="0" i="0">
-                <a:solidFill>
-                  <a:srgbClr val="1C1B19"/>
-                </a:solidFill>
-                <a:latin typeface="Source Serif 4"/>
-              </a:rPr>
-              <a:t>Five ways in</a:t>
-            </a:r>
-          </a:p>
-          <a:p>
-            <a:pPr algn="l">
-              <a:spcAft>
-                <a:spcPts val="630"/>
-              </a:spcAft>
-            </a:pPr>
-            <a:r>
-              <a:rPr sz="1300" b="1" i="0">
-                <a:solidFill>
-                  <a:srgbClr val="F47B20"/>
-                </a:solidFill>
-                <a:latin typeface="Inter Tight"/>
-              </a:rPr>
-              <a:t>10 min   </a:t>
-            </a:r>
-            <a:r>
-              <a:rPr sz="1400" b="0" i="0">
-                <a:solidFill>
-                  <a:srgbClr val="1C1B19"/>
-                </a:solidFill>
-                <a:latin typeface="Source Serif 4"/>
-              </a:rPr>
-              <a:t>Try one (student's choice, eyes open is fine)</a:t>
-            </a:r>
-          </a:p>
-          <a:p>
-            <a:pPr algn="l">
-              <a:spcAft>
-                <a:spcPts val="630"/>
-              </a:spcAft>
-            </a:pPr>
-            <a:r>
-              <a:rPr sz="1300" b="1" i="0">
-                <a:solidFill>
-                  <a:srgbClr val="F47B20"/>
-                </a:solidFill>
-                <a:latin typeface="Inter Tight"/>
-              </a:rPr>
-              <a:t>5 min   </a:t>
-            </a:r>
-            <a:r>
-              <a:rPr sz="1400" b="0" i="0">
-                <a:solidFill>
-                  <a:srgbClr val="1C1B19"/>
-                </a:solidFill>
-                <a:latin typeface="Source Serif 4"/>
-              </a:rPr>
-              <a:t>Exit card and practice links</a:t>
-            </a:r>
-          </a:p>
-          <a:p>
-            <a:pPr algn="l">
-              <a:spcAft>
-                <a:spcPts val="630"/>
-              </a:spcAft>
-            </a:pPr>
-            <a:r>
-              <a:rPr sz="1400" b="0" i="0">
-                <a:solidFill>
-                  <a:srgbClr val="1C1B19"/>
-                </a:solidFill>
-                <a:latin typeface="Source Serif 4"/>
-              </a:rPr>
-              <a:t/>
-            </a:r>
-          </a:p>
-          <a:p>
-            <a:pPr algn="l">
-              <a:spcAft>
-                <a:spcPts val="630"/>
-              </a:spcAft>
-            </a:pPr>
-            <a:r>
-              <a:rPr sz="1100" b="1" i="0">
-                <a:solidFill>
-                  <a:srgbClr val="0B2D5B"/>
-                </a:solidFill>
-                <a:latin typeface="Inter Tight"/>
-              </a:rPr>
               <a:t>SHORT ON TIME (20-MINUTE ADVISORY)</a:t>
             </a:r>
           </a:p>
           <a:p>
             <a:pPr algn="l">
               <a:spcAft>
-                <a:spcPts val="630"/>
-              </a:spcAft>
-            </a:pPr>
-            <a:r>
-              <a:rPr sz="1400" b="0" i="0">
+                <a:spcPts val="810"/>
+              </a:spcAft>
+            </a:pPr>
+            <a:r>
+              <a:rPr sz="1800" b="0" i="0">
                 <a:solidFill>
                   <a:srgbClr val="1C1B19"/>
                 </a:solidFill>
@@ -4891,7 +4716,7 @@
                 </a:solidFill>
                 <a:latin typeface="Inter Tight"/>
               </a:rPr>
-              <a:t>IN SCHOOLS</a:t>
+              <a:t>TRY ONE</a:t>
             </a:r>
           </a:p>
         </p:txBody>
@@ -4930,170 +4755,21 @@
                 </a:solidFill>
                 <a:latin typeface="Inter Tight"/>
               </a:rPr>
-              <a:t>train-your-attention Counseling</a:t>
-            </a:r>
-          </a:p>
-        </p:txBody>
-      </p:sp>
-      <p:sp>
-        <p:nvSpPr>
-          <p:cNvPr id="5" name="TextBox 4"/>
-          <p:cNvSpPr txBox="1"/>
-          <p:nvPr/>
-        </p:nvSpPr>
-        <p:spPr>
-          <a:xfrm>
-            <a:off x="822960" y="914400"/>
-            <a:ext cx="10515600" cy="365760"/>
-          </a:xfrm>
-          <a:prstGeom prst="rect">
-            <a:avLst/>
-          </a:prstGeom>
-          <a:noFill/>
-        </p:spPr>
-        <p:txBody>
-          <a:bodyPr wrap="square" anchor="t" lIns="0" rIns="0" tIns="0" bIns="0">
-            <a:spAutoFit/>
-          </a:bodyPr>
-          <a:lstStyle/>
-          <a:p>
-            <a:pPr algn="l">
-              <a:spcAft>
-                <a:spcPts val="630"/>
-              </a:spcAft>
-            </a:pPr>
-            <a:r>
-              <a:rPr sz="1400" b="1" i="0">
-                <a:solidFill>
-                  <a:srgbClr val="0B2D5B"/>
-                </a:solidFill>
-                <a:latin typeface="Inter Tight"/>
-              </a:rPr>
-              <a:t>MYRIAD trial, Kuyken et al., 2022  ·  Dunning et al., 2019</a:t>
-            </a:r>
-          </a:p>
-        </p:txBody>
-      </p:sp>
-      <p:sp>
-        <p:nvSpPr>
-          <p:cNvPr id="6" name="TextBox 5"/>
-          <p:cNvSpPr txBox="1"/>
-          <p:nvPr/>
-        </p:nvSpPr>
-        <p:spPr>
-          <a:xfrm>
-            <a:off x="822960" y="1325880"/>
-            <a:ext cx="10515600" cy="1097280"/>
-          </a:xfrm>
-          <a:prstGeom prst="rect">
-            <a:avLst/>
-          </a:prstGeom>
-          <a:noFill/>
-        </p:spPr>
-        <p:txBody>
-          <a:bodyPr wrap="square" anchor="t" lIns="0" rIns="0" tIns="0" bIns="0">
-            <a:spAutoFit/>
-          </a:bodyPr>
-          <a:lstStyle/>
-          <a:p>
-            <a:pPr algn="l">
-              <a:spcAft>
-                <a:spcPts val="1440"/>
-              </a:spcAft>
-            </a:pPr>
-            <a:r>
-              <a:rPr sz="3200" b="1" i="0">
-                <a:solidFill>
-                  <a:srgbClr val="1C1B19"/>
-                </a:solidFill>
-                <a:latin typeface="Source Serif 4"/>
-              </a:rPr>
-              <a:t>A school course alone isn't a cure.</a:t>
-            </a:r>
-          </a:p>
-        </p:txBody>
-      </p:sp>
-      <p:sp>
-        <p:nvSpPr>
-          <p:cNvPr id="7" name="TextBox 6"/>
-          <p:cNvSpPr txBox="1"/>
-          <p:nvPr/>
-        </p:nvSpPr>
-        <p:spPr>
-          <a:xfrm>
-            <a:off x="822960" y="2514600"/>
-            <a:ext cx="10515600" cy="2194560"/>
-          </a:xfrm>
-          <a:prstGeom prst="rect">
-            <a:avLst/>
-          </a:prstGeom>
-          <a:noFill/>
-        </p:spPr>
-        <p:txBody>
-          <a:bodyPr wrap="square" anchor="t" lIns="0" rIns="0" tIns="0" bIns="0">
-            <a:spAutoFit/>
-          </a:bodyPr>
-          <a:lstStyle/>
-          <a:p>
-            <a:pPr algn="l">
-              <a:spcAft>
-                <a:spcPts val="855"/>
-              </a:spcAft>
-            </a:pPr>
-            <a:r>
-              <a:rPr sz="1900" b="0" i="0">
-                <a:solidFill>
-                  <a:srgbClr val="1C1B19"/>
-                </a:solidFill>
-                <a:latin typeface="Source Serif 4"/>
-              </a:rPr>
-              <a:t>•  8,000+ students in 84 UK schools: mindfulness classes helped about as much as regular wellbeing lessons.</a:t>
-            </a:r>
-          </a:p>
-          <a:p>
-            <a:pPr algn="l">
-              <a:spcAft>
-                <a:spcPts val="855"/>
-              </a:spcAft>
-            </a:pPr>
-            <a:r>
-              <a:rPr sz="1900" b="0" i="0">
-                <a:solidFill>
-                  <a:srgbClr val="1C1B19"/>
-                </a:solidFill>
-                <a:latin typeface="Source Serif 4"/>
-              </a:rPr>
-              <a:t>•  Most students stopped practicing after the course.</a:t>
-            </a:r>
-          </a:p>
-          <a:p>
-            <a:pPr algn="l">
-              <a:spcAft>
-                <a:spcPts val="855"/>
-              </a:spcAft>
-            </a:pPr>
-            <a:r>
-              <a:rPr sz="1900" b="0" i="0">
-                <a:solidFill>
-                  <a:srgbClr val="1C1B19"/>
-                </a:solidFill>
-                <a:latin typeface="Source Serif 4"/>
-              </a:rPr>
-              <a:t>•  Across 33 studies, benefits for attention, stress and mood were small but real.</a:t>
-            </a:r>
-          </a:p>
-        </p:txBody>
-      </p:sp>
-      <p:sp>
-        <p:nvSpPr>
-          <p:cNvPr id="8" name="Rectangle 7"/>
+              <a:t>Beaver Counseling</a:t>
+            </a:r>
+          </a:p>
+        </p:txBody>
+      </p:sp>
+      <p:sp>
+        <p:nvSpPr>
+          <p:cNvPr id="5" name="Rectangle 4"/>
           <p:cNvSpPr/>
           <p:nvPr/>
         </p:nvSpPr>
         <p:spPr>
           <a:xfrm>
-            <a:off x="822960" y="4892040"/>
-            <a:ext cx="73152" cy="1097280"/>
+            <a:off x="822960" y="1371600"/>
+            <a:ext cx="73152" cy="3566160"/>
           </a:xfrm>
           <a:prstGeom prst="rect">
             <a:avLst/>
@@ -5130,14 +4806,53 @@
       </p:sp>
       <p:sp>
         <p:nvSpPr>
-          <p:cNvPr id="9" name="TextBox 8"/>
+          <p:cNvPr id="6" name="TextBox 5"/>
           <p:cNvSpPr txBox="1"/>
           <p:nvPr/>
         </p:nvSpPr>
         <p:spPr>
           <a:xfrm>
-            <a:off x="1097280" y="4892040"/>
-            <a:ext cx="10241280" cy="1188720"/>
+            <a:off x="1188720" y="1371600"/>
+            <a:ext cx="10058400" cy="3566160"/>
+          </a:xfrm>
+          <a:prstGeom prst="rect">
+            <a:avLst/>
+          </a:prstGeom>
+          <a:noFill/>
+        </p:spPr>
+        <p:txBody>
+          <a:bodyPr wrap="square" anchor="ctr" lIns="0" rIns="0" tIns="0" bIns="0">
+            <a:spAutoFit/>
+          </a:bodyPr>
+          <a:lstStyle/>
+          <a:p>
+            <a:pPr algn="l">
+              <a:spcAft>
+                <a:spcPts val="1800"/>
+              </a:spcAft>
+            </a:pPr>
+            <a:r>
+              <a:rPr sz="4000" b="0" i="1">
+                <a:solidFill>
+                  <a:srgbClr val="1C1B19"/>
+                </a:solidFill>
+                <a:latin typeface="Source Serif 4"/>
+              </a:rPr>
+              <a:t>Two to three minutes. Your choice: breathing, five senses, or a slow stretch.</a:t>
+            </a:r>
+          </a:p>
+        </p:txBody>
+      </p:sp>
+      <p:sp>
+        <p:nvSpPr>
+          <p:cNvPr id="7" name="TextBox 6"/>
+          <p:cNvSpPr txBox="1"/>
+          <p:nvPr/>
+        </p:nvSpPr>
+        <p:spPr>
+          <a:xfrm>
+            <a:off x="1188720" y="5120640"/>
+            <a:ext cx="10058400" cy="914400"/>
           </a:xfrm>
           <a:prstGeom prst="rect">
             <a:avLst/>
@@ -5152,33 +4867,17 @@
           <a:p>
             <a:pPr algn="l">
               <a:spcAft>
-                <a:spcPts val="855"/>
-              </a:spcAft>
-            </a:pPr>
-            <a:r>
-              <a:rPr sz="1200" b="1" i="0">
-                <a:solidFill>
-                  <a:srgbClr val="F47B20"/>
+                <a:spcPts val="810"/>
+              </a:spcAft>
+            </a:pPr>
+            <a:r>
+              <a:rPr sz="1800" b="0" i="0">
+                <a:solidFill>
+                  <a:srgbClr val="5D5A54"/>
                 </a:solidFill>
                 <a:latin typeface="Inter Tight"/>
               </a:rPr>
-              <a:t>IN CLASS</a:t>
-            </a:r>
-          </a:p>
-          <a:p>
-            <a:pPr algn="l">
-              <a:spcAft>
-                <a:spcPts val="855"/>
-              </a:spcAft>
-            </a:pPr>
-            <a:r>
-              <a:rPr sz="1900" b="0" i="0">
-                <a:solidFill>
-                  <a:srgbClr val="1C1B19"/>
-                </a:solidFill>
-                <a:latin typeface="Source Serif 4"/>
-              </a:rPr>
-              <a:t>It's a tool. It works best when you pick a practice you like and use it because you want to.</a:t>
+              <a:t>Eyes open is fine. Stop whenever you want.</a:t>
             </a:r>
           </a:p>
         </p:txBody>
@@ -5287,7 +4986,7 @@
                 </a:solidFill>
                 <a:latin typeface="Inter Tight"/>
               </a:rPr>
-              <a:t>WHERE IT COMES FROM</a:t>
+              <a:t>BEFORE YOU GO</a:t>
             </a:r>
           </a:p>
         </p:txBody>
@@ -5326,7 +5025,7 @@
                 </a:solidFill>
                 <a:latin typeface="Inter Tight"/>
               </a:rPr>
-              <a:t>train-your-attention Counseling</a:t>
+              <a:t>Beaver Counseling</a:t>
             </a:r>
           </a:p>
         </p:txBody>
@@ -5339,8 +5038,8 @@
         </p:nvSpPr>
         <p:spPr>
           <a:xfrm>
-            <a:off x="822960" y="1463040"/>
-            <a:ext cx="10515600" cy="3291840"/>
+            <a:off x="822960" y="1188720"/>
+            <a:ext cx="10515600" cy="914400"/>
           </a:xfrm>
           <a:prstGeom prst="rect">
             <a:avLst/>
@@ -5348,24 +5047,24 @@
           <a:noFill/>
         </p:spPr>
         <p:txBody>
-          <a:bodyPr wrap="square" anchor="ctr" lIns="0" rIns="0" tIns="0" bIns="0">
+          <a:bodyPr wrap="square" anchor="t" lIns="0" rIns="0" tIns="0" bIns="0">
             <a:spAutoFit/>
           </a:bodyPr>
           <a:lstStyle/>
           <a:p>
             <a:pPr algn="l">
               <a:spcAft>
-                <a:spcPts val="2070"/>
-              </a:spcAft>
-            </a:pPr>
-            <a:r>
-              <a:rPr sz="4600" b="1" i="0">
+                <a:spcPts val="1620"/>
+              </a:spcAft>
+            </a:pPr>
+            <a:r>
+              <a:rPr sz="3600" b="1" i="0">
                 <a:solidFill>
                   <a:srgbClr val="1C1B19"/>
                 </a:solidFill>
                 <a:latin typeface="Source Serif 4"/>
               </a:rPr>
-              <a:t>Mindfulness grew out of Buddhist meditation. Many traditions have their own versions.</a:t>
+              <a:t>Which practice might you try this week, and when?</a:t>
             </a:r>
           </a:p>
         </p:txBody>
@@ -5378,8 +5077,8 @@
         </p:nvSpPr>
         <p:spPr>
           <a:xfrm>
-            <a:off x="822960" y="4846320"/>
-            <a:ext cx="10515600" cy="1097280"/>
+            <a:off x="822960" y="2286000"/>
+            <a:ext cx="10515600" cy="1463040"/>
           </a:xfrm>
           <a:prstGeom prst="rect">
             <a:avLst/>
@@ -5394,17 +5093,141 @@
           <a:p>
             <a:pPr algn="l">
               <a:spcAft>
-                <a:spcPts val="990"/>
-              </a:spcAft>
-            </a:pPr>
-            <a:r>
-              <a:rPr sz="2200" b="0" i="1">
-                <a:solidFill>
-                  <a:srgbClr val="5D5A54"/>
-                </a:solidFill>
-                <a:latin typeface="Source Serif 4"/>
-              </a:rPr>
-              <a:t>Since 1979 it's been taught without religion. That's how we use it here.</a:t>
+                <a:spcPts val="1080"/>
+              </a:spcAft>
+            </a:pPr>
+            <a:r>
+              <a:rPr sz="2400" b="0" i="0">
+                <a:solidFill>
+                  <a:srgbClr val="1C1B19"/>
+                </a:solidFill>
+                <a:latin typeface="Source Serif 4"/>
+              </a:rPr>
+              <a:t>Exit card, no names. The practice cards are linked here.</a:t>
+            </a:r>
+          </a:p>
+        </p:txBody>
+      </p:sp>
+      <p:sp>
+        <p:nvSpPr>
+          <p:cNvPr id="7" name="Rectangle 6"/>
+          <p:cNvSpPr/>
+          <p:nvPr/>
+        </p:nvSpPr>
+        <p:spPr>
+          <a:xfrm>
+            <a:off x="822960" y="4023360"/>
+            <a:ext cx="10515600" cy="1371600"/>
+          </a:xfrm>
+          <a:prstGeom prst="rect">
+            <a:avLst/>
+          </a:prstGeom>
+          <a:solidFill>
+            <a:srgbClr val="FFFFFF"/>
+          </a:solidFill>
+          <a:ln w="15875">
+            <a:solidFill>
+              <a:srgbClr val="1C1B19"/>
+            </a:solidFill>
+          </a:ln>
+          <a:effectLst/>
+        </p:spPr>
+        <p:style>
+          <a:lnRef idx="1">
+            <a:schemeClr val="accent1"/>
+          </a:lnRef>
+          <a:fillRef idx="3">
+            <a:schemeClr val="accent1"/>
+          </a:fillRef>
+          <a:effectRef idx="2">
+            <a:schemeClr val="accent1"/>
+          </a:effectRef>
+          <a:fontRef idx="minor">
+            <a:schemeClr val="lt1"/>
+          </a:fontRef>
+        </p:style>
+        <p:txBody>
+          <a:bodyPr rtlCol="0" anchor="ctr"/>
+          <a:lstStyle/>
+          <a:p>
+            <a:pPr algn="ctr"/>
+          </a:p>
+        </p:txBody>
+      </p:sp>
+      <p:sp>
+        <p:nvSpPr>
+          <p:cNvPr id="8" name="TextBox 7"/>
+          <p:cNvSpPr txBox="1"/>
+          <p:nvPr/>
+        </p:nvSpPr>
+        <p:spPr>
+          <a:xfrm>
+            <a:off x="1097280" y="4206240"/>
+            <a:ext cx="10058400" cy="365760"/>
+          </a:xfrm>
+          <a:prstGeom prst="rect">
+            <a:avLst/>
+          </a:prstGeom>
+          <a:noFill/>
+        </p:spPr>
+        <p:txBody>
+          <a:bodyPr wrap="square" anchor="t" lIns="0" rIns="0" tIns="0" bIns="0">
+            <a:spAutoFit/>
+          </a:bodyPr>
+          <a:lstStyle/>
+          <a:p>
+            <a:pPr algn="l">
+              <a:spcAft>
+                <a:spcPts val="540"/>
+              </a:spcAft>
+            </a:pPr>
+            <a:r>
+              <a:rPr sz="1200" b="1" i="0">
+                <a:solidFill>
+                  <a:srgbClr val="0B2D5B"/>
+                </a:solidFill>
+                <a:latin typeface="Inter Tight"/>
+              </a:rPr>
+              <a:t>STUDENT PAGE</a:t>
+            </a:r>
+          </a:p>
+        </p:txBody>
+      </p:sp>
+      <p:sp>
+        <p:nvSpPr>
+          <p:cNvPr id="9" name="TextBox 8"/>
+          <p:cNvSpPr txBox="1"/>
+          <p:nvPr/>
+        </p:nvSpPr>
+        <p:spPr>
+          <a:xfrm>
+            <a:off x="1097280" y="4617720"/>
+            <a:ext cx="10058400" cy="640080"/>
+          </a:xfrm>
+          <a:prstGeom prst="rect">
+            <a:avLst/>
+          </a:prstGeom>
+          <a:noFill/>
+        </p:spPr>
+        <p:txBody>
+          <a:bodyPr wrap="square" anchor="t" lIns="0" rIns="0" tIns="0" bIns="0">
+            <a:spAutoFit/>
+          </a:bodyPr>
+          <a:lstStyle/>
+          <a:p>
+            <a:pPr algn="l">
+              <a:spcAft>
+                <a:spcPts val="900"/>
+              </a:spcAft>
+            </a:pPr>
+            <a:r>
+              <a:rPr sz="2000" b="0" i="0">
+                <a:solidFill>
+                  <a:srgbClr val="1C1B19"/>
+                </a:solidFill>
+                <a:latin typeface="Inter Tight"/>
+              </a:rPr>
+              <a:t>https://rmwtoolkit.github.io/bcds-toolkit/train-your-attention-high-school.html</a:t>
             </a:r>
           </a:p>
         </p:txBody>
@@ -5418,6 +5241,2340 @@
 </file>
 
 <file path=ppt/slides/slide12.xml><?xml version="1.0" encoding="utf-8"?>
+<p:sld xmlns:a="http://schemas.openxmlformats.org/drawingml/2006/main" xmlns:p="http://schemas.openxmlformats.org/presentationml/2006/main" xmlns:r="http://schemas.openxmlformats.org/officeDocument/2006/relationships" show="0">
+  <p:cSld>
+    <p:bg>
+      <p:bgPr>
+        <a:solidFill>
+          <a:srgbClr val="EEEBE4"/>
+        </a:solidFill>
+        <a:effectLst/>
+      </p:bgPr>
+    </p:bg>
+    <p:spTree>
+      <p:nvGrpSpPr>
+        <p:cNvPr id="1" name=""/>
+        <p:cNvGrpSpPr/>
+        <p:nvPr/>
+      </p:nvGrpSpPr>
+      <p:grpSpPr/>
+      <p:sp>
+        <p:nvSpPr>
+          <p:cNvPr id="2" name="Rectangle 1"/>
+          <p:cNvSpPr/>
+          <p:nvPr/>
+        </p:nvSpPr>
+        <p:spPr>
+          <a:xfrm>
+            <a:off x="0" y="0"/>
+            <a:ext cx="12191695" cy="384048"/>
+          </a:xfrm>
+          <a:prstGeom prst="rect">
+            <a:avLst/>
+          </a:prstGeom>
+          <a:solidFill>
+            <a:srgbClr val="0B2D5B"/>
+          </a:solidFill>
+          <a:ln>
+            <a:noFill/>
+          </a:ln>
+          <a:effectLst/>
+        </p:spPr>
+        <p:style>
+          <a:lnRef idx="1">
+            <a:schemeClr val="accent1"/>
+          </a:lnRef>
+          <a:fillRef idx="3">
+            <a:schemeClr val="accent1"/>
+          </a:fillRef>
+          <a:effectRef idx="2">
+            <a:schemeClr val="accent1"/>
+          </a:effectRef>
+          <a:fontRef idx="minor">
+            <a:schemeClr val="lt1"/>
+          </a:fontRef>
+        </p:style>
+        <p:txBody>
+          <a:bodyPr rtlCol="0" anchor="ctr"/>
+          <a:lstStyle/>
+          <a:p>
+            <a:pPr algn="ctr"/>
+          </a:p>
+        </p:txBody>
+      </p:sp>
+      <p:sp>
+        <p:nvSpPr>
+          <p:cNvPr id="3" name="TextBox 2"/>
+          <p:cNvSpPr txBox="1"/>
+          <p:nvPr/>
+        </p:nvSpPr>
+        <p:spPr>
+          <a:xfrm>
+            <a:off x="548640" y="100584"/>
+            <a:ext cx="10972800" cy="274320"/>
+          </a:xfrm>
+          <a:prstGeom prst="rect">
+            <a:avLst/>
+          </a:prstGeom>
+          <a:noFill/>
+        </p:spPr>
+        <p:txBody>
+          <a:bodyPr wrap="square" anchor="t" lIns="0" rIns="0" tIns="0" bIns="0">
+            <a:spAutoFit/>
+          </a:bodyPr>
+          <a:lstStyle/>
+          <a:p>
+            <a:pPr algn="l">
+              <a:spcAft>
+                <a:spcPts val="495"/>
+              </a:spcAft>
+            </a:pPr>
+            <a:r>
+              <a:rPr sz="1100" b="1" i="0">
+                <a:solidFill>
+                  <a:srgbClr val="FFFFFF"/>
+                </a:solidFill>
+                <a:latin typeface="Inter Tight"/>
+              </a:rPr>
+              <a:t>TEACHER PAGE  ·  skipped when you present  ·  Lesson plan</a:t>
+            </a:r>
+          </a:p>
+        </p:txBody>
+      </p:sp>
+      <p:sp>
+        <p:nvSpPr>
+          <p:cNvPr id="4" name="TextBox 3"/>
+          <p:cNvSpPr txBox="1"/>
+          <p:nvPr/>
+        </p:nvSpPr>
+        <p:spPr>
+          <a:xfrm>
+            <a:off x="548640" y="685800"/>
+            <a:ext cx="10972800" cy="731520"/>
+          </a:xfrm>
+          <a:prstGeom prst="rect">
+            <a:avLst/>
+          </a:prstGeom>
+          <a:noFill/>
+        </p:spPr>
+        <p:txBody>
+          <a:bodyPr wrap="square" anchor="t" lIns="0" rIns="0" tIns="0" bIns="0">
+            <a:spAutoFit/>
+          </a:bodyPr>
+          <a:lstStyle/>
+          <a:p>
+            <a:pPr algn="l">
+              <a:spcAft>
+                <a:spcPts val="1530"/>
+              </a:spcAft>
+            </a:pPr>
+            <a:r>
+              <a:rPr sz="3400" b="1" i="0">
+                <a:solidFill>
+                  <a:srgbClr val="1C1B19"/>
+                </a:solidFill>
+                <a:latin typeface="Source Serif 4"/>
+              </a:rPr>
+              <a:t>Train Your Attention</a:t>
+            </a:r>
+          </a:p>
+        </p:txBody>
+      </p:sp>
+      <p:sp>
+        <p:nvSpPr>
+          <p:cNvPr id="5" name="TextBox 4"/>
+          <p:cNvSpPr txBox="1"/>
+          <p:nvPr/>
+        </p:nvSpPr>
+        <p:spPr>
+          <a:xfrm>
+            <a:off x="548640" y="1325880"/>
+            <a:ext cx="10972800" cy="365760"/>
+          </a:xfrm>
+          <a:prstGeom prst="rect">
+            <a:avLst/>
+          </a:prstGeom>
+          <a:noFill/>
+        </p:spPr>
+        <p:txBody>
+          <a:bodyPr wrap="square" anchor="t" lIns="0" rIns="0" tIns="0" bIns="0">
+            <a:spAutoFit/>
+          </a:bodyPr>
+          <a:lstStyle/>
+          <a:p>
+            <a:pPr algn="l">
+              <a:spcAft>
+                <a:spcPts val="630"/>
+              </a:spcAft>
+            </a:pPr>
+            <a:r>
+              <a:rPr sz="1400" b="0" i="0">
+                <a:solidFill>
+                  <a:srgbClr val="5D5A54"/>
+                </a:solidFill>
+                <a:latin typeface="Inter Tight"/>
+              </a:rPr>
+              <a:t>Upper School  ·  45 minutes (20-minute advisory version below)  ·  Health class, advisory, or a counselor-led group</a:t>
+            </a:r>
+          </a:p>
+        </p:txBody>
+      </p:sp>
+      <p:sp>
+        <p:nvSpPr>
+          <p:cNvPr id="6" name="TextBox 5"/>
+          <p:cNvSpPr txBox="1"/>
+          <p:nvPr/>
+        </p:nvSpPr>
+        <p:spPr>
+          <a:xfrm>
+            <a:off x="548640" y="1828800"/>
+            <a:ext cx="5120640" cy="4389120"/>
+          </a:xfrm>
+          <a:prstGeom prst="rect">
+            <a:avLst/>
+          </a:prstGeom>
+          <a:noFill/>
+        </p:spPr>
+        <p:txBody>
+          <a:bodyPr wrap="square" anchor="t" lIns="0" rIns="0" tIns="0" bIns="0">
+            <a:spAutoFit/>
+          </a:bodyPr>
+          <a:lstStyle/>
+          <a:p>
+            <a:pPr algn="l">
+              <a:spcAft>
+                <a:spcPts val="675"/>
+              </a:spcAft>
+            </a:pPr>
+            <a:r>
+              <a:rPr sz="1100" b="1" i="0">
+                <a:solidFill>
+                  <a:srgbClr val="0B2D5B"/>
+                </a:solidFill>
+                <a:latin typeface="Inter Tight"/>
+              </a:rPr>
+              <a:t>GOAL</a:t>
+            </a:r>
+          </a:p>
+          <a:p>
+            <a:pPr algn="l">
+              <a:spcAft>
+                <a:spcPts val="675"/>
+              </a:spcAft>
+            </a:pPr>
+            <a:r>
+              <a:rPr sz="1500" b="0" i="0">
+                <a:solidFill>
+                  <a:srgbClr val="1C1B19"/>
+                </a:solidFill>
+                <a:latin typeface="Source Serif 4"/>
+              </a:rPr>
+              <a:t>Students can explain what mindfulness is and isn't, describe what the research does and doesn't show about attention and the brain, and try one short practice of their choosing. Nobody has to close their eyes, share what they noticed, or keep practicing.</a:t>
+            </a:r>
+          </a:p>
+          <a:p>
+            <a:pPr algn="l">
+              <a:spcAft>
+                <a:spcPts val="675"/>
+              </a:spcAft>
+            </a:pPr>
+            <a:r>
+              <a:rPr sz="1500" b="0" i="0">
+                <a:solidFill>
+                  <a:srgbClr val="1C1B19"/>
+                </a:solidFill>
+                <a:latin typeface="Source Serif 4"/>
+              </a:rPr>
+              <a:t/>
+            </a:r>
+          </a:p>
+          <a:p>
+            <a:pPr algn="l">
+              <a:spcAft>
+                <a:spcPts val="675"/>
+              </a:spcAft>
+            </a:pPr>
+            <a:r>
+              <a:rPr sz="1100" b="1" i="0">
+                <a:solidFill>
+                  <a:srgbClr val="0B2D5B"/>
+                </a:solidFill>
+                <a:latin typeface="Inter Tight"/>
+              </a:rPr>
+              <a:t>MATERIALS</a:t>
+            </a:r>
+          </a:p>
+          <a:p>
+            <a:pPr algn="l">
+              <a:spcAft>
+                <a:spcPts val="675"/>
+              </a:spcAft>
+            </a:pPr>
+            <a:r>
+              <a:rPr sz="1500" b="0" i="0">
+                <a:solidFill>
+                  <a:srgbClr val="1C1B19"/>
+                </a:solidFill>
+                <a:latin typeface="Source Serif 4"/>
+              </a:rPr>
+              <a:t>A timer you can see or hear</a:t>
+            </a:r>
+          </a:p>
+          <a:p>
+            <a:pPr algn="l">
+              <a:spcAft>
+                <a:spcPts val="675"/>
+              </a:spcAft>
+            </a:pPr>
+            <a:r>
+              <a:rPr sz="1500" b="0" i="0">
+                <a:solidFill>
+                  <a:srgbClr val="1C1B19"/>
+                </a:solidFill>
+                <a:latin typeface="Source Serif 4"/>
+              </a:rPr>
+              <a:t>Index cards, one per student</a:t>
+            </a:r>
+          </a:p>
+          <a:p>
+            <a:pPr algn="l">
+              <a:spcAft>
+                <a:spcPts val="675"/>
+              </a:spcAft>
+            </a:pPr>
+            <a:r>
+              <a:rPr sz="1500" b="0" i="0">
+                <a:solidFill>
+                  <a:srgbClr val="1C1B19"/>
+                </a:solidFill>
+                <a:latin typeface="Source Serif 4"/>
+              </a:rPr>
+              <a:t>The five practice cards (links on the last slide) to share after class</a:t>
+            </a:r>
+          </a:p>
+        </p:txBody>
+      </p:sp>
+      <p:sp>
+        <p:nvSpPr>
+          <p:cNvPr id="7" name="TextBox 6"/>
+          <p:cNvSpPr txBox="1"/>
+          <p:nvPr/>
+        </p:nvSpPr>
+        <p:spPr>
+          <a:xfrm>
+            <a:off x="6126480" y="1828800"/>
+            <a:ext cx="5486400" cy="4389120"/>
+          </a:xfrm>
+          <a:prstGeom prst="rect">
+            <a:avLst/>
+          </a:prstGeom>
+          <a:noFill/>
+        </p:spPr>
+        <p:txBody>
+          <a:bodyPr wrap="square" anchor="t" lIns="0" rIns="0" tIns="0" bIns="0">
+            <a:spAutoFit/>
+          </a:bodyPr>
+          <a:lstStyle/>
+          <a:p>
+            <a:pPr algn="l">
+              <a:spcAft>
+                <a:spcPts val="630"/>
+              </a:spcAft>
+            </a:pPr>
+            <a:r>
+              <a:rPr sz="1100" b="1" i="0">
+                <a:solidFill>
+                  <a:srgbClr val="0B2D5B"/>
+                </a:solidFill>
+                <a:latin typeface="Inter Tight"/>
+              </a:rPr>
+              <a:t>FLOW</a:t>
+            </a:r>
+          </a:p>
+          <a:p>
+            <a:pPr algn="l">
+              <a:spcAft>
+                <a:spcPts val="630"/>
+              </a:spcAft>
+            </a:pPr>
+            <a:r>
+              <a:rPr sz="1300" b="1" i="0">
+                <a:solidFill>
+                  <a:srgbClr val="F47B20"/>
+                </a:solidFill>
+                <a:latin typeface="Inter Tight"/>
+              </a:rPr>
+              <a:t>5 min   </a:t>
+            </a:r>
+            <a:r>
+              <a:rPr sz="1400" b="0" i="0">
+                <a:solidFill>
+                  <a:srgbClr val="1C1B19"/>
+                </a:solidFill>
+                <a:latin typeface="Source Serif 4"/>
+              </a:rPr>
+              <a:t>One minute of noticing</a:t>
+            </a:r>
+          </a:p>
+          <a:p>
+            <a:pPr algn="l">
+              <a:spcAft>
+                <a:spcPts val="630"/>
+              </a:spcAft>
+            </a:pPr>
+            <a:r>
+              <a:rPr sz="1300" b="1" i="0">
+                <a:solidFill>
+                  <a:srgbClr val="F47B20"/>
+                </a:solidFill>
+                <a:latin typeface="Inter Tight"/>
+              </a:rPr>
+              <a:t>5 min   </a:t>
+            </a:r>
+            <a:r>
+              <a:rPr sz="1400" b="0" i="0">
+                <a:solidFill>
+                  <a:srgbClr val="1C1B19"/>
+                </a:solidFill>
+                <a:latin typeface="Source Serif 4"/>
+              </a:rPr>
+              <a:t>What mindfulness is (and isn't)</a:t>
+            </a:r>
+          </a:p>
+          <a:p>
+            <a:pPr algn="l">
+              <a:spcAft>
+                <a:spcPts val="630"/>
+              </a:spcAft>
+            </a:pPr>
+            <a:r>
+              <a:rPr sz="1300" b="1" i="0">
+                <a:solidFill>
+                  <a:srgbClr val="F47B20"/>
+                </a:solidFill>
+                <a:latin typeface="Inter Tight"/>
+              </a:rPr>
+              <a:t>10 min   </a:t>
+            </a:r>
+            <a:r>
+              <a:rPr sz="1400" b="0" i="0">
+                <a:solidFill>
+                  <a:srgbClr val="1C1B19"/>
+                </a:solidFill>
+                <a:latin typeface="Source Serif 4"/>
+              </a:rPr>
+              <a:t>The research: attention, the brain, and honest limits</a:t>
+            </a:r>
+          </a:p>
+          <a:p>
+            <a:pPr algn="l">
+              <a:spcAft>
+                <a:spcPts val="630"/>
+              </a:spcAft>
+            </a:pPr>
+            <a:r>
+              <a:rPr sz="1300" b="1" i="0">
+                <a:solidFill>
+                  <a:srgbClr val="F47B20"/>
+                </a:solidFill>
+                <a:latin typeface="Inter Tight"/>
+              </a:rPr>
+              <a:t>5 min   </a:t>
+            </a:r>
+            <a:r>
+              <a:rPr sz="1400" b="0" i="0">
+                <a:solidFill>
+                  <a:srgbClr val="1C1B19"/>
+                </a:solidFill>
+                <a:latin typeface="Source Serif 4"/>
+              </a:rPr>
+              <a:t>Where it comes from</a:t>
+            </a:r>
+          </a:p>
+          <a:p>
+            <a:pPr algn="l">
+              <a:spcAft>
+                <a:spcPts val="630"/>
+              </a:spcAft>
+            </a:pPr>
+            <a:r>
+              <a:rPr sz="1300" b="1" i="0">
+                <a:solidFill>
+                  <a:srgbClr val="F47B20"/>
+                </a:solidFill>
+                <a:latin typeface="Inter Tight"/>
+              </a:rPr>
+              <a:t>5 min   </a:t>
+            </a:r>
+            <a:r>
+              <a:rPr sz="1400" b="0" i="0">
+                <a:solidFill>
+                  <a:srgbClr val="1C1B19"/>
+                </a:solidFill>
+                <a:latin typeface="Source Serif 4"/>
+              </a:rPr>
+              <a:t>Five ways in</a:t>
+            </a:r>
+          </a:p>
+          <a:p>
+            <a:pPr algn="l">
+              <a:spcAft>
+                <a:spcPts val="630"/>
+              </a:spcAft>
+            </a:pPr>
+            <a:r>
+              <a:rPr sz="1300" b="1" i="0">
+                <a:solidFill>
+                  <a:srgbClr val="F47B20"/>
+                </a:solidFill>
+                <a:latin typeface="Inter Tight"/>
+              </a:rPr>
+              <a:t>10 min   </a:t>
+            </a:r>
+            <a:r>
+              <a:rPr sz="1400" b="0" i="0">
+                <a:solidFill>
+                  <a:srgbClr val="1C1B19"/>
+                </a:solidFill>
+                <a:latin typeface="Source Serif 4"/>
+              </a:rPr>
+              <a:t>Try one (student's choice, eyes open is fine)</a:t>
+            </a:r>
+          </a:p>
+          <a:p>
+            <a:pPr algn="l">
+              <a:spcAft>
+                <a:spcPts val="630"/>
+              </a:spcAft>
+            </a:pPr>
+            <a:r>
+              <a:rPr sz="1300" b="1" i="0">
+                <a:solidFill>
+                  <a:srgbClr val="F47B20"/>
+                </a:solidFill>
+                <a:latin typeface="Inter Tight"/>
+              </a:rPr>
+              <a:t>5 min   </a:t>
+            </a:r>
+            <a:r>
+              <a:rPr sz="1400" b="0" i="0">
+                <a:solidFill>
+                  <a:srgbClr val="1C1B19"/>
+                </a:solidFill>
+                <a:latin typeface="Source Serif 4"/>
+              </a:rPr>
+              <a:t>Exit card and practice links</a:t>
+            </a:r>
+          </a:p>
+          <a:p>
+            <a:pPr algn="l">
+              <a:spcAft>
+                <a:spcPts val="630"/>
+              </a:spcAft>
+            </a:pPr>
+            <a:r>
+              <a:rPr sz="1400" b="0" i="0">
+                <a:solidFill>
+                  <a:srgbClr val="1C1B19"/>
+                </a:solidFill>
+                <a:latin typeface="Source Serif 4"/>
+              </a:rPr>
+              <a:t/>
+            </a:r>
+          </a:p>
+          <a:p>
+            <a:pPr algn="l">
+              <a:spcAft>
+                <a:spcPts val="630"/>
+              </a:spcAft>
+            </a:pPr>
+            <a:r>
+              <a:rPr sz="1100" b="1" i="0">
+                <a:solidFill>
+                  <a:srgbClr val="0B2D5B"/>
+                </a:solidFill>
+                <a:latin typeface="Inter Tight"/>
+              </a:rPr>
+              <a:t>SHORT ON TIME (20-MINUTE ADVISORY)</a:t>
+            </a:r>
+          </a:p>
+          <a:p>
+            <a:pPr algn="l">
+              <a:spcAft>
+                <a:spcPts val="630"/>
+              </a:spcAft>
+            </a:pPr>
+            <a:r>
+              <a:rPr sz="1400" b="0" i="0">
+                <a:solidFill>
+                  <a:srgbClr val="1C1B19"/>
+                </a:solidFill>
+                <a:latin typeface="Source Serif 4"/>
+              </a:rPr>
+              <a:t>One minute of noticing (3), what it is and isn't (4), the brain research slide (5), try one practice (5), exit card (3). Share the practice links so students can pick their own.</a:t>
+            </a:r>
+          </a:p>
+        </p:txBody>
+      </p:sp>
+    </p:spTree>
+  </p:cSld>
+  <p:clrMapOvr>
+    <a:masterClrMapping/>
+  </p:clrMapOvr>
+</p:sld>
+</file>
+
+<file path=ppt/slides/slide13.xml><?xml version="1.0" encoding="utf-8"?>
+<p:sld xmlns:a="http://schemas.openxmlformats.org/drawingml/2006/main" xmlns:p="http://schemas.openxmlformats.org/presentationml/2006/main" xmlns:r="http://schemas.openxmlformats.org/officeDocument/2006/relationships" show="0">
+  <p:cSld>
+    <p:bg>
+      <p:bgPr>
+        <a:solidFill>
+          <a:srgbClr val="EEEBE4"/>
+        </a:solidFill>
+        <a:effectLst/>
+      </p:bgPr>
+    </p:bg>
+    <p:spTree>
+      <p:nvGrpSpPr>
+        <p:cNvPr id="1" name=""/>
+        <p:cNvGrpSpPr/>
+        <p:nvPr/>
+      </p:nvGrpSpPr>
+      <p:grpSpPr/>
+      <p:sp>
+        <p:nvSpPr>
+          <p:cNvPr id="2" name="Rectangle 1"/>
+          <p:cNvSpPr/>
+          <p:nvPr/>
+        </p:nvSpPr>
+        <p:spPr>
+          <a:xfrm>
+            <a:off x="0" y="0"/>
+            <a:ext cx="12191695" cy="384048"/>
+          </a:xfrm>
+          <a:prstGeom prst="rect">
+            <a:avLst/>
+          </a:prstGeom>
+          <a:solidFill>
+            <a:srgbClr val="0B2D5B"/>
+          </a:solidFill>
+          <a:ln>
+            <a:noFill/>
+          </a:ln>
+          <a:effectLst/>
+        </p:spPr>
+        <p:style>
+          <a:lnRef idx="1">
+            <a:schemeClr val="accent1"/>
+          </a:lnRef>
+          <a:fillRef idx="3">
+            <a:schemeClr val="accent1"/>
+          </a:fillRef>
+          <a:effectRef idx="2">
+            <a:schemeClr val="accent1"/>
+          </a:effectRef>
+          <a:fontRef idx="minor">
+            <a:schemeClr val="lt1"/>
+          </a:fontRef>
+        </p:style>
+        <p:txBody>
+          <a:bodyPr rtlCol="0" anchor="ctr"/>
+          <a:lstStyle/>
+          <a:p>
+            <a:pPr algn="ctr"/>
+          </a:p>
+        </p:txBody>
+      </p:sp>
+      <p:sp>
+        <p:nvSpPr>
+          <p:cNvPr id="3" name="TextBox 2"/>
+          <p:cNvSpPr txBox="1"/>
+          <p:nvPr/>
+        </p:nvSpPr>
+        <p:spPr>
+          <a:xfrm>
+            <a:off x="548640" y="100584"/>
+            <a:ext cx="10972800" cy="274320"/>
+          </a:xfrm>
+          <a:prstGeom prst="rect">
+            <a:avLst/>
+          </a:prstGeom>
+          <a:noFill/>
+        </p:spPr>
+        <p:txBody>
+          <a:bodyPr wrap="square" anchor="t" lIns="0" rIns="0" tIns="0" bIns="0">
+            <a:spAutoFit/>
+          </a:bodyPr>
+          <a:lstStyle/>
+          <a:p>
+            <a:pPr algn="l">
+              <a:spcAft>
+                <a:spcPts val="495"/>
+              </a:spcAft>
+            </a:pPr>
+            <a:r>
+              <a:rPr sz="1100" b="1" i="0">
+                <a:solidFill>
+                  <a:srgbClr val="FFFFFF"/>
+                </a:solidFill>
+                <a:latin typeface="Inter Tight"/>
+              </a:rPr>
+              <a:t>TEACHER PAGE  ·  skipped when you present  ·  Before you teach</a:t>
+            </a:r>
+          </a:p>
+        </p:txBody>
+      </p:sp>
+      <p:sp>
+        <p:nvSpPr>
+          <p:cNvPr id="4" name="TextBox 3"/>
+          <p:cNvSpPr txBox="1"/>
+          <p:nvPr/>
+        </p:nvSpPr>
+        <p:spPr>
+          <a:xfrm>
+            <a:off x="548640" y="685800"/>
+            <a:ext cx="10972800" cy="640080"/>
+          </a:xfrm>
+          <a:prstGeom prst="rect">
+            <a:avLst/>
+          </a:prstGeom>
+          <a:noFill/>
+        </p:spPr>
+        <p:txBody>
+          <a:bodyPr wrap="square" anchor="t" lIns="0" rIns="0" tIns="0" bIns="0">
+            <a:spAutoFit/>
+          </a:bodyPr>
+          <a:lstStyle/>
+          <a:p>
+            <a:pPr algn="l">
+              <a:spcAft>
+                <a:spcPts val="1350"/>
+              </a:spcAft>
+            </a:pPr>
+            <a:r>
+              <a:rPr sz="3000" b="1" i="0">
+                <a:solidFill>
+                  <a:srgbClr val="1C1B19"/>
+                </a:solidFill>
+                <a:latin typeface="Source Serif 4"/>
+              </a:rPr>
+              <a:t>Before you teach</a:t>
+            </a:r>
+          </a:p>
+        </p:txBody>
+      </p:sp>
+      <p:sp>
+        <p:nvSpPr>
+          <p:cNvPr id="5" name="TextBox 4"/>
+          <p:cNvSpPr txBox="1"/>
+          <p:nvPr/>
+        </p:nvSpPr>
+        <p:spPr>
+          <a:xfrm>
+            <a:off x="548640" y="1463040"/>
+            <a:ext cx="5394960" cy="4937760"/>
+          </a:xfrm>
+          <a:prstGeom prst="rect">
+            <a:avLst/>
+          </a:prstGeom>
+          <a:noFill/>
+        </p:spPr>
+        <p:txBody>
+          <a:bodyPr wrap="square" anchor="t" lIns="0" rIns="0" tIns="0" bIns="0">
+            <a:spAutoFit/>
+          </a:bodyPr>
+          <a:lstStyle/>
+          <a:p>
+            <a:pPr algn="l">
+              <a:spcAft>
+                <a:spcPts val="585"/>
+              </a:spcAft>
+            </a:pPr>
+            <a:r>
+              <a:rPr sz="1500" b="1" i="0">
+                <a:solidFill>
+                  <a:srgbClr val="1C1B19"/>
+                </a:solidFill>
+                <a:latin typeface="Source Serif 4"/>
+              </a:rPr>
+              <a:t>Invite, never require.</a:t>
+            </a:r>
+          </a:p>
+          <a:p>
+            <a:pPr algn="l">
+              <a:spcAft>
+                <a:spcPts val="585"/>
+              </a:spcAft>
+            </a:pPr>
+            <a:r>
+              <a:rPr sz="1300" b="0" i="0">
+                <a:solidFill>
+                  <a:srgbClr val="1C1B19"/>
+                </a:solidFill>
+                <a:latin typeface="Source Serif 4"/>
+              </a:rPr>
+              <a:t>Every practice is optional. Students can keep their eyes open, look at the desk, doodle quietly, or just sit. Say so before every practice. A student who opts out is following the instructions.</a:t>
+            </a:r>
+          </a:p>
+          <a:p>
+            <a:pPr algn="l">
+              <a:spcAft>
+                <a:spcPts val="585"/>
+              </a:spcAft>
+            </a:pPr>
+            <a:r>
+              <a:rPr sz="1300" b="0" i="0">
+                <a:solidFill>
+                  <a:srgbClr val="1C1B19"/>
+                </a:solidFill>
+                <a:latin typeface="Source Serif 4"/>
+              </a:rPr>
+              <a:t/>
+            </a:r>
+          </a:p>
+          <a:p>
+            <a:pPr algn="l">
+              <a:spcAft>
+                <a:spcPts val="585"/>
+              </a:spcAft>
+            </a:pPr>
+            <a:r>
+              <a:rPr sz="1500" b="1" i="0">
+                <a:solidFill>
+                  <a:srgbClr val="1C1B19"/>
+                </a:solidFill>
+                <a:latin typeface="Source Serif 4"/>
+              </a:rPr>
+              <a:t>Breath focus isn't calming for everyone.</a:t>
+            </a:r>
+          </a:p>
+          <a:p>
+            <a:pPr algn="l">
+              <a:spcAft>
+                <a:spcPts val="585"/>
+              </a:spcAft>
+            </a:pPr>
+            <a:r>
+              <a:rPr sz="1300" b="0" i="0">
+                <a:solidFill>
+                  <a:srgbClr val="1C1B19"/>
+                </a:solidFill>
+                <a:latin typeface="Source Serif 4"/>
+              </a:rPr>
+              <a:t>For some students, paying attention to breathing raises anxiety. Always offer another anchor: sounds, hands on the desk, feet on the floor. If a student looks distressed, invite them to open their eyes and look around the room.</a:t>
+            </a:r>
+          </a:p>
+          <a:p>
+            <a:pPr algn="l">
+              <a:spcAft>
+                <a:spcPts val="585"/>
+              </a:spcAft>
+            </a:pPr>
+            <a:r>
+              <a:rPr sz="1300" b="0" i="0">
+                <a:solidFill>
+                  <a:srgbClr val="1C1B19"/>
+                </a:solidFill>
+                <a:latin typeface="Source Serif 4"/>
+              </a:rPr>
+              <a:t/>
+            </a:r>
+          </a:p>
+          <a:p>
+            <a:pPr algn="l">
+              <a:spcAft>
+                <a:spcPts val="585"/>
+              </a:spcAft>
+            </a:pPr>
+            <a:r>
+              <a:rPr sz="1500" b="1" i="0">
+                <a:solidFill>
+                  <a:srgbClr val="1C1B19"/>
+                </a:solidFill>
+                <a:latin typeface="Source Serif 4"/>
+              </a:rPr>
+              <a:t>Trauma and the body.</a:t>
+            </a:r>
+          </a:p>
+          <a:p>
+            <a:pPr algn="l">
+              <a:spcAft>
+                <a:spcPts val="585"/>
+              </a:spcAft>
+            </a:pPr>
+            <a:r>
+              <a:rPr sz="1300" b="0" i="0">
+                <a:solidFill>
+                  <a:srgbClr val="1C1B19"/>
+                </a:solidFill>
+                <a:latin typeface="Source Serif 4"/>
+              </a:rPr>
+              <a:t>Students who have lived through something frightening, or who struggle with body image or eating, may find body-focused practices uncomfortable or upsetting. Don't do a full body scan in class; leave it on the practice card for students to choose. Watch for students who seem far away or frozen, and bring the group back gently with eyes open and a few normal sounds.</a:t>
+            </a:r>
+          </a:p>
+          <a:p>
+            <a:pPr algn="l">
+              <a:spcAft>
+                <a:spcPts val="585"/>
+              </a:spcAft>
+            </a:pPr>
+            <a:r>
+              <a:rPr sz="1300" b="0" i="0">
+                <a:solidFill>
+                  <a:srgbClr val="1C1B19"/>
+                </a:solidFill>
+                <a:latin typeface="Source Serif 4"/>
+              </a:rPr>
+              <a:t/>
+            </a:r>
+          </a:p>
+        </p:txBody>
+      </p:sp>
+      <p:sp>
+        <p:nvSpPr>
+          <p:cNvPr id="6" name="TextBox 5"/>
+          <p:cNvSpPr txBox="1"/>
+          <p:nvPr/>
+        </p:nvSpPr>
+        <p:spPr>
+          <a:xfrm>
+            <a:off x="6217920" y="1463040"/>
+            <a:ext cx="5394960" cy="4937760"/>
+          </a:xfrm>
+          <a:prstGeom prst="rect">
+            <a:avLst/>
+          </a:prstGeom>
+          <a:noFill/>
+        </p:spPr>
+        <p:txBody>
+          <a:bodyPr wrap="square" anchor="t" lIns="0" rIns="0" tIns="0" bIns="0">
+            <a:spAutoFit/>
+          </a:bodyPr>
+          <a:lstStyle/>
+          <a:p>
+            <a:pPr algn="l">
+              <a:spcAft>
+                <a:spcPts val="585"/>
+              </a:spcAft>
+            </a:pPr>
+            <a:r>
+              <a:rPr sz="1500" b="1" i="0">
+                <a:solidFill>
+                  <a:srgbClr val="1C1B19"/>
+                </a:solidFill>
+                <a:latin typeface="Source Serif 4"/>
+              </a:rPr>
+              <a:t>When to bring in a counselor.</a:t>
+            </a:r>
+          </a:p>
+          <a:p>
+            <a:pPr algn="l">
+              <a:spcAft>
+                <a:spcPts val="585"/>
+              </a:spcAft>
+            </a:pPr>
+            <a:r>
+              <a:rPr sz="1300" b="0" i="0">
+                <a:solidFill>
+                  <a:srgbClr val="1C1B19"/>
+                </a:solidFill>
+                <a:latin typeface="Source Serif 4"/>
+              </a:rPr>
+              <a:t>Refer the same day if a practice brings on panic, a flashback, or a student seeming disconnected for more than a few minutes. Also refer if a student mentions they can't sleep, can't stop worrying, or feels hopeless. Disclosures go to a counselor. No screening questions in class.</a:t>
+            </a:r>
+          </a:p>
+          <a:p>
+            <a:pPr algn="l">
+              <a:spcAft>
+                <a:spcPts val="585"/>
+              </a:spcAft>
+            </a:pPr>
+            <a:r>
+              <a:rPr sz="1300" b="0" i="0">
+                <a:solidFill>
+                  <a:srgbClr val="1C1B19"/>
+                </a:solidFill>
+                <a:latin typeface="Source Serif 4"/>
+              </a:rPr>
+              <a:t/>
+            </a:r>
+          </a:p>
+          <a:p>
+            <a:pPr algn="l">
+              <a:spcAft>
+                <a:spcPts val="585"/>
+              </a:spcAft>
+            </a:pPr>
+            <a:r>
+              <a:rPr sz="1500" b="1" i="0">
+                <a:solidFill>
+                  <a:srgbClr val="1C1B19"/>
+                </a:solidFill>
+                <a:latin typeface="Source Serif 4"/>
+              </a:rPr>
+              <a:t>Don't oversell it.</a:t>
+            </a:r>
+          </a:p>
+          <a:p>
+            <a:pPr algn="l">
+              <a:spcAft>
+                <a:spcPts val="585"/>
+              </a:spcAft>
+            </a:pPr>
+            <a:r>
+              <a:rPr sz="1300" b="0" i="0">
+                <a:solidFill>
+                  <a:srgbClr val="1C1B19"/>
+                </a:solidFill>
+                <a:latin typeface="Source Serif 4"/>
+              </a:rPr>
+              <a:t>Mindfulness is a useful skill, not a treatment for depression or anxiety, and it doesn't replace counseling. The research slides give you honest language. If a student says it didn't work for them, that's a reasonable result.</a:t>
+            </a:r>
+          </a:p>
+          <a:p>
+            <a:pPr algn="l">
+              <a:spcAft>
+                <a:spcPts val="585"/>
+              </a:spcAft>
+            </a:pPr>
+            <a:r>
+              <a:rPr sz="1300" b="0" i="0">
+                <a:solidFill>
+                  <a:srgbClr val="1C1B19"/>
+                </a:solidFill>
+                <a:latin typeface="Source Serif 4"/>
+              </a:rPr>
+              <a:t/>
+            </a:r>
+          </a:p>
+          <a:p>
+            <a:pPr algn="l">
+              <a:spcAft>
+                <a:spcPts val="585"/>
+              </a:spcAft>
+            </a:pPr>
+            <a:r>
+              <a:rPr sz="1500" b="1" i="0">
+                <a:solidFill>
+                  <a:srgbClr val="1C1B19"/>
+                </a:solidFill>
+                <a:latin typeface="Source Serif 4"/>
+              </a:rPr>
+              <a:t>Keep it secular in class, and honor the roots.</a:t>
+            </a:r>
+          </a:p>
+          <a:p>
+            <a:pPr algn="l">
+              <a:spcAft>
+                <a:spcPts val="585"/>
+              </a:spcAft>
+            </a:pPr>
+            <a:r>
+              <a:rPr sz="1300" b="0" i="0">
+                <a:solidFill>
+                  <a:srgbClr val="1C1B19"/>
+                </a:solidFill>
+                <a:latin typeface="Source Serif 4"/>
+              </a:rPr>
+              <a:t>Name the Buddhist origins plainly (slide 7). Don't ask students to chant, bow, or adopt any belief. Students whose families object can sit quietly or read during the practice.</a:t>
+            </a:r>
+          </a:p>
+          <a:p>
+            <a:pPr algn="l">
+              <a:spcAft>
+                <a:spcPts val="585"/>
+              </a:spcAft>
+            </a:pPr>
+            <a:r>
+              <a:rPr sz="1300" b="0" i="0">
+                <a:solidFill>
+                  <a:srgbClr val="1C1B19"/>
+                </a:solidFill>
+                <a:latin typeface="Source Serif 4"/>
+              </a:rPr>
+              <a:t/>
+            </a:r>
+          </a:p>
+        </p:txBody>
+      </p:sp>
+    </p:spTree>
+  </p:cSld>
+  <p:clrMapOvr>
+    <a:masterClrMapping/>
+  </p:clrMapOvr>
+</p:sld>
+</file>
+
+<file path=ppt/slides/slide14.xml><?xml version="1.0" encoding="utf-8"?>
+<p:sld xmlns:a="http://schemas.openxmlformats.org/drawingml/2006/main" xmlns:p="http://schemas.openxmlformats.org/presentationml/2006/main" xmlns:r="http://schemas.openxmlformats.org/officeDocument/2006/relationships" show="0">
+  <p:cSld>
+    <p:bg>
+      <p:bgPr>
+        <a:solidFill>
+          <a:srgbClr val="EEEBE4"/>
+        </a:solidFill>
+        <a:effectLst/>
+      </p:bgPr>
+    </p:bg>
+    <p:spTree>
+      <p:nvGrpSpPr>
+        <p:cNvPr id="1" name=""/>
+        <p:cNvGrpSpPr/>
+        <p:nvPr/>
+      </p:nvGrpSpPr>
+      <p:grpSpPr/>
+      <p:sp>
+        <p:nvSpPr>
+          <p:cNvPr id="2" name="Rectangle 1"/>
+          <p:cNvSpPr/>
+          <p:nvPr/>
+        </p:nvSpPr>
+        <p:spPr>
+          <a:xfrm>
+            <a:off x="0" y="0"/>
+            <a:ext cx="12191695" cy="384048"/>
+          </a:xfrm>
+          <a:prstGeom prst="rect">
+            <a:avLst/>
+          </a:prstGeom>
+          <a:solidFill>
+            <a:srgbClr val="0B2D5B"/>
+          </a:solidFill>
+          <a:ln>
+            <a:noFill/>
+          </a:ln>
+          <a:effectLst/>
+        </p:spPr>
+        <p:style>
+          <a:lnRef idx="1">
+            <a:schemeClr val="accent1"/>
+          </a:lnRef>
+          <a:fillRef idx="3">
+            <a:schemeClr val="accent1"/>
+          </a:fillRef>
+          <a:effectRef idx="2">
+            <a:schemeClr val="accent1"/>
+          </a:effectRef>
+          <a:fontRef idx="minor">
+            <a:schemeClr val="lt1"/>
+          </a:fontRef>
+        </p:style>
+        <p:txBody>
+          <a:bodyPr rtlCol="0" anchor="ctr"/>
+          <a:lstStyle/>
+          <a:p>
+            <a:pPr algn="ctr"/>
+          </a:p>
+        </p:txBody>
+      </p:sp>
+      <p:sp>
+        <p:nvSpPr>
+          <p:cNvPr id="3" name="TextBox 2"/>
+          <p:cNvSpPr txBox="1"/>
+          <p:nvPr/>
+        </p:nvSpPr>
+        <p:spPr>
+          <a:xfrm>
+            <a:off x="548640" y="100584"/>
+            <a:ext cx="10972800" cy="274320"/>
+          </a:xfrm>
+          <a:prstGeom prst="rect">
+            <a:avLst/>
+          </a:prstGeom>
+          <a:noFill/>
+        </p:spPr>
+        <p:txBody>
+          <a:bodyPr wrap="square" anchor="t" lIns="0" rIns="0" tIns="0" bIns="0">
+            <a:spAutoFit/>
+          </a:bodyPr>
+          <a:lstStyle/>
+          <a:p>
+            <a:pPr algn="l">
+              <a:spcAft>
+                <a:spcPts val="495"/>
+              </a:spcAft>
+            </a:pPr>
+            <a:r>
+              <a:rPr sz="1100" b="1" i="0">
+                <a:solidFill>
+                  <a:srgbClr val="FFFFFF"/>
+                </a:solidFill>
+                <a:latin typeface="Inter Tight"/>
+              </a:rPr>
+              <a:t>TEACHER PAGE  ·  skipped when you present  ·  Every student in the room</a:t>
+            </a:r>
+          </a:p>
+        </p:txBody>
+      </p:sp>
+      <p:sp>
+        <p:nvSpPr>
+          <p:cNvPr id="4" name="TextBox 3"/>
+          <p:cNvSpPr txBox="1"/>
+          <p:nvPr/>
+        </p:nvSpPr>
+        <p:spPr>
+          <a:xfrm>
+            <a:off x="548640" y="685800"/>
+            <a:ext cx="10972800" cy="640080"/>
+          </a:xfrm>
+          <a:prstGeom prst="rect">
+            <a:avLst/>
+          </a:prstGeom>
+          <a:noFill/>
+        </p:spPr>
+        <p:txBody>
+          <a:bodyPr wrap="square" anchor="t" lIns="0" rIns="0" tIns="0" bIns="0">
+            <a:spAutoFit/>
+          </a:bodyPr>
+          <a:lstStyle/>
+          <a:p>
+            <a:pPr algn="l">
+              <a:spcAft>
+                <a:spcPts val="1350"/>
+              </a:spcAft>
+            </a:pPr>
+            <a:r>
+              <a:rPr sz="3000" b="1" i="0">
+                <a:solidFill>
+                  <a:srgbClr val="1C1B19"/>
+                </a:solidFill>
+                <a:latin typeface="Source Serif 4"/>
+              </a:rPr>
+              <a:t>Every student in the room</a:t>
+            </a:r>
+          </a:p>
+        </p:txBody>
+      </p:sp>
+      <p:sp>
+        <p:nvSpPr>
+          <p:cNvPr id="5" name="TextBox 4"/>
+          <p:cNvSpPr txBox="1"/>
+          <p:nvPr/>
+        </p:nvSpPr>
+        <p:spPr>
+          <a:xfrm>
+            <a:off x="548640" y="1325880"/>
+            <a:ext cx="10972800" cy="365760"/>
+          </a:xfrm>
+          <a:prstGeom prst="rect">
+            <a:avLst/>
+          </a:prstGeom>
+          <a:noFill/>
+        </p:spPr>
+        <p:txBody>
+          <a:bodyPr wrap="square" anchor="t" lIns="0" rIns="0" tIns="0" bIns="0">
+            <a:spAutoFit/>
+          </a:bodyPr>
+          <a:lstStyle/>
+          <a:p>
+            <a:pPr algn="l">
+              <a:spcAft>
+                <a:spcPts val="630"/>
+              </a:spcAft>
+            </a:pPr>
+            <a:r>
+              <a:rPr sz="1400" b="0" i="0">
+                <a:solidFill>
+                  <a:srgbClr val="5D5A54"/>
+                </a:solidFill>
+                <a:latin typeface="Inter Tight"/>
+              </a:rPr>
+              <a:t>Culture, family, identity, ability and money: what to keep in mind for this topic.</a:t>
+            </a:r>
+          </a:p>
+        </p:txBody>
+      </p:sp>
+      <p:sp>
+        <p:nvSpPr>
+          <p:cNvPr id="6" name="TextBox 5"/>
+          <p:cNvSpPr txBox="1"/>
+          <p:nvPr/>
+        </p:nvSpPr>
+        <p:spPr>
+          <a:xfrm>
+            <a:off x="548640" y="1828800"/>
+            <a:ext cx="5394960" cy="4572000"/>
+          </a:xfrm>
+          <a:prstGeom prst="rect">
+            <a:avLst/>
+          </a:prstGeom>
+          <a:noFill/>
+        </p:spPr>
+        <p:txBody>
+          <a:bodyPr wrap="square" anchor="t" lIns="0" rIns="0" tIns="0" bIns="0">
+            <a:spAutoFit/>
+          </a:bodyPr>
+          <a:lstStyle/>
+          <a:p>
+            <a:pPr algn="l">
+              <a:spcAft>
+                <a:spcPts val="585"/>
+              </a:spcAft>
+            </a:pPr>
+            <a:r>
+              <a:rPr sz="1500" b="1" i="0">
+                <a:solidFill>
+                  <a:srgbClr val="1C1B19"/>
+                </a:solidFill>
+                <a:latin typeface="Source Serif 4"/>
+              </a:rPr>
+              <a:t>Many traditions already do this.</a:t>
+            </a:r>
+          </a:p>
+          <a:p>
+            <a:pPr algn="l">
+              <a:spcAft>
+                <a:spcPts val="585"/>
+              </a:spcAft>
+            </a:pPr>
+            <a:r>
+              <a:rPr sz="1300" b="0" i="0">
+                <a:solidFill>
+                  <a:srgbClr val="1C1B19"/>
+                </a:solidFill>
+                <a:latin typeface="Source Serif 4"/>
+              </a:rPr>
+              <a:t>Centering prayer, dhikr, Jewish contemplative prayer, the rosary, meditation in Hindu and Sikh traditions, quiet time on the land. Invite students to notice if their family already has a version. Never ask them to explain their faith to the class.</a:t>
+            </a:r>
+          </a:p>
+          <a:p>
+            <a:pPr algn="l">
+              <a:spcAft>
+                <a:spcPts val="585"/>
+              </a:spcAft>
+            </a:pPr>
+            <a:r>
+              <a:rPr sz="1300" b="0" i="0">
+                <a:solidFill>
+                  <a:srgbClr val="1C1B19"/>
+                </a:solidFill>
+                <a:latin typeface="Source Serif 4"/>
+              </a:rPr>
+              <a:t/>
+            </a:r>
+          </a:p>
+          <a:p>
+            <a:pPr algn="l">
+              <a:spcAft>
+                <a:spcPts val="585"/>
+              </a:spcAft>
+            </a:pPr>
+            <a:r>
+              <a:rPr sz="1500" b="1" i="0">
+                <a:solidFill>
+                  <a:srgbClr val="1C1B19"/>
+                </a:solidFill>
+                <a:latin typeface="Source Serif 4"/>
+              </a:rPr>
+              <a:t>Some families will be wary.</a:t>
+            </a:r>
+          </a:p>
+          <a:p>
+            <a:pPr algn="l">
+              <a:spcAft>
+                <a:spcPts val="585"/>
+              </a:spcAft>
+            </a:pPr>
+            <a:r>
+              <a:rPr sz="1300" b="0" i="0">
+                <a:solidFill>
+                  <a:srgbClr val="1C1B19"/>
+                </a:solidFill>
+                <a:latin typeface="Source Serif 4"/>
+              </a:rPr>
+              <a:t>Some families see meditation as religious, or as something that conflicts with their own faith. The secular framing and the opt-out are real; mean them. A note home before the lesson can help.</a:t>
+            </a:r>
+          </a:p>
+          <a:p>
+            <a:pPr algn="l">
+              <a:spcAft>
+                <a:spcPts val="585"/>
+              </a:spcAft>
+            </a:pPr>
+            <a:r>
+              <a:rPr sz="1300" b="0" i="0">
+                <a:solidFill>
+                  <a:srgbClr val="1C1B19"/>
+                </a:solidFill>
+                <a:latin typeface="Source Serif 4"/>
+              </a:rPr>
+              <a:t/>
+            </a:r>
+          </a:p>
+          <a:p>
+            <a:pPr algn="l">
+              <a:spcAft>
+                <a:spcPts val="585"/>
+              </a:spcAft>
+            </a:pPr>
+            <a:r>
+              <a:rPr sz="1500" b="1" i="0">
+                <a:solidFill>
+                  <a:srgbClr val="1C1B19"/>
+                </a:solidFill>
+                <a:latin typeface="Source Serif 4"/>
+              </a:rPr>
+              <a:t>Stillness isn't a virtue.</a:t>
+            </a:r>
+          </a:p>
+          <a:p>
+            <a:pPr algn="l">
+              <a:spcAft>
+                <a:spcPts val="585"/>
+              </a:spcAft>
+            </a:pPr>
+            <a:r>
+              <a:rPr sz="1300" b="0" i="0">
+                <a:solidFill>
+                  <a:srgbClr val="1C1B19"/>
+                </a:solidFill>
+                <a:latin typeface="Source Serif 4"/>
+              </a:rPr>
+              <a:t>Sitting still with eyes closed is one cultural picture of calm. Movement, rhythm, music and prayer all count. Students with ADHD often do better with movement-based practice; offer it first, not as a backup.</a:t>
+            </a:r>
+          </a:p>
+          <a:p>
+            <a:pPr algn="l">
+              <a:spcAft>
+                <a:spcPts val="585"/>
+              </a:spcAft>
+            </a:pPr>
+            <a:r>
+              <a:rPr sz="1300" b="0" i="0">
+                <a:solidFill>
+                  <a:srgbClr val="1C1B19"/>
+                </a:solidFill>
+                <a:latin typeface="Source Serif 4"/>
+              </a:rPr>
+              <a:t/>
+            </a:r>
+          </a:p>
+        </p:txBody>
+      </p:sp>
+      <p:sp>
+        <p:nvSpPr>
+          <p:cNvPr id="7" name="TextBox 6"/>
+          <p:cNvSpPr txBox="1"/>
+          <p:nvPr/>
+        </p:nvSpPr>
+        <p:spPr>
+          <a:xfrm>
+            <a:off x="6217920" y="1828800"/>
+            <a:ext cx="5394960" cy="4572000"/>
+          </a:xfrm>
+          <a:prstGeom prst="rect">
+            <a:avLst/>
+          </a:prstGeom>
+          <a:noFill/>
+        </p:spPr>
+        <p:txBody>
+          <a:bodyPr wrap="square" anchor="t" lIns="0" rIns="0" tIns="0" bIns="0">
+            <a:spAutoFit/>
+          </a:bodyPr>
+          <a:lstStyle/>
+          <a:p>
+            <a:pPr algn="l">
+              <a:spcAft>
+                <a:spcPts val="585"/>
+              </a:spcAft>
+            </a:pPr>
+            <a:r>
+              <a:rPr sz="1500" b="1" i="0">
+                <a:solidFill>
+                  <a:srgbClr val="1C1B19"/>
+                </a:solidFill>
+                <a:latin typeface="Source Serif 4"/>
+              </a:rPr>
+              <a:t>Noticing isn't the same as accepting harm.</a:t>
+            </a:r>
+          </a:p>
+          <a:p>
+            <a:pPr algn="l">
+              <a:spcAft>
+                <a:spcPts val="585"/>
+              </a:spcAft>
+            </a:pPr>
+            <a:r>
+              <a:rPr sz="1300" b="0" i="0">
+                <a:solidFill>
+                  <a:srgbClr val="1C1B19"/>
+                </a:solidFill>
+                <a:latin typeface="Source Serif 4"/>
+              </a:rPr>
+              <a:t>Students facing racism, an unsafe home, or money stress shouldn't hear that breathing will fix it. Mindfulness can help someone get through a hard moment. It doesn't make an unfair situation fair, and adults still need to act.</a:t>
+            </a:r>
+          </a:p>
+          <a:p>
+            <a:pPr algn="l">
+              <a:spcAft>
+                <a:spcPts val="585"/>
+              </a:spcAft>
+            </a:pPr>
+            <a:r>
+              <a:rPr sz="1300" b="0" i="0">
+                <a:solidFill>
+                  <a:srgbClr val="1C1B19"/>
+                </a:solidFill>
+                <a:latin typeface="Source Serif 4"/>
+              </a:rPr>
+              <a:t/>
+            </a:r>
+          </a:p>
+          <a:p>
+            <a:pPr algn="l">
+              <a:spcAft>
+                <a:spcPts val="585"/>
+              </a:spcAft>
+            </a:pPr>
+            <a:r>
+              <a:rPr sz="1500" b="1" i="0">
+                <a:solidFill>
+                  <a:srgbClr val="1C1B19"/>
+                </a:solidFill>
+                <a:latin typeface="Source Serif 4"/>
+              </a:rPr>
+              <a:t>Disabled and neurodivergent students.</a:t>
+            </a:r>
+          </a:p>
+          <a:p>
+            <a:pPr algn="l">
+              <a:spcAft>
+                <a:spcPts val="585"/>
+              </a:spcAft>
+            </a:pPr>
+            <a:r>
+              <a:rPr sz="1300" b="0" i="0">
+                <a:solidFill>
+                  <a:srgbClr val="1C1B19"/>
+                </a:solidFill>
+                <a:latin typeface="Source Serif 4"/>
+              </a:rPr>
+              <a:t>Adjust every instruction: "feel your feet" may not fit a wheelchair user; "notice your breath" may not fit a student with asthma. Offer the anchor that works. Some autistic students find closed eyes or silence uncomfortable; eyes open and a soft sound are fine.</a:t>
+            </a:r>
+          </a:p>
+          <a:p>
+            <a:pPr algn="l">
+              <a:spcAft>
+                <a:spcPts val="585"/>
+              </a:spcAft>
+            </a:pPr>
+            <a:r>
+              <a:rPr sz="1300" b="0" i="0">
+                <a:solidFill>
+                  <a:srgbClr val="1C1B19"/>
+                </a:solidFill>
+                <a:latin typeface="Source Serif 4"/>
+              </a:rPr>
+              <a:t/>
+            </a:r>
+          </a:p>
+          <a:p>
+            <a:pPr algn="l">
+              <a:spcAft>
+                <a:spcPts val="585"/>
+              </a:spcAft>
+            </a:pPr>
+            <a:r>
+              <a:rPr sz="1500" b="1" i="0">
+                <a:solidFill>
+                  <a:srgbClr val="1C1B19"/>
+                </a:solidFill>
+                <a:latin typeface="Source Serif 4"/>
+              </a:rPr>
+              <a:t>Language.</a:t>
+            </a:r>
+          </a:p>
+          <a:p>
+            <a:pPr algn="l">
+              <a:spcAft>
+                <a:spcPts val="585"/>
+              </a:spcAft>
+            </a:pPr>
+            <a:r>
+              <a:rPr sz="1300" b="0" i="0">
+                <a:solidFill>
+                  <a:srgbClr val="1C1B19"/>
+                </a:solidFill>
+                <a:latin typeface="Source Serif 4"/>
+              </a:rPr>
+              <a:t>"Mindfulness" can sound like jargon. "Noticing" or "paying attention on purpose" works in any language. English learners can do the senses practice in whatever language they think in.</a:t>
+            </a:r>
+          </a:p>
+          <a:p>
+            <a:pPr algn="l">
+              <a:spcAft>
+                <a:spcPts val="585"/>
+              </a:spcAft>
+            </a:pPr>
+            <a:r>
+              <a:rPr sz="1300" b="0" i="0">
+                <a:solidFill>
+                  <a:srgbClr val="1C1B19"/>
+                </a:solidFill>
+                <a:latin typeface="Source Serif 4"/>
+              </a:rPr>
+              <a:t/>
+            </a:r>
+          </a:p>
+        </p:txBody>
+      </p:sp>
+    </p:spTree>
+  </p:cSld>
+  <p:clrMapOvr>
+    <a:masterClrMapping/>
+  </p:clrMapOvr>
+</p:sld>
+</file>
+
+<file path=ppt/slides/slide15.xml><?xml version="1.0" encoding="utf-8"?>
+<p:sld xmlns:a="http://schemas.openxmlformats.org/drawingml/2006/main" xmlns:p="http://schemas.openxmlformats.org/presentationml/2006/main" xmlns:r="http://schemas.openxmlformats.org/officeDocument/2006/relationships" show="0">
+  <p:cSld>
+    <p:bg>
+      <p:bgPr>
+        <a:solidFill>
+          <a:srgbClr val="EEEBE4"/>
+        </a:solidFill>
+        <a:effectLst/>
+      </p:bgPr>
+    </p:bg>
+    <p:spTree>
+      <p:nvGrpSpPr>
+        <p:cNvPr id="1" name=""/>
+        <p:cNvGrpSpPr/>
+        <p:nvPr/>
+      </p:nvGrpSpPr>
+      <p:grpSpPr/>
+      <p:sp>
+        <p:nvSpPr>
+          <p:cNvPr id="2" name="Rectangle 1"/>
+          <p:cNvSpPr/>
+          <p:nvPr/>
+        </p:nvSpPr>
+        <p:spPr>
+          <a:xfrm>
+            <a:off x="0" y="0"/>
+            <a:ext cx="12191695" cy="384048"/>
+          </a:xfrm>
+          <a:prstGeom prst="rect">
+            <a:avLst/>
+          </a:prstGeom>
+          <a:solidFill>
+            <a:srgbClr val="0B2D5B"/>
+          </a:solidFill>
+          <a:ln>
+            <a:noFill/>
+          </a:ln>
+          <a:effectLst/>
+        </p:spPr>
+        <p:style>
+          <a:lnRef idx="1">
+            <a:schemeClr val="accent1"/>
+          </a:lnRef>
+          <a:fillRef idx="3">
+            <a:schemeClr val="accent1"/>
+          </a:fillRef>
+          <a:effectRef idx="2">
+            <a:schemeClr val="accent1"/>
+          </a:effectRef>
+          <a:fontRef idx="minor">
+            <a:schemeClr val="lt1"/>
+          </a:fontRef>
+        </p:style>
+        <p:txBody>
+          <a:bodyPr rtlCol="0" anchor="ctr"/>
+          <a:lstStyle/>
+          <a:p>
+            <a:pPr algn="ctr"/>
+          </a:p>
+        </p:txBody>
+      </p:sp>
+      <p:sp>
+        <p:nvSpPr>
+          <p:cNvPr id="3" name="TextBox 2"/>
+          <p:cNvSpPr txBox="1"/>
+          <p:nvPr/>
+        </p:nvSpPr>
+        <p:spPr>
+          <a:xfrm>
+            <a:off x="548640" y="100584"/>
+            <a:ext cx="10972800" cy="274320"/>
+          </a:xfrm>
+          <a:prstGeom prst="rect">
+            <a:avLst/>
+          </a:prstGeom>
+          <a:noFill/>
+        </p:spPr>
+        <p:txBody>
+          <a:bodyPr wrap="square" anchor="t" lIns="0" rIns="0" tIns="0" bIns="0">
+            <a:spAutoFit/>
+          </a:bodyPr>
+          <a:lstStyle/>
+          <a:p>
+            <a:pPr algn="l">
+              <a:spcAft>
+                <a:spcPts val="495"/>
+              </a:spcAft>
+            </a:pPr>
+            <a:r>
+              <a:rPr sz="1100" b="1" i="0">
+                <a:solidFill>
+                  <a:srgbClr val="FFFFFF"/>
+                </a:solidFill>
+                <a:latin typeface="Inter Tight"/>
+              </a:rPr>
+              <a:t>TEACHER PAGE  ·  skipped when you present  ·  Background</a:t>
+            </a:r>
+          </a:p>
+        </p:txBody>
+      </p:sp>
+      <p:sp>
+        <p:nvSpPr>
+          <p:cNvPr id="4" name="TextBox 3"/>
+          <p:cNvSpPr txBox="1"/>
+          <p:nvPr/>
+        </p:nvSpPr>
+        <p:spPr>
+          <a:xfrm>
+            <a:off x="548640" y="685800"/>
+            <a:ext cx="10972800" cy="640080"/>
+          </a:xfrm>
+          <a:prstGeom prst="rect">
+            <a:avLst/>
+          </a:prstGeom>
+          <a:noFill/>
+        </p:spPr>
+        <p:txBody>
+          <a:bodyPr wrap="square" anchor="t" lIns="0" rIns="0" tIns="0" bIns="0">
+            <a:spAutoFit/>
+          </a:bodyPr>
+          <a:lstStyle/>
+          <a:p>
+            <a:pPr algn="l">
+              <a:spcAft>
+                <a:spcPts val="1350"/>
+              </a:spcAft>
+            </a:pPr>
+            <a:r>
+              <a:rPr sz="3000" b="1" i="0">
+                <a:solidFill>
+                  <a:srgbClr val="1C1B19"/>
+                </a:solidFill>
+                <a:latin typeface="Source Serif 4"/>
+              </a:rPr>
+              <a:t>What the research says</a:t>
+            </a:r>
+          </a:p>
+        </p:txBody>
+      </p:sp>
+      <p:sp>
+        <p:nvSpPr>
+          <p:cNvPr id="5" name="TextBox 4"/>
+          <p:cNvSpPr txBox="1"/>
+          <p:nvPr/>
+        </p:nvSpPr>
+        <p:spPr>
+          <a:xfrm>
+            <a:off x="548640" y="1463040"/>
+            <a:ext cx="5394960" cy="4937760"/>
+          </a:xfrm>
+          <a:prstGeom prst="rect">
+            <a:avLst/>
+          </a:prstGeom>
+          <a:noFill/>
+        </p:spPr>
+        <p:txBody>
+          <a:bodyPr wrap="square" anchor="t" lIns="0" rIns="0" tIns="0" bIns="0">
+            <a:spAutoFit/>
+          </a:bodyPr>
+          <a:lstStyle/>
+          <a:p>
+            <a:pPr algn="l">
+              <a:spcAft>
+                <a:spcPts val="585"/>
+              </a:spcAft>
+            </a:pPr>
+            <a:r>
+              <a:rPr sz="1300" b="0" i="0">
+                <a:solidFill>
+                  <a:srgbClr val="1C1B19"/>
+                </a:solidFill>
+                <a:latin typeface="Source Serif 4"/>
+              </a:rPr>
+              <a:t>People's minds wandered during about 47% of their waking moments, and they were less happy while their minds wandered.</a:t>
+            </a:r>
+          </a:p>
+          <a:p>
+            <a:pPr algn="l">
+              <a:spcAft>
+                <a:spcPts val="585"/>
+              </a:spcAft>
+            </a:pPr>
+            <a:r>
+              <a:rPr sz="1050" b="0" i="0">
+                <a:solidFill>
+                  <a:srgbClr val="5D5A54"/>
+                </a:solidFill>
+                <a:latin typeface="Inter Tight"/>
+              </a:rPr>
+              <a:t>Killingsworth &amp; Gilbert, Science, 2010 (about 2,250 adults, smartphone sampling)</a:t>
+            </a:r>
+          </a:p>
+          <a:p>
+            <a:pPr algn="l">
+              <a:spcAft>
+                <a:spcPts val="585"/>
+              </a:spcAft>
+            </a:pPr>
+            <a:r>
+              <a:rPr sz="1300" b="0" i="0">
+                <a:solidFill>
+                  <a:srgbClr val="1C1B19"/>
+                </a:solidFill>
+                <a:latin typeface="Source Serif 4"/>
+              </a:rPr>
+              <a:t>Putting a feeling into words reduced activity in the amygdala, the brain's alarm center, and increased activity in a region that helps regulate emotion.</a:t>
+            </a:r>
+          </a:p>
+          <a:p>
+            <a:pPr algn="l">
+              <a:spcAft>
+                <a:spcPts val="585"/>
+              </a:spcAft>
+            </a:pPr>
+            <a:r>
+              <a:rPr sz="1050" b="0" i="0">
+                <a:solidFill>
+                  <a:srgbClr val="5D5A54"/>
+                </a:solidFill>
+                <a:latin typeface="Inter Tight"/>
+              </a:rPr>
+              <a:t>Lieberman et al., Psychological Science, 2007</a:t>
+            </a:r>
+          </a:p>
+          <a:p>
+            <a:pPr algn="l">
+              <a:spcAft>
+                <a:spcPts val="585"/>
+              </a:spcAft>
+            </a:pPr>
+            <a:r>
+              <a:rPr sz="1300" b="0" i="0">
+                <a:solidFill>
+                  <a:srgbClr val="1C1B19"/>
+                </a:solidFill>
+                <a:latin typeface="Source Serif 4"/>
+              </a:rPr>
+              <a:t>Experienced meditators showed less activity in the default mode network, the brain's mind-wandering system, during practice.</a:t>
+            </a:r>
+          </a:p>
+          <a:p>
+            <a:pPr algn="l">
+              <a:spcAft>
+                <a:spcPts val="585"/>
+              </a:spcAft>
+            </a:pPr>
+            <a:r>
+              <a:rPr sz="1050" b="0" i="0">
+                <a:solidFill>
+                  <a:srgbClr val="5D5A54"/>
+                </a:solidFill>
+                <a:latin typeface="Inter Tight"/>
+              </a:rPr>
+              <a:t>Brewer et al., PNAS, 2011</a:t>
+            </a:r>
+          </a:p>
+          <a:p>
+            <a:pPr algn="l">
+              <a:spcAft>
+                <a:spcPts val="585"/>
+              </a:spcAft>
+            </a:pPr>
+            <a:r>
+              <a:rPr sz="1300" b="0" i="0">
+                <a:solidFill>
+                  <a:srgbClr val="1C1B19"/>
+                </a:solidFill>
+                <a:latin typeface="Source Serif 4"/>
+              </a:rPr>
+              <a:t>Across studies, practice is linked to changes in attention control, emotion regulation and self-awareness networks. Most studies are small and on adults.</a:t>
+            </a:r>
+          </a:p>
+          <a:p>
+            <a:pPr algn="l">
+              <a:spcAft>
+                <a:spcPts val="585"/>
+              </a:spcAft>
+            </a:pPr>
+            <a:r>
+              <a:rPr sz="1050" b="0" i="0">
+                <a:solidFill>
+                  <a:srgbClr val="5D5A54"/>
+                </a:solidFill>
+                <a:latin typeface="Inter Tight"/>
+              </a:rPr>
+              <a:t>Tang, Hölzel &amp; Posner, Nature Reviews Neuroscience, 2015</a:t>
+            </a:r>
+          </a:p>
+          <a:p>
+            <a:pPr algn="l">
+              <a:spcAft>
+                <a:spcPts val="585"/>
+              </a:spcAft>
+            </a:pPr>
+            <a:r>
+              <a:rPr sz="1300" b="0" i="0">
+                <a:solidFill>
+                  <a:srgbClr val="1C1B19"/>
+                </a:solidFill>
+                <a:latin typeface="Source Serif 4"/>
+              </a:rPr>
+              <a:t>An eight-week course increased gray-matter density in some regions in a study of 16 adults. The largest controlled trial since (more than 200 adults) found no structural brain changes.</a:t>
+            </a:r>
+          </a:p>
+          <a:p>
+            <a:pPr algn="l">
+              <a:spcAft>
+                <a:spcPts val="585"/>
+              </a:spcAft>
+            </a:pPr>
+            <a:r>
+              <a:rPr sz="1050" b="0" i="0">
+                <a:solidFill>
+                  <a:srgbClr val="5D5A54"/>
+                </a:solidFill>
+                <a:latin typeface="Inter Tight"/>
+              </a:rPr>
+              <a:t>Hölzel et al., Psychiatry Research: Neuroimaging, 2011; Kral et al., Science Advances, 2022</a:t>
+            </a:r>
+          </a:p>
+        </p:txBody>
+      </p:sp>
+      <p:sp>
+        <p:nvSpPr>
+          <p:cNvPr id="6" name="TextBox 5"/>
+          <p:cNvSpPr txBox="1"/>
+          <p:nvPr/>
+        </p:nvSpPr>
+        <p:spPr>
+          <a:xfrm>
+            <a:off x="6217920" y="1463040"/>
+            <a:ext cx="5394960" cy="4937760"/>
+          </a:xfrm>
+          <a:prstGeom prst="rect">
+            <a:avLst/>
+          </a:prstGeom>
+          <a:noFill/>
+        </p:spPr>
+        <p:txBody>
+          <a:bodyPr wrap="square" anchor="t" lIns="0" rIns="0" tIns="0" bIns="0">
+            <a:spAutoFit/>
+          </a:bodyPr>
+          <a:lstStyle/>
+          <a:p>
+            <a:pPr algn="l">
+              <a:spcAft>
+                <a:spcPts val="585"/>
+              </a:spcAft>
+            </a:pPr>
+            <a:r>
+              <a:rPr sz="1300" b="0" i="0">
+                <a:solidFill>
+                  <a:srgbClr val="1C1B19"/>
+                </a:solidFill>
+                <a:latin typeface="Source Serif 4"/>
+              </a:rPr>
+              <a:t>In 84 UK schools and over 8,000 students aged 11 to 16, a mindfulness curriculum was no better than usual social-emotional teaching at preventing mental health problems. Few students kept practicing.</a:t>
+            </a:r>
+          </a:p>
+          <a:p>
+            <a:pPr algn="l">
+              <a:spcAft>
+                <a:spcPts val="585"/>
+              </a:spcAft>
+            </a:pPr>
+            <a:r>
+              <a:rPr sz="1050" b="0" i="0">
+                <a:solidFill>
+                  <a:srgbClr val="5D5A54"/>
+                </a:solidFill>
+                <a:latin typeface="Inter Tight"/>
+              </a:rPr>
+              <a:t>Kuyken et al. (MYRIAD), Evidence-Based Mental Health, 2022</a:t>
+            </a:r>
+          </a:p>
+          <a:p>
+            <a:pPr algn="l">
+              <a:spcAft>
+                <a:spcPts val="585"/>
+              </a:spcAft>
+            </a:pPr>
+            <a:r>
+              <a:rPr sz="1300" b="0" i="0">
+                <a:solidFill>
+                  <a:srgbClr val="1C1B19"/>
+                </a:solidFill>
+                <a:latin typeface="Source Serif 4"/>
+              </a:rPr>
+              <a:t>Across 33 trials with young people, mindfulness programs had small benefits for attention, stress and mood, mostly smaller when compared with other active programs.</a:t>
+            </a:r>
+          </a:p>
+          <a:p>
+            <a:pPr algn="l">
+              <a:spcAft>
+                <a:spcPts val="585"/>
+              </a:spcAft>
+            </a:pPr>
+            <a:r>
+              <a:rPr sz="1050" b="0" i="0">
+                <a:solidFill>
+                  <a:srgbClr val="5D5A54"/>
+                </a:solidFill>
+                <a:latin typeface="Inter Tight"/>
+              </a:rPr>
+              <a:t>Dunning et al., Journal of Child Psychology and Psychiatry, 2019</a:t>
+            </a:r>
+          </a:p>
+          <a:p>
+            <a:pPr algn="l">
+              <a:spcAft>
+                <a:spcPts val="585"/>
+              </a:spcAft>
+            </a:pPr>
+            <a:r>
+              <a:rPr sz="1300" b="0" i="0">
+                <a:solidFill>
+                  <a:srgbClr val="1C1B19"/>
+                </a:solidFill>
+                <a:latin typeface="Source Serif 4"/>
+              </a:rPr>
+              <a:t>Five minutes a day of slow, sighing breaths improved mood and lowered breathing rate more than five minutes of mindfulness meditation, over one month.</a:t>
+            </a:r>
+          </a:p>
+          <a:p>
+            <a:pPr algn="l">
+              <a:spcAft>
+                <a:spcPts val="585"/>
+              </a:spcAft>
+            </a:pPr>
+            <a:r>
+              <a:rPr sz="1050" b="0" i="0">
+                <a:solidFill>
+                  <a:srgbClr val="5D5A54"/>
+                </a:solidFill>
+                <a:latin typeface="Inter Tight"/>
+              </a:rPr>
+              <a:t>Balban et al., Cell Reports Medicine, 2023</a:t>
+            </a:r>
+          </a:p>
+          <a:p>
+            <a:pPr algn="l">
+              <a:spcAft>
+                <a:spcPts val="585"/>
+              </a:spcAft>
+            </a:pPr>
+            <a:r>
+              <a:rPr sz="1300" b="0" i="0">
+                <a:solidFill>
+                  <a:srgbClr val="1C1B19"/>
+                </a:solidFill>
+                <a:latin typeface="Source Serif 4"/>
+              </a:rPr>
+              <a:t>Mindfulness can have side effects for some people, including anxiety and re-experiencing trauma, especially with long or intense practice.</a:t>
+            </a:r>
+          </a:p>
+          <a:p>
+            <a:pPr algn="l">
+              <a:spcAft>
+                <a:spcPts val="585"/>
+              </a:spcAft>
+            </a:pPr>
+            <a:r>
+              <a:rPr sz="1050" b="0" i="0">
+                <a:solidFill>
+                  <a:srgbClr val="5D5A54"/>
+                </a:solidFill>
+                <a:latin typeface="Inter Tight"/>
+              </a:rPr>
+              <a:t>Britton, Current Opinion in Psychology, 2019; Treleaven, Trauma-Sensitive Mindfulness, 2018</a:t>
+            </a:r>
+          </a:p>
+        </p:txBody>
+      </p:sp>
+    </p:spTree>
+  </p:cSld>
+  <p:clrMapOvr>
+    <a:masterClrMapping/>
+  </p:clrMapOvr>
+</p:sld>
+</file>
+
+<file path=ppt/slides/slide2.xml><?xml version="1.0" encoding="utf-8"?>
+<p:sld xmlns:a="http://schemas.openxmlformats.org/drawingml/2006/main" xmlns:p="http://schemas.openxmlformats.org/presentationml/2006/main" xmlns:r="http://schemas.openxmlformats.org/officeDocument/2006/relationships">
+  <p:cSld>
+    <p:bg>
+      <p:bgPr>
+        <a:solidFill>
+          <a:srgbClr val="0B2D5B"/>
+        </a:solidFill>
+        <a:effectLst/>
+      </p:bgPr>
+    </p:bg>
+    <p:spTree>
+      <p:nvGrpSpPr>
+        <p:cNvPr id="1" name=""/>
+        <p:cNvGrpSpPr/>
+        <p:nvPr/>
+      </p:nvGrpSpPr>
+      <p:grpSpPr/>
+      <p:sp>
+        <p:nvSpPr>
+          <p:cNvPr id="2" name="Rectangle 1"/>
+          <p:cNvSpPr/>
+          <p:nvPr/>
+        </p:nvSpPr>
+        <p:spPr>
+          <a:xfrm>
+            <a:off x="548640" y="502920"/>
+            <a:ext cx="457200" cy="54864"/>
+          </a:xfrm>
+          <a:prstGeom prst="rect">
+            <a:avLst/>
+          </a:prstGeom>
+          <a:solidFill>
+            <a:srgbClr val="F47B20"/>
+          </a:solidFill>
+          <a:ln>
+            <a:noFill/>
+          </a:ln>
+          <a:effectLst/>
+        </p:spPr>
+        <p:style>
+          <a:lnRef idx="1">
+            <a:schemeClr val="accent1"/>
+          </a:lnRef>
+          <a:fillRef idx="3">
+            <a:schemeClr val="accent1"/>
+          </a:fillRef>
+          <a:effectRef idx="2">
+            <a:schemeClr val="accent1"/>
+          </a:effectRef>
+          <a:fontRef idx="minor">
+            <a:schemeClr val="lt1"/>
+          </a:fontRef>
+        </p:style>
+        <p:txBody>
+          <a:bodyPr rtlCol="0" anchor="ctr"/>
+          <a:lstStyle/>
+          <a:p>
+            <a:pPr algn="ctr"/>
+          </a:p>
+        </p:txBody>
+      </p:sp>
+      <p:sp>
+        <p:nvSpPr>
+          <p:cNvPr id="3" name="TextBox 2"/>
+          <p:cNvSpPr txBox="1"/>
+          <p:nvPr/>
+        </p:nvSpPr>
+        <p:spPr>
+          <a:xfrm>
+            <a:off x="1143000" y="393192"/>
+            <a:ext cx="8229600" cy="274320"/>
+          </a:xfrm>
+          <a:prstGeom prst="rect">
+            <a:avLst/>
+          </a:prstGeom>
+          <a:noFill/>
+        </p:spPr>
+        <p:txBody>
+          <a:bodyPr wrap="square" anchor="t" lIns="0" rIns="0" tIns="0" bIns="0">
+            <a:spAutoFit/>
+          </a:bodyPr>
+          <a:lstStyle/>
+          <a:p>
+            <a:pPr algn="l">
+              <a:spcAft>
+                <a:spcPts val="540"/>
+              </a:spcAft>
+            </a:pPr>
+            <a:r>
+              <a:rPr sz="1200" b="1" i="0">
+                <a:solidFill>
+                  <a:srgbClr val="5D5A54"/>
+                </a:solidFill>
+                <a:latin typeface="Inter Tight"/>
+              </a:rPr>
+              <a:t>TRAIN YOUR ATTENTION</a:t>
+            </a:r>
+          </a:p>
+        </p:txBody>
+      </p:sp>
+      <p:sp>
+        <p:nvSpPr>
+          <p:cNvPr id="4" name="TextBox 3"/>
+          <p:cNvSpPr txBox="1"/>
+          <p:nvPr/>
+        </p:nvSpPr>
+        <p:spPr>
+          <a:xfrm>
+            <a:off x="8229600" y="6400800"/>
+            <a:ext cx="3410712" cy="274320"/>
+          </a:xfrm>
+          <a:prstGeom prst="rect">
+            <a:avLst/>
+          </a:prstGeom>
+          <a:noFill/>
+        </p:spPr>
+        <p:txBody>
+          <a:bodyPr wrap="square" anchor="t" lIns="0" rIns="0" tIns="0" bIns="0">
+            <a:spAutoFit/>
+          </a:bodyPr>
+          <a:lstStyle/>
+          <a:p>
+            <a:pPr algn="r">
+              <a:spcAft>
+                <a:spcPts val="450"/>
+              </a:spcAft>
+            </a:pPr>
+            <a:r>
+              <a:rPr sz="1000" b="0" i="0">
+                <a:solidFill>
+                  <a:srgbClr val="5D5A54"/>
+                </a:solidFill>
+                <a:latin typeface="Inter Tight"/>
+              </a:rPr>
+              <a:t>Beaver Counseling</a:t>
+            </a:r>
+          </a:p>
+        </p:txBody>
+      </p:sp>
+      <p:sp>
+        <p:nvSpPr>
+          <p:cNvPr id="5" name="TextBox 4"/>
+          <p:cNvSpPr txBox="1"/>
+          <p:nvPr/>
+        </p:nvSpPr>
+        <p:spPr>
+          <a:xfrm>
+            <a:off x="822960" y="2011680"/>
+            <a:ext cx="10515600" cy="1463040"/>
+          </a:xfrm>
+          <a:prstGeom prst="rect">
+            <a:avLst/>
+          </a:prstGeom>
+          <a:noFill/>
+        </p:spPr>
+        <p:txBody>
+          <a:bodyPr wrap="square" anchor="b" lIns="0" rIns="0" tIns="0" bIns="0">
+            <a:spAutoFit/>
+          </a:bodyPr>
+          <a:lstStyle/>
+          <a:p>
+            <a:pPr algn="l">
+              <a:spcAft>
+                <a:spcPts val="2700"/>
+              </a:spcAft>
+            </a:pPr>
+            <a:r>
+              <a:rPr sz="6000" b="1" i="0">
+                <a:solidFill>
+                  <a:srgbClr val="FFFFFF"/>
+                </a:solidFill>
+                <a:latin typeface="Source Serif 4"/>
+              </a:rPr>
+              <a:t>Train Your Attention</a:t>
+            </a:r>
+          </a:p>
+        </p:txBody>
+      </p:sp>
+      <p:sp>
+        <p:nvSpPr>
+          <p:cNvPr id="6" name="TextBox 5"/>
+          <p:cNvSpPr txBox="1"/>
+          <p:nvPr/>
+        </p:nvSpPr>
+        <p:spPr>
+          <a:xfrm>
+            <a:off x="822960" y="3611880"/>
+            <a:ext cx="10515600" cy="914400"/>
+          </a:xfrm>
+          <a:prstGeom prst="rect">
+            <a:avLst/>
+          </a:prstGeom>
+          <a:noFill/>
+        </p:spPr>
+        <p:txBody>
+          <a:bodyPr wrap="square" anchor="t" lIns="0" rIns="0" tIns="0" bIns="0">
+            <a:spAutoFit/>
+          </a:bodyPr>
+          <a:lstStyle/>
+          <a:p>
+            <a:pPr algn="l">
+              <a:spcAft>
+                <a:spcPts val="1080"/>
+              </a:spcAft>
+            </a:pPr>
+            <a:r>
+              <a:rPr sz="2400" b="0" i="1">
+                <a:solidFill>
+                  <a:srgbClr val="E8E4DA"/>
+                </a:solidFill>
+                <a:latin typeface="Source Serif 4"/>
+              </a:rPr>
+              <a:t>Your mind wanders about half the time. What can a few minutes of noticing actually do?</a:t>
+            </a:r>
+          </a:p>
+        </p:txBody>
+      </p:sp>
+      <p:sp>
+        <p:nvSpPr>
+          <p:cNvPr id="7" name="TextBox 6"/>
+          <p:cNvSpPr txBox="1"/>
+          <p:nvPr/>
+        </p:nvSpPr>
+        <p:spPr>
+          <a:xfrm>
+            <a:off x="822960" y="6035040"/>
+            <a:ext cx="7315200" cy="365760"/>
+          </a:xfrm>
+          <a:prstGeom prst="rect">
+            <a:avLst/>
+          </a:prstGeom>
+          <a:noFill/>
+        </p:spPr>
+        <p:txBody>
+          <a:bodyPr wrap="square" anchor="t" lIns="0" rIns="0" tIns="0" bIns="0">
+            <a:spAutoFit/>
+          </a:bodyPr>
+          <a:lstStyle/>
+          <a:p>
+            <a:pPr algn="l">
+              <a:spcAft>
+                <a:spcPts val="585"/>
+              </a:spcAft>
+            </a:pPr>
+            <a:r>
+              <a:rPr sz="1300" b="0" i="0">
+                <a:solidFill>
+                  <a:srgbClr val="E8E4DA"/>
+                </a:solidFill>
+                <a:latin typeface="Inter Tight"/>
+              </a:rPr>
+              <a:t>Beaver Upper School · Counseling</a:t>
+            </a:r>
+          </a:p>
+        </p:txBody>
+      </p:sp>
+    </p:spTree>
+  </p:cSld>
+  <p:clrMapOvr>
+    <a:masterClrMapping/>
+  </p:clrMapOvr>
+</p:sld>
+</file>
+
+<file path=ppt/slides/slide3.xml><?xml version="1.0" encoding="utf-8"?>
 <p:sld xmlns:a="http://schemas.openxmlformats.org/drawingml/2006/main" xmlns:p="http://schemas.openxmlformats.org/presentationml/2006/main" xmlns:r="http://schemas.openxmlformats.org/officeDocument/2006/relationships">
   <p:cSld>
     <p:bg>
@@ -5513,7 +7670,7 @@
                 </a:solidFill>
                 <a:latin typeface="Inter Tight"/>
               </a:rPr>
-              <a:t>FIVE WAYS IN</a:t>
+              <a:t>ONE MINUTE</a:t>
             </a:r>
           </a:p>
         </p:txBody>
@@ -5552,21 +7709,104 @@
                 </a:solidFill>
                 <a:latin typeface="Inter Tight"/>
               </a:rPr>
-              <a:t>train-your-attention Counseling</a:t>
-            </a:r>
-          </a:p>
-        </p:txBody>
-      </p:sp>
-      <p:sp>
-        <p:nvSpPr>
-          <p:cNvPr id="5" name="TextBox 4"/>
+              <a:t>Beaver Counseling</a:t>
+            </a:r>
+          </a:p>
+        </p:txBody>
+      </p:sp>
+      <p:sp>
+        <p:nvSpPr>
+          <p:cNvPr id="5" name="Rectangle 4"/>
+          <p:cNvSpPr/>
+          <p:nvPr/>
+        </p:nvSpPr>
+        <p:spPr>
+          <a:xfrm>
+            <a:off x="822960" y="1371600"/>
+            <a:ext cx="73152" cy="3566160"/>
+          </a:xfrm>
+          <a:prstGeom prst="rect">
+            <a:avLst/>
+          </a:prstGeom>
+          <a:solidFill>
+            <a:srgbClr val="F47B20"/>
+          </a:solidFill>
+          <a:ln>
+            <a:noFill/>
+          </a:ln>
+          <a:effectLst/>
+        </p:spPr>
+        <p:style>
+          <a:lnRef idx="1">
+            <a:schemeClr val="accent1"/>
+          </a:lnRef>
+          <a:fillRef idx="3">
+            <a:schemeClr val="accent1"/>
+          </a:fillRef>
+          <a:effectRef idx="2">
+            <a:schemeClr val="accent1"/>
+          </a:effectRef>
+          <a:fontRef idx="minor">
+            <a:schemeClr val="lt1"/>
+          </a:fontRef>
+        </p:style>
+        <p:txBody>
+          <a:bodyPr rtlCol="0" anchor="ctr"/>
+          <a:lstStyle/>
+          <a:p>
+            <a:pPr algn="ctr"/>
+          </a:p>
+        </p:txBody>
+      </p:sp>
+      <p:sp>
+        <p:nvSpPr>
+          <p:cNvPr id="6" name="TextBox 5"/>
           <p:cNvSpPr txBox="1"/>
           <p:nvPr/>
         </p:nvSpPr>
         <p:spPr>
           <a:xfrm>
-            <a:off x="822960" y="1005840"/>
-            <a:ext cx="10515600" cy="1097280"/>
+            <a:off x="1188720" y="1371600"/>
+            <a:ext cx="10058400" cy="3566160"/>
+          </a:xfrm>
+          <a:prstGeom prst="rect">
+            <a:avLst/>
+          </a:prstGeom>
+          <a:noFill/>
+        </p:spPr>
+        <p:txBody>
+          <a:bodyPr wrap="square" anchor="ctr" lIns="0" rIns="0" tIns="0" bIns="0">
+            <a:spAutoFit/>
+          </a:bodyPr>
+          <a:lstStyle/>
+          <a:p>
+            <a:pPr algn="l">
+              <a:spcAft>
+                <a:spcPts val="1800"/>
+              </a:spcAft>
+            </a:pPr>
+            <a:r>
+              <a:rPr sz="4000" b="0" i="1">
+                <a:solidFill>
+                  <a:srgbClr val="1C1B19"/>
+                </a:solidFill>
+                <a:latin typeface="Source Serif 4"/>
+              </a:rPr>
+              <a:t>Sit for one minute. Each time your mind wanders, make a tally mark.</a:t>
+            </a:r>
+          </a:p>
+        </p:txBody>
+      </p:sp>
+      <p:sp>
+        <p:nvSpPr>
+          <p:cNvPr id="7" name="TextBox 6"/>
+          <p:cNvSpPr txBox="1"/>
+          <p:nvPr/>
+        </p:nvSpPr>
+        <p:spPr>
+          <a:xfrm>
+            <a:off x="1188720" y="5120640"/>
+            <a:ext cx="10058400" cy="914400"/>
           </a:xfrm>
           <a:prstGeom prst="rect">
             <a:avLst/>
@@ -5581,487 +7821,17 @@
           <a:p>
             <a:pPr algn="l">
               <a:spcAft>
-                <a:spcPts val="1620"/>
-              </a:spcAft>
-            </a:pPr>
-            <a:r>
-              <a:rPr sz="3600" b="1" i="0">
-                <a:solidFill>
-                  <a:srgbClr val="1C1B19"/>
-                </a:solidFill>
-                <a:latin typeface="Source Serif 4"/>
-              </a:rPr>
-              <a:t>Pick the one that fits you.</a:t>
-            </a:r>
-          </a:p>
-        </p:txBody>
-      </p:sp>
-      <p:sp>
-        <p:nvSpPr>
-          <p:cNvPr id="6" name="TextBox 5"/>
-          <p:cNvSpPr txBox="1"/>
-          <p:nvPr/>
-        </p:nvSpPr>
-        <p:spPr>
-          <a:xfrm>
-            <a:off x="822960" y="2057400"/>
-            <a:ext cx="548640" cy="804672"/>
-          </a:xfrm>
-          <a:prstGeom prst="rect">
-            <a:avLst/>
-          </a:prstGeom>
-          <a:noFill/>
-        </p:spPr>
-        <p:txBody>
-          <a:bodyPr wrap="square" anchor="t" lIns="0" rIns="0" tIns="0" bIns="0">
-            <a:spAutoFit/>
-          </a:bodyPr>
-          <a:lstStyle/>
-          <a:p>
-            <a:pPr algn="l">
-              <a:spcAft>
-                <a:spcPts val="1170"/>
-              </a:spcAft>
-            </a:pPr>
-            <a:r>
-              <a:rPr sz="2600" b="1" i="0">
-                <a:solidFill>
-                  <a:srgbClr val="F47B20"/>
-                </a:solidFill>
-                <a:latin typeface="Source Serif 4"/>
-              </a:rPr>
-              <a:t>1</a:t>
-            </a:r>
-          </a:p>
-        </p:txBody>
-      </p:sp>
-      <p:sp>
-        <p:nvSpPr>
-          <p:cNvPr id="7" name="TextBox 6"/>
-          <p:cNvSpPr txBox="1"/>
-          <p:nvPr/>
-        </p:nvSpPr>
-        <p:spPr>
-          <a:xfrm>
-            <a:off x="1463040" y="2093976"/>
-            <a:ext cx="9875520" cy="804672"/>
-          </a:xfrm>
-          <a:prstGeom prst="rect">
-            <a:avLst/>
-          </a:prstGeom>
-          <a:noFill/>
-        </p:spPr>
-        <p:txBody>
-          <a:bodyPr wrap="square" anchor="t" lIns="0" rIns="0" tIns="0" bIns="0">
-            <a:spAutoFit/>
-          </a:bodyPr>
-          <a:lstStyle/>
-          <a:p>
-            <a:pPr algn="l">
-              <a:spcAft>
-                <a:spcPts val="945"/>
-              </a:spcAft>
-            </a:pPr>
-            <a:r>
-              <a:rPr sz="2100" b="1" i="0">
-                <a:solidFill>
-                  <a:srgbClr val="1C1B19"/>
-                </a:solidFill>
-                <a:latin typeface="Source Serif 4"/>
-              </a:rPr>
-              <a:t>Breathe out longer.</a:t>
-            </a:r>
-          </a:p>
-          <a:p>
-            <a:pPr algn="l">
-              <a:spcAft>
-                <a:spcPts val="945"/>
-              </a:spcAft>
-            </a:pPr>
-            <a:r>
-              <a:rPr sz="1600" b="0" i="0">
+                <a:spcPts val="810"/>
+              </a:spcAft>
+            </a:pPr>
+            <a:r>
+              <a:rPr sz="1800" b="0" i="0">
                 <a:solidFill>
                   <a:srgbClr val="5D5A54"/>
                 </a:solidFill>
-                <a:latin typeface="Source Serif 4"/>
-              </a:rPr>
-              <a:t>In for 4, out for 6.</a:t>
-            </a:r>
-          </a:p>
-        </p:txBody>
-      </p:sp>
-      <p:sp>
-        <p:nvSpPr>
-          <p:cNvPr id="8" name="TextBox 7"/>
-          <p:cNvSpPr txBox="1"/>
-          <p:nvPr/>
-        </p:nvSpPr>
-        <p:spPr>
-          <a:xfrm>
-            <a:off x="822960" y="2862072"/>
-            <a:ext cx="548640" cy="804672"/>
-          </a:xfrm>
-          <a:prstGeom prst="rect">
-            <a:avLst/>
-          </a:prstGeom>
-          <a:noFill/>
-        </p:spPr>
-        <p:txBody>
-          <a:bodyPr wrap="square" anchor="t" lIns="0" rIns="0" tIns="0" bIns="0">
-            <a:spAutoFit/>
-          </a:bodyPr>
-          <a:lstStyle/>
-          <a:p>
-            <a:pPr algn="l">
-              <a:spcAft>
-                <a:spcPts val="1170"/>
-              </a:spcAft>
-            </a:pPr>
-            <a:r>
-              <a:rPr sz="2600" b="1" i="0">
-                <a:solidFill>
-                  <a:srgbClr val="F47B20"/>
-                </a:solidFill>
-                <a:latin typeface="Source Serif 4"/>
-              </a:rPr>
-              <a:t>2</a:t>
-            </a:r>
-          </a:p>
-        </p:txBody>
-      </p:sp>
-      <p:sp>
-        <p:nvSpPr>
-          <p:cNvPr id="9" name="TextBox 8"/>
-          <p:cNvSpPr txBox="1"/>
-          <p:nvPr/>
-        </p:nvSpPr>
-        <p:spPr>
-          <a:xfrm>
-            <a:off x="1463040" y="2898648"/>
-            <a:ext cx="9875520" cy="804672"/>
-          </a:xfrm>
-          <a:prstGeom prst="rect">
-            <a:avLst/>
-          </a:prstGeom>
-          <a:noFill/>
-        </p:spPr>
-        <p:txBody>
-          <a:bodyPr wrap="square" anchor="t" lIns="0" rIns="0" tIns="0" bIns="0">
-            <a:spAutoFit/>
-          </a:bodyPr>
-          <a:lstStyle/>
-          <a:p>
-            <a:pPr algn="l">
-              <a:spcAft>
-                <a:spcPts val="945"/>
-              </a:spcAft>
-            </a:pPr>
-            <a:r>
-              <a:rPr sz="2100" b="1" i="0">
-                <a:solidFill>
-                  <a:srgbClr val="1C1B19"/>
-                </a:solidFill>
-                <a:latin typeface="Source Serif 4"/>
-              </a:rPr>
-              <a:t>Move and notice.</a:t>
-            </a:r>
-          </a:p>
-          <a:p>
-            <a:pPr algn="l">
-              <a:spcAft>
-                <a:spcPts val="945"/>
-              </a:spcAft>
-            </a:pPr>
-            <a:r>
-              <a:rPr sz="1600" b="0" i="0">
-                <a:solidFill>
-                  <a:srgbClr val="5D5A54"/>
-                </a:solidFill>
-                <a:latin typeface="Source Serif 4"/>
-              </a:rPr>
-              <a:t>Slow walking, stretching, or the rhythm of cycling, running, swimming.</a:t>
-            </a:r>
-          </a:p>
-        </p:txBody>
-      </p:sp>
-      <p:sp>
-        <p:nvSpPr>
-          <p:cNvPr id="10" name="TextBox 9"/>
-          <p:cNvSpPr txBox="1"/>
-          <p:nvPr/>
-        </p:nvSpPr>
-        <p:spPr>
-          <a:xfrm>
-            <a:off x="822960" y="3666744"/>
-            <a:ext cx="548640" cy="804672"/>
-          </a:xfrm>
-          <a:prstGeom prst="rect">
-            <a:avLst/>
-          </a:prstGeom>
-          <a:noFill/>
-        </p:spPr>
-        <p:txBody>
-          <a:bodyPr wrap="square" anchor="t" lIns="0" rIns="0" tIns="0" bIns="0">
-            <a:spAutoFit/>
-          </a:bodyPr>
-          <a:lstStyle/>
-          <a:p>
-            <a:pPr algn="l">
-              <a:spcAft>
-                <a:spcPts val="1170"/>
-              </a:spcAft>
-            </a:pPr>
-            <a:r>
-              <a:rPr sz="2600" b="1" i="0">
-                <a:solidFill>
-                  <a:srgbClr val="F47B20"/>
-                </a:solidFill>
-                <a:latin typeface="Source Serif 4"/>
-              </a:rPr>
-              <a:t>3</a:t>
-            </a:r>
-          </a:p>
-        </p:txBody>
-      </p:sp>
-      <p:sp>
-        <p:nvSpPr>
-          <p:cNvPr id="11" name="TextBox 10"/>
-          <p:cNvSpPr txBox="1"/>
-          <p:nvPr/>
-        </p:nvSpPr>
-        <p:spPr>
-          <a:xfrm>
-            <a:off x="1463040" y="3703320"/>
-            <a:ext cx="9875520" cy="804672"/>
-          </a:xfrm>
-          <a:prstGeom prst="rect">
-            <a:avLst/>
-          </a:prstGeom>
-          <a:noFill/>
-        </p:spPr>
-        <p:txBody>
-          <a:bodyPr wrap="square" anchor="t" lIns="0" rIns="0" tIns="0" bIns="0">
-            <a:spAutoFit/>
-          </a:bodyPr>
-          <a:lstStyle/>
-          <a:p>
-            <a:pPr algn="l">
-              <a:spcAft>
-                <a:spcPts val="945"/>
-              </a:spcAft>
-            </a:pPr>
-            <a:r>
-              <a:rPr sz="2100" b="1" i="0">
-                <a:solidFill>
-                  <a:srgbClr val="1C1B19"/>
-                </a:solidFill>
-                <a:latin typeface="Source Serif 4"/>
-              </a:rPr>
-              <a:t>Five senses.</a:t>
-            </a:r>
-          </a:p>
-          <a:p>
-            <a:pPr algn="l">
-              <a:spcAft>
-                <a:spcPts val="945"/>
-              </a:spcAft>
-            </a:pPr>
-            <a:r>
-              <a:rPr sz="1600" b="0" i="0">
-                <a:solidFill>
-                  <a:srgbClr val="5D5A54"/>
-                </a:solidFill>
-                <a:latin typeface="Source Serif 4"/>
-              </a:rPr>
-              <a:t>5 see, 4 hear, 3 touch, 2 smell, 1 taste.</a:t>
-            </a:r>
-          </a:p>
-        </p:txBody>
-      </p:sp>
-      <p:sp>
-        <p:nvSpPr>
-          <p:cNvPr id="12" name="TextBox 11"/>
-          <p:cNvSpPr txBox="1"/>
-          <p:nvPr/>
-        </p:nvSpPr>
-        <p:spPr>
-          <a:xfrm>
-            <a:off x="822960" y="4471416"/>
-            <a:ext cx="548640" cy="804672"/>
-          </a:xfrm>
-          <a:prstGeom prst="rect">
-            <a:avLst/>
-          </a:prstGeom>
-          <a:noFill/>
-        </p:spPr>
-        <p:txBody>
-          <a:bodyPr wrap="square" anchor="t" lIns="0" rIns="0" tIns="0" bIns="0">
-            <a:spAutoFit/>
-          </a:bodyPr>
-          <a:lstStyle/>
-          <a:p>
-            <a:pPr algn="l">
-              <a:spcAft>
-                <a:spcPts val="1170"/>
-              </a:spcAft>
-            </a:pPr>
-            <a:r>
-              <a:rPr sz="2600" b="1" i="0">
-                <a:solidFill>
-                  <a:srgbClr val="F47B20"/>
-                </a:solidFill>
-                <a:latin typeface="Source Serif 4"/>
-              </a:rPr>
-              <a:t>4</a:t>
-            </a:r>
-          </a:p>
-        </p:txBody>
-      </p:sp>
-      <p:sp>
-        <p:nvSpPr>
-          <p:cNvPr id="13" name="TextBox 12"/>
-          <p:cNvSpPr txBox="1"/>
-          <p:nvPr/>
-        </p:nvSpPr>
-        <p:spPr>
-          <a:xfrm>
-            <a:off x="1463040" y="4507992"/>
-            <a:ext cx="9875520" cy="804672"/>
-          </a:xfrm>
-          <a:prstGeom prst="rect">
-            <a:avLst/>
-          </a:prstGeom>
-          <a:noFill/>
-        </p:spPr>
-        <p:txBody>
-          <a:bodyPr wrap="square" anchor="t" lIns="0" rIns="0" tIns="0" bIns="0">
-            <a:spAutoFit/>
-          </a:bodyPr>
-          <a:lstStyle/>
-          <a:p>
-            <a:pPr algn="l">
-              <a:spcAft>
-                <a:spcPts val="945"/>
-              </a:spcAft>
-            </a:pPr>
-            <a:r>
-              <a:rPr sz="2100" b="1" i="0">
-                <a:solidFill>
-                  <a:srgbClr val="1C1B19"/>
-                </a:solidFill>
-                <a:latin typeface="Source Serif 4"/>
-              </a:rPr>
-              <a:t>Kindness practice.</a:t>
-            </a:r>
-          </a:p>
-          <a:p>
-            <a:pPr algn="l">
-              <a:spcAft>
-                <a:spcPts val="945"/>
-              </a:spcAft>
-            </a:pPr>
-            <a:r>
-              <a:rPr sz="1600" b="0" i="0">
-                <a:solidFill>
-                  <a:srgbClr val="5D5A54"/>
-                </a:solidFill>
-                <a:latin typeface="Source Serif 4"/>
-              </a:rPr>
-              <a:t>Silently wishing yourself and others well.</a:t>
-            </a:r>
-          </a:p>
-        </p:txBody>
-      </p:sp>
-      <p:sp>
-        <p:nvSpPr>
-          <p:cNvPr id="14" name="TextBox 13"/>
-          <p:cNvSpPr txBox="1"/>
-          <p:nvPr/>
-        </p:nvSpPr>
-        <p:spPr>
-          <a:xfrm>
-            <a:off x="822960" y="5276088"/>
-            <a:ext cx="548640" cy="804672"/>
-          </a:xfrm>
-          <a:prstGeom prst="rect">
-            <a:avLst/>
-          </a:prstGeom>
-          <a:noFill/>
-        </p:spPr>
-        <p:txBody>
-          <a:bodyPr wrap="square" anchor="t" lIns="0" rIns="0" tIns="0" bIns="0">
-            <a:spAutoFit/>
-          </a:bodyPr>
-          <a:lstStyle/>
-          <a:p>
-            <a:pPr algn="l">
-              <a:spcAft>
-                <a:spcPts val="1170"/>
-              </a:spcAft>
-            </a:pPr>
-            <a:r>
-              <a:rPr sz="2600" b="1" i="0">
-                <a:solidFill>
-                  <a:srgbClr val="F47B20"/>
-                </a:solidFill>
-                <a:latin typeface="Source Serif 4"/>
-              </a:rPr>
-              <a:t>5</a:t>
-            </a:r>
-          </a:p>
-        </p:txBody>
-      </p:sp>
-      <p:sp>
-        <p:nvSpPr>
-          <p:cNvPr id="15" name="TextBox 14"/>
-          <p:cNvSpPr txBox="1"/>
-          <p:nvPr/>
-        </p:nvSpPr>
-        <p:spPr>
-          <a:xfrm>
-            <a:off x="1463040" y="5312664"/>
-            <a:ext cx="9875520" cy="804672"/>
-          </a:xfrm>
-          <a:prstGeom prst="rect">
-            <a:avLst/>
-          </a:prstGeom>
-          <a:noFill/>
-        </p:spPr>
-        <p:txBody>
-          <a:bodyPr wrap="square" anchor="t" lIns="0" rIns="0" tIns="0" bIns="0">
-            <a:spAutoFit/>
-          </a:bodyPr>
-          <a:lstStyle/>
-          <a:p>
-            <a:pPr algn="l">
-              <a:spcAft>
-                <a:spcPts val="945"/>
-              </a:spcAft>
-            </a:pPr>
-            <a:r>
-              <a:rPr sz="2100" b="1" i="0">
-                <a:solidFill>
-                  <a:srgbClr val="1C1B19"/>
-                </a:solidFill>
-                <a:latin typeface="Source Serif 4"/>
-              </a:rPr>
-              <a:t>Body scan.</a:t>
-            </a:r>
-          </a:p>
-          <a:p>
-            <a:pPr algn="l">
-              <a:spcAft>
-                <a:spcPts val="945"/>
-              </a:spcAft>
-            </a:pPr>
-            <a:r>
-              <a:rPr sz="1600" b="0" i="0">
-                <a:solidFill>
-                  <a:srgbClr val="5D5A54"/>
-                </a:solidFill>
-                <a:latin typeface="Source Serif 4"/>
-              </a:rPr>
-              <a:t>Attention moving slowly from feet to head. Best on your own.</a:t>
+                <a:latin typeface="Inter Tight"/>
+              </a:rPr>
+              <a:t>Eyes open or closed. No right number.</a:t>
             </a:r>
           </a:p>
         </p:txBody>
@@ -6074,7 +7844,7 @@
 </p:sld>
 </file>
 
-<file path=ppt/slides/slide13.xml><?xml version="1.0" encoding="utf-8"?>
+<file path=ppt/slides/slide4.xml><?xml version="1.0" encoding="utf-8"?>
 <p:sld xmlns:a="http://schemas.openxmlformats.org/drawingml/2006/main" xmlns:p="http://schemas.openxmlformats.org/presentationml/2006/main" xmlns:r="http://schemas.openxmlformats.org/officeDocument/2006/relationships">
   <p:cSld>
     <p:bg>
@@ -6170,7 +7940,7 @@
                 </a:solidFill>
                 <a:latin typeface="Inter Tight"/>
               </a:rPr>
-              <a:t>TRY ONE</a:t>
+              <a:t>WHAT IT IS</a:t>
             </a:r>
           </a:p>
         </p:txBody>
@@ -6209,52 +7979,47 @@
                 </a:solidFill>
                 <a:latin typeface="Inter Tight"/>
               </a:rPr>
-              <a:t>train-your-attention Counseling</a:t>
-            </a:r>
-          </a:p>
-        </p:txBody>
-      </p:sp>
-      <p:sp>
-        <p:nvSpPr>
-          <p:cNvPr id="5" name="Rectangle 4"/>
-          <p:cNvSpPr/>
+              <a:t>Beaver Counseling</a:t>
+            </a:r>
+          </a:p>
+        </p:txBody>
+      </p:sp>
+      <p:sp>
+        <p:nvSpPr>
+          <p:cNvPr id="5" name="TextBox 4"/>
+          <p:cNvSpPr txBox="1"/>
           <p:nvPr/>
         </p:nvSpPr>
         <p:spPr>
           <a:xfrm>
-            <a:off x="822960" y="1371600"/>
-            <a:ext cx="73152" cy="3566160"/>
-          </a:xfrm>
-          <a:prstGeom prst="rect">
-            <a:avLst/>
-          </a:prstGeom>
-          <a:solidFill>
-            <a:srgbClr val="F47B20"/>
-          </a:solidFill>
-          <a:ln>
-            <a:noFill/>
-          </a:ln>
-          <a:effectLst/>
-        </p:spPr>
-        <p:style>
-          <a:lnRef idx="1">
-            <a:schemeClr val="accent1"/>
-          </a:lnRef>
-          <a:fillRef idx="3">
-            <a:schemeClr val="accent1"/>
-          </a:fillRef>
-          <a:effectRef idx="2">
-            <a:schemeClr val="accent1"/>
-          </a:effectRef>
-          <a:fontRef idx="minor">
-            <a:schemeClr val="lt1"/>
-          </a:fontRef>
-        </p:style>
-        <p:txBody>
-          <a:bodyPr rtlCol="0" anchor="ctr"/>
-          <a:lstStyle/>
-          <a:p>
-            <a:pPr algn="ctr"/>
+            <a:off x="822960" y="1463040"/>
+            <a:ext cx="10515600" cy="3291840"/>
+          </a:xfrm>
+          <a:prstGeom prst="rect">
+            <a:avLst/>
+          </a:prstGeom>
+          <a:noFill/>
+        </p:spPr>
+        <p:txBody>
+          <a:bodyPr wrap="square" anchor="ctr" lIns="0" rIns="0" tIns="0" bIns="0">
+            <a:spAutoFit/>
+          </a:bodyPr>
+          <a:lstStyle/>
+          <a:p>
+            <a:pPr algn="l">
+              <a:spcAft>
+                <a:spcPts val="2070"/>
+              </a:spcAft>
+            </a:pPr>
+            <a:r>
+              <a:rPr sz="4600" b="1" i="0">
+                <a:solidFill>
+                  <a:srgbClr val="1C1B19"/>
+                </a:solidFill>
+                <a:latin typeface="Source Serif 4"/>
+              </a:rPr>
+              <a:t>Mindfulness is paying attention to right now, on purpose, without judging it.</a:t>
+            </a:r>
           </a:p>
         </p:txBody>
       </p:sp>
@@ -6266,47 +8031,8 @@
         </p:nvSpPr>
         <p:spPr>
           <a:xfrm>
-            <a:off x="1188720" y="1371600"/>
-            <a:ext cx="10058400" cy="3566160"/>
-          </a:xfrm>
-          <a:prstGeom prst="rect">
-            <a:avLst/>
-          </a:prstGeom>
-          <a:noFill/>
-        </p:spPr>
-        <p:txBody>
-          <a:bodyPr wrap="square" anchor="ctr" lIns="0" rIns="0" tIns="0" bIns="0">
-            <a:spAutoFit/>
-          </a:bodyPr>
-          <a:lstStyle/>
-          <a:p>
-            <a:pPr algn="l">
-              <a:spcAft>
-                <a:spcPts val="1800"/>
-              </a:spcAft>
-            </a:pPr>
-            <a:r>
-              <a:rPr sz="4000" b="0" i="1">
-                <a:solidFill>
-                  <a:srgbClr val="1C1B19"/>
-                </a:solidFill>
-                <a:latin typeface="Source Serif 4"/>
-              </a:rPr>
-              <a:t>Two to three minutes. Your choice: breathing, five senses, or a slow stretch.</a:t>
-            </a:r>
-          </a:p>
-        </p:txBody>
-      </p:sp>
-      <p:sp>
-        <p:nvSpPr>
-          <p:cNvPr id="7" name="TextBox 6"/>
-          <p:cNvSpPr txBox="1"/>
-          <p:nvPr/>
-        </p:nvSpPr>
-        <p:spPr>
-          <a:xfrm>
-            <a:off x="1188720" y="5120640"/>
-            <a:ext cx="10058400" cy="914400"/>
+            <a:off x="822960" y="4846320"/>
+            <a:ext cx="10515600" cy="1097280"/>
           </a:xfrm>
           <a:prstGeom prst="rect">
             <a:avLst/>
@@ -6321,17 +8047,17 @@
           <a:p>
             <a:pPr algn="l">
               <a:spcAft>
-                <a:spcPts val="810"/>
-              </a:spcAft>
-            </a:pPr>
-            <a:r>
-              <a:rPr sz="1800" b="0" i="0">
+                <a:spcPts val="990"/>
+              </a:spcAft>
+            </a:pPr>
+            <a:r>
+              <a:rPr sz="2200" b="0" i="1">
                 <a:solidFill>
                   <a:srgbClr val="5D5A54"/>
                 </a:solidFill>
-                <a:latin typeface="Inter Tight"/>
-              </a:rPr>
-              <a:t>Eyes open is fine. Stop whenever you want.</a:t>
+                <a:latin typeface="Source Serif 4"/>
+              </a:rPr>
+              <a:t>When your mind wanders, you notice and come back. The coming back is the practice.</a:t>
             </a:r>
           </a:p>
         </p:txBody>
@@ -6344,7 +8070,7 @@
 </p:sld>
 </file>
 
-<file path=ppt/slides/slide14.xml><?xml version="1.0" encoding="utf-8"?>
+<file path=ppt/slides/slide5.xml><?xml version="1.0" encoding="utf-8"?>
 <p:sld xmlns:a="http://schemas.openxmlformats.org/drawingml/2006/main" xmlns:p="http://schemas.openxmlformats.org/presentationml/2006/main" xmlns:r="http://schemas.openxmlformats.org/officeDocument/2006/relationships">
   <p:cSld>
     <p:bg>
@@ -6440,7 +8166,7 @@
                 </a:solidFill>
                 <a:latin typeface="Inter Tight"/>
               </a:rPr>
-              <a:t>BEFORE YOU GO</a:t>
+              <a:t>THE RESEARCH</a:t>
             </a:r>
           </a:p>
         </p:txBody>
@@ -6479,7 +8205,7 @@
                 </a:solidFill>
                 <a:latin typeface="Inter Tight"/>
               </a:rPr>
-              <a:t>train-your-attention Counseling</a:t>
+              <a:t>Beaver Counseling</a:t>
             </a:r>
           </a:p>
         </p:txBody>
@@ -6492,8 +8218,8 @@
         </p:nvSpPr>
         <p:spPr>
           <a:xfrm>
-            <a:off x="822960" y="1188720"/>
-            <a:ext cx="10515600" cy="914400"/>
+            <a:off x="822960" y="914400"/>
+            <a:ext cx="10515600" cy="365760"/>
           </a:xfrm>
           <a:prstGeom prst="rect">
             <a:avLst/>
@@ -6508,17 +8234,17 @@
           <a:p>
             <a:pPr algn="l">
               <a:spcAft>
-                <a:spcPts val="1620"/>
-              </a:spcAft>
-            </a:pPr>
-            <a:r>
-              <a:rPr sz="3600" b="1" i="0">
-                <a:solidFill>
-                  <a:srgbClr val="1C1B19"/>
-                </a:solidFill>
-                <a:latin typeface="Source Serif 4"/>
-              </a:rPr>
-              <a:t>Which practice might you try this week, and when?</a:t>
+                <a:spcPts val="630"/>
+              </a:spcAft>
+            </a:pPr>
+            <a:r>
+              <a:rPr sz="1400" b="1" i="0">
+                <a:solidFill>
+                  <a:srgbClr val="0B2D5B"/>
+                </a:solidFill>
+                <a:latin typeface="Inter Tight"/>
+              </a:rPr>
+              <a:t>Killingsworth &amp; Gilbert, 2010</a:t>
             </a:r>
           </a:p>
         </p:txBody>
@@ -6531,8 +8257,8 @@
         </p:nvSpPr>
         <p:spPr>
           <a:xfrm>
-            <a:off x="822960" y="2286000"/>
-            <a:ext cx="10515600" cy="1463040"/>
+            <a:off x="822960" y="1325880"/>
+            <a:ext cx="10515600" cy="1097280"/>
           </a:xfrm>
           <a:prstGeom prst="rect">
             <a:avLst/>
@@ -6547,42 +8273,111 @@
           <a:p>
             <a:pPr algn="l">
               <a:spcAft>
-                <a:spcPts val="1080"/>
-              </a:spcAft>
-            </a:pPr>
-            <a:r>
-              <a:rPr sz="2400" b="0" i="0">
+                <a:spcPts val="1440"/>
+              </a:spcAft>
+            </a:pPr>
+            <a:r>
+              <a:rPr sz="3200" b="1" i="0">
                 <a:solidFill>
                   <a:srgbClr val="1C1B19"/>
                 </a:solidFill>
                 <a:latin typeface="Source Serif 4"/>
               </a:rPr>
-              <a:t>Exit card, no names. The practice cards are linked here.</a:t>
-            </a:r>
-          </a:p>
-        </p:txBody>
-      </p:sp>
-      <p:sp>
-        <p:nvSpPr>
-          <p:cNvPr id="7" name="Rectangle 6"/>
+              <a:t>Minds wander almost half the time.</a:t>
+            </a:r>
+          </a:p>
+        </p:txBody>
+      </p:sp>
+      <p:sp>
+        <p:nvSpPr>
+          <p:cNvPr id="7" name="TextBox 6"/>
+          <p:cNvSpPr txBox="1"/>
+          <p:nvPr/>
+        </p:nvSpPr>
+        <p:spPr>
+          <a:xfrm>
+            <a:off x="822960" y="2514600"/>
+            <a:ext cx="10515600" cy="2194560"/>
+          </a:xfrm>
+          <a:prstGeom prst="rect">
+            <a:avLst/>
+          </a:prstGeom>
+          <a:noFill/>
+        </p:spPr>
+        <p:txBody>
+          <a:bodyPr wrap="square" anchor="t" lIns="0" rIns="0" tIns="0" bIns="0">
+            <a:spAutoFit/>
+          </a:bodyPr>
+          <a:lstStyle/>
+          <a:p>
+            <a:pPr algn="l">
+              <a:spcAft>
+                <a:spcPts val="855"/>
+              </a:spcAft>
+            </a:pPr>
+            <a:r>
+              <a:rPr sz="1900" b="0" i="0">
+                <a:solidFill>
+                  <a:srgbClr val="1C1B19"/>
+                </a:solidFill>
+                <a:latin typeface="Source Serif 4"/>
+              </a:rPr>
+              <a:t>•  About 2,250 adults got random phone check-ins: what are you doing, what are you thinking about?</a:t>
+            </a:r>
+          </a:p>
+          <a:p>
+            <a:pPr algn="l">
+              <a:spcAft>
+                <a:spcPts val="855"/>
+              </a:spcAft>
+            </a:pPr>
+            <a:r>
+              <a:rPr sz="1900" b="0" i="0">
+                <a:solidFill>
+                  <a:srgbClr val="1C1B19"/>
+                </a:solidFill>
+                <a:latin typeface="Source Serif 4"/>
+              </a:rPr>
+              <a:t>•  Their minds were somewhere else 47% of the time.</a:t>
+            </a:r>
+          </a:p>
+          <a:p>
+            <a:pPr algn="l">
+              <a:spcAft>
+                <a:spcPts val="855"/>
+              </a:spcAft>
+            </a:pPr>
+            <a:r>
+              <a:rPr sz="1900" b="0" i="0">
+                <a:solidFill>
+                  <a:srgbClr val="1C1B19"/>
+                </a:solidFill>
+                <a:latin typeface="Source Serif 4"/>
+              </a:rPr>
+              <a:t>•  They were less happy while their minds wandered, even during pleasant activities.</a:t>
+            </a:r>
+          </a:p>
+        </p:txBody>
+      </p:sp>
+      <p:sp>
+        <p:nvSpPr>
+          <p:cNvPr id="8" name="Rectangle 7"/>
           <p:cNvSpPr/>
           <p:nvPr/>
         </p:nvSpPr>
         <p:spPr>
           <a:xfrm>
-            <a:off x="822960" y="4023360"/>
-            <a:ext cx="10515600" cy="1371600"/>
+            <a:off x="822960" y="4892040"/>
+            <a:ext cx="73152" cy="1097280"/>
           </a:xfrm>
           <a:prstGeom prst="rect">
             <a:avLst/>
           </a:prstGeom>
           <a:solidFill>
-            <a:srgbClr val="FFFFFF"/>
+            <a:srgbClr val="F47B20"/>
           </a:solidFill>
-          <a:ln w="15875">
-            <a:solidFill>
-              <a:srgbClr val="1C1B19"/>
-            </a:solidFill>
+          <a:ln>
+            <a:noFill/>
           </a:ln>
           <a:effectLst/>
         </p:spPr>
@@ -6610,14 +8405,14 @@
       </p:sp>
       <p:sp>
         <p:nvSpPr>
-          <p:cNvPr id="8" name="TextBox 7"/>
+          <p:cNvPr id="9" name="TextBox 8"/>
           <p:cNvSpPr txBox="1"/>
           <p:nvPr/>
         </p:nvSpPr>
         <p:spPr>
           <a:xfrm>
-            <a:off x="1097280" y="4206240"/>
-            <a:ext cx="10058400" cy="365760"/>
+            <a:off x="1097280" y="4892040"/>
+            <a:ext cx="10241280" cy="1188720"/>
           </a:xfrm>
           <a:prstGeom prst="rect">
             <a:avLst/>
@@ -6632,1806 +8427,33 @@
           <a:p>
             <a:pPr algn="l">
               <a:spcAft>
-                <a:spcPts val="540"/>
+                <a:spcPts val="855"/>
               </a:spcAft>
             </a:pPr>
             <a:r>
               <a:rPr sz="1200" b="1" i="0">
                 <a:solidFill>
-                  <a:srgbClr val="0B2D5B"/>
+                  <a:srgbClr val="F47B20"/>
                 </a:solidFill>
                 <a:latin typeface="Inter Tight"/>
               </a:rPr>
-              <a:t>STUDENT PAGE</a:t>
-            </a:r>
-          </a:p>
-        </p:txBody>
-      </p:sp>
-      <p:sp>
-        <p:nvSpPr>
-          <p:cNvPr id="9" name="TextBox 8"/>
-          <p:cNvSpPr txBox="1"/>
-          <p:nvPr/>
-        </p:nvSpPr>
-        <p:spPr>
-          <a:xfrm>
-            <a:off x="1097280" y="4617720"/>
-            <a:ext cx="10058400" cy="640080"/>
-          </a:xfrm>
-          <a:prstGeom prst="rect">
-            <a:avLst/>
-          </a:prstGeom>
-          <a:noFill/>
-        </p:spPr>
-        <p:txBody>
-          <a:bodyPr wrap="square" anchor="t" lIns="0" rIns="0" tIns="0" bIns="0">
-            <a:spAutoFit/>
-          </a:bodyPr>
-          <a:lstStyle/>
-          <a:p>
-            <a:pPr algn="l">
-              <a:spcAft>
-                <a:spcPts val="900"/>
-              </a:spcAft>
-            </a:pPr>
-            <a:r>
-              <a:rPr sz="2000" b="0" i="0">
+              <a:t>IN CLASS</a:t>
+            </a:r>
+          </a:p>
+          <a:p>
+            <a:pPr algn="l">
+              <a:spcAft>
+                <a:spcPts val="855"/>
+              </a:spcAft>
+            </a:pPr>
+            <a:r>
+              <a:rPr sz="1900" b="0" i="0">
                 <a:solidFill>
                   <a:srgbClr val="1C1B19"/>
                 </a:solidFill>
-                <a:latin typeface="Inter Tight"/>
-              </a:rPr>
-              <a:t>https://rmwtoolkit.github.io/bcds-toolkit/train-your-attention-high-school.html</a:t>
-            </a:r>
-          </a:p>
-        </p:txBody>
-      </p:sp>
-    </p:spTree>
-  </p:cSld>
-  <p:clrMapOvr>
-    <a:masterClrMapping/>
-  </p:clrMapOvr>
-</p:sld>
-</file>
-
-<file path=ppt/slides/slide2.xml><?xml version="1.0" encoding="utf-8"?>
-<p:sld xmlns:a="http://schemas.openxmlformats.org/drawingml/2006/main" xmlns:p="http://schemas.openxmlformats.org/presentationml/2006/main" xmlns:r="http://schemas.openxmlformats.org/officeDocument/2006/relationships" show="0">
-  <p:cSld>
-    <p:bg>
-      <p:bgPr>
-        <a:solidFill>
-          <a:srgbClr val="EEEBE4"/>
-        </a:solidFill>
-        <a:effectLst/>
-      </p:bgPr>
-    </p:bg>
-    <p:spTree>
-      <p:nvGrpSpPr>
-        <p:cNvPr id="1" name=""/>
-        <p:cNvGrpSpPr/>
-        <p:nvPr/>
-      </p:nvGrpSpPr>
-      <p:grpSpPr/>
-      <p:sp>
-        <p:nvSpPr>
-          <p:cNvPr id="2" name="Rectangle 1"/>
-          <p:cNvSpPr/>
-          <p:nvPr/>
-        </p:nvSpPr>
-        <p:spPr>
-          <a:xfrm>
-            <a:off x="0" y="0"/>
-            <a:ext cx="12191695" cy="384048"/>
-          </a:xfrm>
-          <a:prstGeom prst="rect">
-            <a:avLst/>
-          </a:prstGeom>
-          <a:solidFill>
-            <a:srgbClr val="0B2D5B"/>
-          </a:solidFill>
-          <a:ln>
-            <a:noFill/>
-          </a:ln>
-          <a:effectLst/>
-        </p:spPr>
-        <p:style>
-          <a:lnRef idx="1">
-            <a:schemeClr val="accent1"/>
-          </a:lnRef>
-          <a:fillRef idx="3">
-            <a:schemeClr val="accent1"/>
-          </a:fillRef>
-          <a:effectRef idx="2">
-            <a:schemeClr val="accent1"/>
-          </a:effectRef>
-          <a:fontRef idx="minor">
-            <a:schemeClr val="lt1"/>
-          </a:fontRef>
-        </p:style>
-        <p:txBody>
-          <a:bodyPr rtlCol="0" anchor="ctr"/>
-          <a:lstStyle/>
-          <a:p>
-            <a:pPr algn="ctr"/>
-          </a:p>
-        </p:txBody>
-      </p:sp>
-      <p:sp>
-        <p:nvSpPr>
-          <p:cNvPr id="3" name="TextBox 2"/>
-          <p:cNvSpPr txBox="1"/>
-          <p:nvPr/>
-        </p:nvSpPr>
-        <p:spPr>
-          <a:xfrm>
-            <a:off x="548640" y="100584"/>
-            <a:ext cx="10972800" cy="274320"/>
-          </a:xfrm>
-          <a:prstGeom prst="rect">
-            <a:avLst/>
-          </a:prstGeom>
-          <a:noFill/>
-        </p:spPr>
-        <p:txBody>
-          <a:bodyPr wrap="square" anchor="t" lIns="0" rIns="0" tIns="0" bIns="0">
-            <a:spAutoFit/>
-          </a:bodyPr>
-          <a:lstStyle/>
-          <a:p>
-            <a:pPr algn="l">
-              <a:spcAft>
-                <a:spcPts val="495"/>
-              </a:spcAft>
-            </a:pPr>
-            <a:r>
-              <a:rPr sz="1100" b="1" i="0">
-                <a:solidFill>
-                  <a:srgbClr val="FFFFFF"/>
-                </a:solidFill>
-                <a:latin typeface="Inter Tight"/>
-              </a:rPr>
-              <a:t>TEACHER PAGE  ·  skipped when you present  ·  Before you teach</a:t>
-            </a:r>
-          </a:p>
-        </p:txBody>
-      </p:sp>
-      <p:sp>
-        <p:nvSpPr>
-          <p:cNvPr id="4" name="TextBox 3"/>
-          <p:cNvSpPr txBox="1"/>
-          <p:nvPr/>
-        </p:nvSpPr>
-        <p:spPr>
-          <a:xfrm>
-            <a:off x="548640" y="685800"/>
-            <a:ext cx="10972800" cy="640080"/>
-          </a:xfrm>
-          <a:prstGeom prst="rect">
-            <a:avLst/>
-          </a:prstGeom>
-          <a:noFill/>
-        </p:spPr>
-        <p:txBody>
-          <a:bodyPr wrap="square" anchor="t" lIns="0" rIns="0" tIns="0" bIns="0">
-            <a:spAutoFit/>
-          </a:bodyPr>
-          <a:lstStyle/>
-          <a:p>
-            <a:pPr algn="l">
-              <a:spcAft>
-                <a:spcPts val="1350"/>
-              </a:spcAft>
-            </a:pPr>
-            <a:r>
-              <a:rPr sz="3000" b="1" i="0">
-                <a:solidFill>
-                  <a:srgbClr val="1C1B19"/>
-                </a:solidFill>
-                <a:latin typeface="Source Serif 4"/>
-              </a:rPr>
-              <a:t>Before you teach</a:t>
-            </a:r>
-          </a:p>
-        </p:txBody>
-      </p:sp>
-      <p:sp>
-        <p:nvSpPr>
-          <p:cNvPr id="5" name="TextBox 4"/>
-          <p:cNvSpPr txBox="1"/>
-          <p:nvPr/>
-        </p:nvSpPr>
-        <p:spPr>
-          <a:xfrm>
-            <a:off x="548640" y="1463040"/>
-            <a:ext cx="5394960" cy="4937760"/>
-          </a:xfrm>
-          <a:prstGeom prst="rect">
-            <a:avLst/>
-          </a:prstGeom>
-          <a:noFill/>
-        </p:spPr>
-        <p:txBody>
-          <a:bodyPr wrap="square" anchor="t" lIns="0" rIns="0" tIns="0" bIns="0">
-            <a:spAutoFit/>
-          </a:bodyPr>
-          <a:lstStyle/>
-          <a:p>
-            <a:pPr algn="l">
-              <a:spcAft>
-                <a:spcPts val="585"/>
-              </a:spcAft>
-            </a:pPr>
-            <a:r>
-              <a:rPr sz="1500" b="1" i="0">
-                <a:solidFill>
-                  <a:srgbClr val="1C1B19"/>
-                </a:solidFill>
-                <a:latin typeface="Source Serif 4"/>
-              </a:rPr>
-              <a:t>Invite, never require.</a:t>
-            </a:r>
-          </a:p>
-          <a:p>
-            <a:pPr algn="l">
-              <a:spcAft>
-                <a:spcPts val="585"/>
-              </a:spcAft>
-            </a:pPr>
-            <a:r>
-              <a:rPr sz="1300" b="0" i="0">
-                <a:solidFill>
-                  <a:srgbClr val="1C1B19"/>
-                </a:solidFill>
-                <a:latin typeface="Source Serif 4"/>
-              </a:rPr>
-              <a:t>Every practice is optional. Students can keep their eyes open, look at the desk, doodle quietly, or just sit. Say so before every practice. A student who opts out is following the instructions.</a:t>
-            </a:r>
-          </a:p>
-          <a:p>
-            <a:pPr algn="l">
-              <a:spcAft>
-                <a:spcPts val="585"/>
-              </a:spcAft>
-            </a:pPr>
-            <a:r>
-              <a:rPr sz="1300" b="0" i="0">
-                <a:solidFill>
-                  <a:srgbClr val="1C1B19"/>
-                </a:solidFill>
-                <a:latin typeface="Source Serif 4"/>
-              </a:rPr>
-              <a:t/>
-            </a:r>
-          </a:p>
-          <a:p>
-            <a:pPr algn="l">
-              <a:spcAft>
-                <a:spcPts val="585"/>
-              </a:spcAft>
-            </a:pPr>
-            <a:r>
-              <a:rPr sz="1500" b="1" i="0">
-                <a:solidFill>
-                  <a:srgbClr val="1C1B19"/>
-                </a:solidFill>
-                <a:latin typeface="Source Serif 4"/>
-              </a:rPr>
-              <a:t>Breath focus isn't calming for everyone.</a:t>
-            </a:r>
-          </a:p>
-          <a:p>
-            <a:pPr algn="l">
-              <a:spcAft>
-                <a:spcPts val="585"/>
-              </a:spcAft>
-            </a:pPr>
-            <a:r>
-              <a:rPr sz="1300" b="0" i="0">
-                <a:solidFill>
-                  <a:srgbClr val="1C1B19"/>
-                </a:solidFill>
-                <a:latin typeface="Source Serif 4"/>
-              </a:rPr>
-              <a:t>For some students, paying attention to breathing raises anxiety. Always offer another anchor: sounds, hands on the desk, feet on the floor. If a student looks distressed, invite them to open their eyes and look around the room.</a:t>
-            </a:r>
-          </a:p>
-          <a:p>
-            <a:pPr algn="l">
-              <a:spcAft>
-                <a:spcPts val="585"/>
-              </a:spcAft>
-            </a:pPr>
-            <a:r>
-              <a:rPr sz="1300" b="0" i="0">
-                <a:solidFill>
-                  <a:srgbClr val="1C1B19"/>
-                </a:solidFill>
-                <a:latin typeface="Source Serif 4"/>
-              </a:rPr>
-              <a:t/>
-            </a:r>
-          </a:p>
-          <a:p>
-            <a:pPr algn="l">
-              <a:spcAft>
-                <a:spcPts val="585"/>
-              </a:spcAft>
-            </a:pPr>
-            <a:r>
-              <a:rPr sz="1500" b="1" i="0">
-                <a:solidFill>
-                  <a:srgbClr val="1C1B19"/>
-                </a:solidFill>
-                <a:latin typeface="Source Serif 4"/>
-              </a:rPr>
-              <a:t>Trauma and the body.</a:t>
-            </a:r>
-          </a:p>
-          <a:p>
-            <a:pPr algn="l">
-              <a:spcAft>
-                <a:spcPts val="585"/>
-              </a:spcAft>
-            </a:pPr>
-            <a:r>
-              <a:rPr sz="1300" b="0" i="0">
-                <a:solidFill>
-                  <a:srgbClr val="1C1B19"/>
-                </a:solidFill>
-                <a:latin typeface="Source Serif 4"/>
-              </a:rPr>
-              <a:t>Students who have lived through something frightening, or who struggle with body image or eating, may find body-focused practices uncomfortable or upsetting. Don't do a full body scan in class; leave it on the practice card for students to choose. Watch for students who seem far away or frozen, and bring the group back gently with eyes open and a few normal sounds.</a:t>
-            </a:r>
-          </a:p>
-          <a:p>
-            <a:pPr algn="l">
-              <a:spcAft>
-                <a:spcPts val="585"/>
-              </a:spcAft>
-            </a:pPr>
-            <a:r>
-              <a:rPr sz="1300" b="0" i="0">
-                <a:solidFill>
-                  <a:srgbClr val="1C1B19"/>
-                </a:solidFill>
-                <a:latin typeface="Source Serif 4"/>
-              </a:rPr>
-              <a:t/>
-            </a:r>
-          </a:p>
-        </p:txBody>
-      </p:sp>
-      <p:sp>
-        <p:nvSpPr>
-          <p:cNvPr id="6" name="TextBox 5"/>
-          <p:cNvSpPr txBox="1"/>
-          <p:nvPr/>
-        </p:nvSpPr>
-        <p:spPr>
-          <a:xfrm>
-            <a:off x="6217920" y="1463040"/>
-            <a:ext cx="5394960" cy="4937760"/>
-          </a:xfrm>
-          <a:prstGeom prst="rect">
-            <a:avLst/>
-          </a:prstGeom>
-          <a:noFill/>
-        </p:spPr>
-        <p:txBody>
-          <a:bodyPr wrap="square" anchor="t" lIns="0" rIns="0" tIns="0" bIns="0">
-            <a:spAutoFit/>
-          </a:bodyPr>
-          <a:lstStyle/>
-          <a:p>
-            <a:pPr algn="l">
-              <a:spcAft>
-                <a:spcPts val="585"/>
-              </a:spcAft>
-            </a:pPr>
-            <a:r>
-              <a:rPr sz="1500" b="1" i="0">
-                <a:solidFill>
-                  <a:srgbClr val="1C1B19"/>
-                </a:solidFill>
-                <a:latin typeface="Source Serif 4"/>
-              </a:rPr>
-              <a:t>When to bring in a counselor.</a:t>
-            </a:r>
-          </a:p>
-          <a:p>
-            <a:pPr algn="l">
-              <a:spcAft>
-                <a:spcPts val="585"/>
-              </a:spcAft>
-            </a:pPr>
-            <a:r>
-              <a:rPr sz="1300" b="0" i="0">
-                <a:solidFill>
-                  <a:srgbClr val="1C1B19"/>
-                </a:solidFill>
-                <a:latin typeface="Source Serif 4"/>
-              </a:rPr>
-              <a:t>Refer the same day if a practice brings on panic, a flashback, or a student seeming disconnected for more than a few minutes. Also refer if a student mentions they can't sleep, can't stop worrying, or feels hopeless. Disclosures go to a counselor. No screening questions in class.</a:t>
-            </a:r>
-          </a:p>
-          <a:p>
-            <a:pPr algn="l">
-              <a:spcAft>
-                <a:spcPts val="585"/>
-              </a:spcAft>
-            </a:pPr>
-            <a:r>
-              <a:rPr sz="1300" b="0" i="0">
-                <a:solidFill>
-                  <a:srgbClr val="1C1B19"/>
-                </a:solidFill>
-                <a:latin typeface="Source Serif 4"/>
-              </a:rPr>
-              <a:t/>
-            </a:r>
-          </a:p>
-          <a:p>
-            <a:pPr algn="l">
-              <a:spcAft>
-                <a:spcPts val="585"/>
-              </a:spcAft>
-            </a:pPr>
-            <a:r>
-              <a:rPr sz="1500" b="1" i="0">
-                <a:solidFill>
-                  <a:srgbClr val="1C1B19"/>
-                </a:solidFill>
-                <a:latin typeface="Source Serif 4"/>
-              </a:rPr>
-              <a:t>Don't oversell it.</a:t>
-            </a:r>
-          </a:p>
-          <a:p>
-            <a:pPr algn="l">
-              <a:spcAft>
-                <a:spcPts val="585"/>
-              </a:spcAft>
-            </a:pPr>
-            <a:r>
-              <a:rPr sz="1300" b="0" i="0">
-                <a:solidFill>
-                  <a:srgbClr val="1C1B19"/>
-                </a:solidFill>
-                <a:latin typeface="Source Serif 4"/>
-              </a:rPr>
-              <a:t>Mindfulness is a useful skill, not a treatment for depression or anxiety, and it doesn't replace counseling. The research slides give you honest language. If a student says it didn't work for them, that's a reasonable result.</a:t>
-            </a:r>
-          </a:p>
-          <a:p>
-            <a:pPr algn="l">
-              <a:spcAft>
-                <a:spcPts val="585"/>
-              </a:spcAft>
-            </a:pPr>
-            <a:r>
-              <a:rPr sz="1300" b="0" i="0">
-                <a:solidFill>
-                  <a:srgbClr val="1C1B19"/>
-                </a:solidFill>
-                <a:latin typeface="Source Serif 4"/>
-              </a:rPr>
-              <a:t/>
-            </a:r>
-          </a:p>
-          <a:p>
-            <a:pPr algn="l">
-              <a:spcAft>
-                <a:spcPts val="585"/>
-              </a:spcAft>
-            </a:pPr>
-            <a:r>
-              <a:rPr sz="1500" b="1" i="0">
-                <a:solidFill>
-                  <a:srgbClr val="1C1B19"/>
-                </a:solidFill>
-                <a:latin typeface="Source Serif 4"/>
-              </a:rPr>
-              <a:t>Keep it secular in class, and honor the roots.</a:t>
-            </a:r>
-          </a:p>
-          <a:p>
-            <a:pPr algn="l">
-              <a:spcAft>
-                <a:spcPts val="585"/>
-              </a:spcAft>
-            </a:pPr>
-            <a:r>
-              <a:rPr sz="1300" b="0" i="0">
-                <a:solidFill>
-                  <a:srgbClr val="1C1B19"/>
-                </a:solidFill>
-                <a:latin typeface="Source Serif 4"/>
-              </a:rPr>
-              <a:t>Name the Buddhist origins plainly (slide 7). Don't ask students to chant, bow, or adopt any belief. Students whose families object can sit quietly or read during the practice.</a:t>
-            </a:r>
-          </a:p>
-          <a:p>
-            <a:pPr algn="l">
-              <a:spcAft>
-                <a:spcPts val="585"/>
-              </a:spcAft>
-            </a:pPr>
-            <a:r>
-              <a:rPr sz="1300" b="0" i="0">
-                <a:solidFill>
-                  <a:srgbClr val="1C1B19"/>
-                </a:solidFill>
-                <a:latin typeface="Source Serif 4"/>
-              </a:rPr>
-              <a:t/>
-            </a:r>
-          </a:p>
-        </p:txBody>
-      </p:sp>
-    </p:spTree>
-  </p:cSld>
-  <p:clrMapOvr>
-    <a:masterClrMapping/>
-  </p:clrMapOvr>
-</p:sld>
-</file>
-
-<file path=ppt/slides/slide3.xml><?xml version="1.0" encoding="utf-8"?>
-<p:sld xmlns:a="http://schemas.openxmlformats.org/drawingml/2006/main" xmlns:p="http://schemas.openxmlformats.org/presentationml/2006/main" xmlns:r="http://schemas.openxmlformats.org/officeDocument/2006/relationships" show="0">
-  <p:cSld>
-    <p:bg>
-      <p:bgPr>
-        <a:solidFill>
-          <a:srgbClr val="EEEBE4"/>
-        </a:solidFill>
-        <a:effectLst/>
-      </p:bgPr>
-    </p:bg>
-    <p:spTree>
-      <p:nvGrpSpPr>
-        <p:cNvPr id="1" name=""/>
-        <p:cNvGrpSpPr/>
-        <p:nvPr/>
-      </p:nvGrpSpPr>
-      <p:grpSpPr/>
-      <p:sp>
-        <p:nvSpPr>
-          <p:cNvPr id="2" name="Rectangle 1"/>
-          <p:cNvSpPr/>
-          <p:nvPr/>
-        </p:nvSpPr>
-        <p:spPr>
-          <a:xfrm>
-            <a:off x="0" y="0"/>
-            <a:ext cx="12191695" cy="384048"/>
-          </a:xfrm>
-          <a:prstGeom prst="rect">
-            <a:avLst/>
-          </a:prstGeom>
-          <a:solidFill>
-            <a:srgbClr val="0B2D5B"/>
-          </a:solidFill>
-          <a:ln>
-            <a:noFill/>
-          </a:ln>
-          <a:effectLst/>
-        </p:spPr>
-        <p:style>
-          <a:lnRef idx="1">
-            <a:schemeClr val="accent1"/>
-          </a:lnRef>
-          <a:fillRef idx="3">
-            <a:schemeClr val="accent1"/>
-          </a:fillRef>
-          <a:effectRef idx="2">
-            <a:schemeClr val="accent1"/>
-          </a:effectRef>
-          <a:fontRef idx="minor">
-            <a:schemeClr val="lt1"/>
-          </a:fontRef>
-        </p:style>
-        <p:txBody>
-          <a:bodyPr rtlCol="0" anchor="ctr"/>
-          <a:lstStyle/>
-          <a:p>
-            <a:pPr algn="ctr"/>
-          </a:p>
-        </p:txBody>
-      </p:sp>
-      <p:sp>
-        <p:nvSpPr>
-          <p:cNvPr id="3" name="TextBox 2"/>
-          <p:cNvSpPr txBox="1"/>
-          <p:nvPr/>
-        </p:nvSpPr>
-        <p:spPr>
-          <a:xfrm>
-            <a:off x="548640" y="100584"/>
-            <a:ext cx="10972800" cy="274320"/>
-          </a:xfrm>
-          <a:prstGeom prst="rect">
-            <a:avLst/>
-          </a:prstGeom>
-          <a:noFill/>
-        </p:spPr>
-        <p:txBody>
-          <a:bodyPr wrap="square" anchor="t" lIns="0" rIns="0" tIns="0" bIns="0">
-            <a:spAutoFit/>
-          </a:bodyPr>
-          <a:lstStyle/>
-          <a:p>
-            <a:pPr algn="l">
-              <a:spcAft>
-                <a:spcPts val="495"/>
-              </a:spcAft>
-            </a:pPr>
-            <a:r>
-              <a:rPr sz="1100" b="1" i="0">
-                <a:solidFill>
-                  <a:srgbClr val="FFFFFF"/>
-                </a:solidFill>
-                <a:latin typeface="Inter Tight"/>
-              </a:rPr>
-              <a:t>TEACHER PAGE  ·  skipped when you present  ·  Every student in the room</a:t>
-            </a:r>
-          </a:p>
-        </p:txBody>
-      </p:sp>
-      <p:sp>
-        <p:nvSpPr>
-          <p:cNvPr id="4" name="TextBox 3"/>
-          <p:cNvSpPr txBox="1"/>
-          <p:nvPr/>
-        </p:nvSpPr>
-        <p:spPr>
-          <a:xfrm>
-            <a:off x="548640" y="685800"/>
-            <a:ext cx="10972800" cy="640080"/>
-          </a:xfrm>
-          <a:prstGeom prst="rect">
-            <a:avLst/>
-          </a:prstGeom>
-          <a:noFill/>
-        </p:spPr>
-        <p:txBody>
-          <a:bodyPr wrap="square" anchor="t" lIns="0" rIns="0" tIns="0" bIns="0">
-            <a:spAutoFit/>
-          </a:bodyPr>
-          <a:lstStyle/>
-          <a:p>
-            <a:pPr algn="l">
-              <a:spcAft>
-                <a:spcPts val="1350"/>
-              </a:spcAft>
-            </a:pPr>
-            <a:r>
-              <a:rPr sz="3000" b="1" i="0">
-                <a:solidFill>
-                  <a:srgbClr val="1C1B19"/>
-                </a:solidFill>
-                <a:latin typeface="Source Serif 4"/>
-              </a:rPr>
-              <a:t>Every student in the room</a:t>
-            </a:r>
-          </a:p>
-        </p:txBody>
-      </p:sp>
-      <p:sp>
-        <p:nvSpPr>
-          <p:cNvPr id="5" name="TextBox 4"/>
-          <p:cNvSpPr txBox="1"/>
-          <p:nvPr/>
-        </p:nvSpPr>
-        <p:spPr>
-          <a:xfrm>
-            <a:off x="548640" y="1325880"/>
-            <a:ext cx="10972800" cy="365760"/>
-          </a:xfrm>
-          <a:prstGeom prst="rect">
-            <a:avLst/>
-          </a:prstGeom>
-          <a:noFill/>
-        </p:spPr>
-        <p:txBody>
-          <a:bodyPr wrap="square" anchor="t" lIns="0" rIns="0" tIns="0" bIns="0">
-            <a:spAutoFit/>
-          </a:bodyPr>
-          <a:lstStyle/>
-          <a:p>
-            <a:pPr algn="l">
-              <a:spcAft>
-                <a:spcPts val="630"/>
-              </a:spcAft>
-            </a:pPr>
-            <a:r>
-              <a:rPr sz="1400" b="0" i="0">
-                <a:solidFill>
-                  <a:srgbClr val="5D5A54"/>
-                </a:solidFill>
-                <a:latin typeface="Inter Tight"/>
-              </a:rPr>
-              <a:t>Culture, family, identity, ability and money: what to keep in mind for this topic.</a:t>
-            </a:r>
-          </a:p>
-        </p:txBody>
-      </p:sp>
-      <p:sp>
-        <p:nvSpPr>
-          <p:cNvPr id="6" name="TextBox 5"/>
-          <p:cNvSpPr txBox="1"/>
-          <p:nvPr/>
-        </p:nvSpPr>
-        <p:spPr>
-          <a:xfrm>
-            <a:off x="548640" y="1828800"/>
-            <a:ext cx="5394960" cy="4572000"/>
-          </a:xfrm>
-          <a:prstGeom prst="rect">
-            <a:avLst/>
-          </a:prstGeom>
-          <a:noFill/>
-        </p:spPr>
-        <p:txBody>
-          <a:bodyPr wrap="square" anchor="t" lIns="0" rIns="0" tIns="0" bIns="0">
-            <a:spAutoFit/>
-          </a:bodyPr>
-          <a:lstStyle/>
-          <a:p>
-            <a:pPr algn="l">
-              <a:spcAft>
-                <a:spcPts val="585"/>
-              </a:spcAft>
-            </a:pPr>
-            <a:r>
-              <a:rPr sz="1500" b="1" i="0">
-                <a:solidFill>
-                  <a:srgbClr val="1C1B19"/>
-                </a:solidFill>
-                <a:latin typeface="Source Serif 4"/>
-              </a:rPr>
-              <a:t>Many traditions already do this.</a:t>
-            </a:r>
-          </a:p>
-          <a:p>
-            <a:pPr algn="l">
-              <a:spcAft>
-                <a:spcPts val="585"/>
-              </a:spcAft>
-            </a:pPr>
-            <a:r>
-              <a:rPr sz="1300" b="0" i="0">
-                <a:solidFill>
-                  <a:srgbClr val="1C1B19"/>
-                </a:solidFill>
-                <a:latin typeface="Source Serif 4"/>
-              </a:rPr>
-              <a:t>Centering prayer, dhikr, Jewish contemplative prayer, the rosary, meditation in Hindu and Sikh traditions, quiet time on the land. Invite students to notice if their family already has a version. Never ask them to explain their faith to the class.</a:t>
-            </a:r>
-          </a:p>
-          <a:p>
-            <a:pPr algn="l">
-              <a:spcAft>
-                <a:spcPts val="585"/>
-              </a:spcAft>
-            </a:pPr>
-            <a:r>
-              <a:rPr sz="1300" b="0" i="0">
-                <a:solidFill>
-                  <a:srgbClr val="1C1B19"/>
-                </a:solidFill>
-                <a:latin typeface="Source Serif 4"/>
-              </a:rPr>
-              <a:t/>
-            </a:r>
-          </a:p>
-          <a:p>
-            <a:pPr algn="l">
-              <a:spcAft>
-                <a:spcPts val="585"/>
-              </a:spcAft>
-            </a:pPr>
-            <a:r>
-              <a:rPr sz="1500" b="1" i="0">
-                <a:solidFill>
-                  <a:srgbClr val="1C1B19"/>
-                </a:solidFill>
-                <a:latin typeface="Source Serif 4"/>
-              </a:rPr>
-              <a:t>Some families will be wary.</a:t>
-            </a:r>
-          </a:p>
-          <a:p>
-            <a:pPr algn="l">
-              <a:spcAft>
-                <a:spcPts val="585"/>
-              </a:spcAft>
-            </a:pPr>
-            <a:r>
-              <a:rPr sz="1300" b="0" i="0">
-                <a:solidFill>
-                  <a:srgbClr val="1C1B19"/>
-                </a:solidFill>
-                <a:latin typeface="Source Serif 4"/>
-              </a:rPr>
-              <a:t>Some families see meditation as religious, or as something that conflicts with their own faith. The secular framing and the opt-out are real; mean them. A note home before the lesson can help.</a:t>
-            </a:r>
-          </a:p>
-          <a:p>
-            <a:pPr algn="l">
-              <a:spcAft>
-                <a:spcPts val="585"/>
-              </a:spcAft>
-            </a:pPr>
-            <a:r>
-              <a:rPr sz="1300" b="0" i="0">
-                <a:solidFill>
-                  <a:srgbClr val="1C1B19"/>
-                </a:solidFill>
-                <a:latin typeface="Source Serif 4"/>
-              </a:rPr>
-              <a:t/>
-            </a:r>
-          </a:p>
-          <a:p>
-            <a:pPr algn="l">
-              <a:spcAft>
-                <a:spcPts val="585"/>
-              </a:spcAft>
-            </a:pPr>
-            <a:r>
-              <a:rPr sz="1500" b="1" i="0">
-                <a:solidFill>
-                  <a:srgbClr val="1C1B19"/>
-                </a:solidFill>
-                <a:latin typeface="Source Serif 4"/>
-              </a:rPr>
-              <a:t>Stillness isn't a virtue.</a:t>
-            </a:r>
-          </a:p>
-          <a:p>
-            <a:pPr algn="l">
-              <a:spcAft>
-                <a:spcPts val="585"/>
-              </a:spcAft>
-            </a:pPr>
-            <a:r>
-              <a:rPr sz="1300" b="0" i="0">
-                <a:solidFill>
-                  <a:srgbClr val="1C1B19"/>
-                </a:solidFill>
-                <a:latin typeface="Source Serif 4"/>
-              </a:rPr>
-              <a:t>Sitting still with eyes closed is one cultural picture of calm. Movement, rhythm, music and prayer all count. Students with ADHD often do better with movement-based practice; offer it first, not as a backup.</a:t>
-            </a:r>
-          </a:p>
-          <a:p>
-            <a:pPr algn="l">
-              <a:spcAft>
-                <a:spcPts val="585"/>
-              </a:spcAft>
-            </a:pPr>
-            <a:r>
-              <a:rPr sz="1300" b="0" i="0">
-                <a:solidFill>
-                  <a:srgbClr val="1C1B19"/>
-                </a:solidFill>
-                <a:latin typeface="Source Serif 4"/>
-              </a:rPr>
-              <a:t/>
-            </a:r>
-          </a:p>
-        </p:txBody>
-      </p:sp>
-      <p:sp>
-        <p:nvSpPr>
-          <p:cNvPr id="7" name="TextBox 6"/>
-          <p:cNvSpPr txBox="1"/>
-          <p:nvPr/>
-        </p:nvSpPr>
-        <p:spPr>
-          <a:xfrm>
-            <a:off x="6217920" y="1828800"/>
-            <a:ext cx="5394960" cy="4572000"/>
-          </a:xfrm>
-          <a:prstGeom prst="rect">
-            <a:avLst/>
-          </a:prstGeom>
-          <a:noFill/>
-        </p:spPr>
-        <p:txBody>
-          <a:bodyPr wrap="square" anchor="t" lIns="0" rIns="0" tIns="0" bIns="0">
-            <a:spAutoFit/>
-          </a:bodyPr>
-          <a:lstStyle/>
-          <a:p>
-            <a:pPr algn="l">
-              <a:spcAft>
-                <a:spcPts val="585"/>
-              </a:spcAft>
-            </a:pPr>
-            <a:r>
-              <a:rPr sz="1500" b="1" i="0">
-                <a:solidFill>
-                  <a:srgbClr val="1C1B19"/>
-                </a:solidFill>
-                <a:latin typeface="Source Serif 4"/>
-              </a:rPr>
-              <a:t>Noticing isn't the same as accepting harm.</a:t>
-            </a:r>
-          </a:p>
-          <a:p>
-            <a:pPr algn="l">
-              <a:spcAft>
-                <a:spcPts val="585"/>
-              </a:spcAft>
-            </a:pPr>
-            <a:r>
-              <a:rPr sz="1300" b="0" i="0">
-                <a:solidFill>
-                  <a:srgbClr val="1C1B19"/>
-                </a:solidFill>
-                <a:latin typeface="Source Serif 4"/>
-              </a:rPr>
-              <a:t>Students facing racism, an unsafe home, or money stress shouldn't hear that breathing will fix it. Mindfulness can help someone get through a hard moment. It doesn't make an unfair situation fair, and adults still need to act.</a:t>
-            </a:r>
-          </a:p>
-          <a:p>
-            <a:pPr algn="l">
-              <a:spcAft>
-                <a:spcPts val="585"/>
-              </a:spcAft>
-            </a:pPr>
-            <a:r>
-              <a:rPr sz="1300" b="0" i="0">
-                <a:solidFill>
-                  <a:srgbClr val="1C1B19"/>
-                </a:solidFill>
-                <a:latin typeface="Source Serif 4"/>
-              </a:rPr>
-              <a:t/>
-            </a:r>
-          </a:p>
-          <a:p>
-            <a:pPr algn="l">
-              <a:spcAft>
-                <a:spcPts val="585"/>
-              </a:spcAft>
-            </a:pPr>
-            <a:r>
-              <a:rPr sz="1500" b="1" i="0">
-                <a:solidFill>
-                  <a:srgbClr val="1C1B19"/>
-                </a:solidFill>
-                <a:latin typeface="Source Serif 4"/>
-              </a:rPr>
-              <a:t>Disabled and neurodivergent students.</a:t>
-            </a:r>
-          </a:p>
-          <a:p>
-            <a:pPr algn="l">
-              <a:spcAft>
-                <a:spcPts val="585"/>
-              </a:spcAft>
-            </a:pPr>
-            <a:r>
-              <a:rPr sz="1300" b="0" i="0">
-                <a:solidFill>
-                  <a:srgbClr val="1C1B19"/>
-                </a:solidFill>
-                <a:latin typeface="Source Serif 4"/>
-              </a:rPr>
-              <a:t>Adjust every instruction: "feel your feet" may not fit a wheelchair user; "notice your breath" may not fit a student with asthma. Offer the anchor that works. Some autistic students find closed eyes or silence uncomfortable; eyes open and a soft sound are fine.</a:t>
-            </a:r>
-          </a:p>
-          <a:p>
-            <a:pPr algn="l">
-              <a:spcAft>
-                <a:spcPts val="585"/>
-              </a:spcAft>
-            </a:pPr>
-            <a:r>
-              <a:rPr sz="1300" b="0" i="0">
-                <a:solidFill>
-                  <a:srgbClr val="1C1B19"/>
-                </a:solidFill>
-                <a:latin typeface="Source Serif 4"/>
-              </a:rPr>
-              <a:t/>
-            </a:r>
-          </a:p>
-          <a:p>
-            <a:pPr algn="l">
-              <a:spcAft>
-                <a:spcPts val="585"/>
-              </a:spcAft>
-            </a:pPr>
-            <a:r>
-              <a:rPr sz="1500" b="1" i="0">
-                <a:solidFill>
-                  <a:srgbClr val="1C1B19"/>
-                </a:solidFill>
-                <a:latin typeface="Source Serif 4"/>
-              </a:rPr>
-              <a:t>Language.</a:t>
-            </a:r>
-          </a:p>
-          <a:p>
-            <a:pPr algn="l">
-              <a:spcAft>
-                <a:spcPts val="585"/>
-              </a:spcAft>
-            </a:pPr>
-            <a:r>
-              <a:rPr sz="1300" b="0" i="0">
-                <a:solidFill>
-                  <a:srgbClr val="1C1B19"/>
-                </a:solidFill>
-                <a:latin typeface="Source Serif 4"/>
-              </a:rPr>
-              <a:t>"Mindfulness" can sound like jargon. "Noticing" or "paying attention on purpose" works in any language. English learners can do the senses practice in whatever language they think in.</a:t>
-            </a:r>
-          </a:p>
-          <a:p>
-            <a:pPr algn="l">
-              <a:spcAft>
-                <a:spcPts val="585"/>
-              </a:spcAft>
-            </a:pPr>
-            <a:r>
-              <a:rPr sz="1300" b="0" i="0">
-                <a:solidFill>
-                  <a:srgbClr val="1C1B19"/>
-                </a:solidFill>
-                <a:latin typeface="Source Serif 4"/>
-              </a:rPr>
-              <a:t/>
-            </a:r>
-          </a:p>
-        </p:txBody>
-      </p:sp>
-    </p:spTree>
-  </p:cSld>
-  <p:clrMapOvr>
-    <a:masterClrMapping/>
-  </p:clrMapOvr>
-</p:sld>
-</file>
-
-<file path=ppt/slides/slide4.xml><?xml version="1.0" encoding="utf-8"?>
-<p:sld xmlns:a="http://schemas.openxmlformats.org/drawingml/2006/main" xmlns:p="http://schemas.openxmlformats.org/presentationml/2006/main" xmlns:r="http://schemas.openxmlformats.org/officeDocument/2006/relationships" show="0">
-  <p:cSld>
-    <p:bg>
-      <p:bgPr>
-        <a:solidFill>
-          <a:srgbClr val="EEEBE4"/>
-        </a:solidFill>
-        <a:effectLst/>
-      </p:bgPr>
-    </p:bg>
-    <p:spTree>
-      <p:nvGrpSpPr>
-        <p:cNvPr id="1" name=""/>
-        <p:cNvGrpSpPr/>
-        <p:nvPr/>
-      </p:nvGrpSpPr>
-      <p:grpSpPr/>
-      <p:sp>
-        <p:nvSpPr>
-          <p:cNvPr id="2" name="Rectangle 1"/>
-          <p:cNvSpPr/>
-          <p:nvPr/>
-        </p:nvSpPr>
-        <p:spPr>
-          <a:xfrm>
-            <a:off x="0" y="0"/>
-            <a:ext cx="12191695" cy="384048"/>
-          </a:xfrm>
-          <a:prstGeom prst="rect">
-            <a:avLst/>
-          </a:prstGeom>
-          <a:solidFill>
-            <a:srgbClr val="0B2D5B"/>
-          </a:solidFill>
-          <a:ln>
-            <a:noFill/>
-          </a:ln>
-          <a:effectLst/>
-        </p:spPr>
-        <p:style>
-          <a:lnRef idx="1">
-            <a:schemeClr val="accent1"/>
-          </a:lnRef>
-          <a:fillRef idx="3">
-            <a:schemeClr val="accent1"/>
-          </a:fillRef>
-          <a:effectRef idx="2">
-            <a:schemeClr val="accent1"/>
-          </a:effectRef>
-          <a:fontRef idx="minor">
-            <a:schemeClr val="lt1"/>
-          </a:fontRef>
-        </p:style>
-        <p:txBody>
-          <a:bodyPr rtlCol="0" anchor="ctr"/>
-          <a:lstStyle/>
-          <a:p>
-            <a:pPr algn="ctr"/>
-          </a:p>
-        </p:txBody>
-      </p:sp>
-      <p:sp>
-        <p:nvSpPr>
-          <p:cNvPr id="3" name="TextBox 2"/>
-          <p:cNvSpPr txBox="1"/>
-          <p:nvPr/>
-        </p:nvSpPr>
-        <p:spPr>
-          <a:xfrm>
-            <a:off x="548640" y="100584"/>
-            <a:ext cx="10972800" cy="274320"/>
-          </a:xfrm>
-          <a:prstGeom prst="rect">
-            <a:avLst/>
-          </a:prstGeom>
-          <a:noFill/>
-        </p:spPr>
-        <p:txBody>
-          <a:bodyPr wrap="square" anchor="t" lIns="0" rIns="0" tIns="0" bIns="0">
-            <a:spAutoFit/>
-          </a:bodyPr>
-          <a:lstStyle/>
-          <a:p>
-            <a:pPr algn="l">
-              <a:spcAft>
-                <a:spcPts val="495"/>
-              </a:spcAft>
-            </a:pPr>
-            <a:r>
-              <a:rPr sz="1100" b="1" i="0">
-                <a:solidFill>
-                  <a:srgbClr val="FFFFFF"/>
-                </a:solidFill>
-                <a:latin typeface="Inter Tight"/>
-              </a:rPr>
-              <a:t>TEACHER PAGE  ·  skipped when you present  ·  Background</a:t>
-            </a:r>
-          </a:p>
-        </p:txBody>
-      </p:sp>
-      <p:sp>
-        <p:nvSpPr>
-          <p:cNvPr id="4" name="TextBox 3"/>
-          <p:cNvSpPr txBox="1"/>
-          <p:nvPr/>
-        </p:nvSpPr>
-        <p:spPr>
-          <a:xfrm>
-            <a:off x="548640" y="685800"/>
-            <a:ext cx="10972800" cy="640080"/>
-          </a:xfrm>
-          <a:prstGeom prst="rect">
-            <a:avLst/>
-          </a:prstGeom>
-          <a:noFill/>
-        </p:spPr>
-        <p:txBody>
-          <a:bodyPr wrap="square" anchor="t" lIns="0" rIns="0" tIns="0" bIns="0">
-            <a:spAutoFit/>
-          </a:bodyPr>
-          <a:lstStyle/>
-          <a:p>
-            <a:pPr algn="l">
-              <a:spcAft>
-                <a:spcPts val="1350"/>
-              </a:spcAft>
-            </a:pPr>
-            <a:r>
-              <a:rPr sz="3000" b="1" i="0">
-                <a:solidFill>
-                  <a:srgbClr val="1C1B19"/>
-                </a:solidFill>
-                <a:latin typeface="Source Serif 4"/>
-              </a:rPr>
-              <a:t>What the research says</a:t>
-            </a:r>
-          </a:p>
-        </p:txBody>
-      </p:sp>
-      <p:sp>
-        <p:nvSpPr>
-          <p:cNvPr id="5" name="TextBox 4"/>
-          <p:cNvSpPr txBox="1"/>
-          <p:nvPr/>
-        </p:nvSpPr>
-        <p:spPr>
-          <a:xfrm>
-            <a:off x="548640" y="1463040"/>
-            <a:ext cx="5394960" cy="4937760"/>
-          </a:xfrm>
-          <a:prstGeom prst="rect">
-            <a:avLst/>
-          </a:prstGeom>
-          <a:noFill/>
-        </p:spPr>
-        <p:txBody>
-          <a:bodyPr wrap="square" anchor="t" lIns="0" rIns="0" tIns="0" bIns="0">
-            <a:spAutoFit/>
-          </a:bodyPr>
-          <a:lstStyle/>
-          <a:p>
-            <a:pPr algn="l">
-              <a:spcAft>
-                <a:spcPts val="585"/>
-              </a:spcAft>
-            </a:pPr>
-            <a:r>
-              <a:rPr sz="1300" b="0" i="0">
-                <a:solidFill>
-                  <a:srgbClr val="1C1B19"/>
-                </a:solidFill>
-                <a:latin typeface="Source Serif 4"/>
-              </a:rPr>
-              <a:t>People's minds wandered during about 47% of their waking moments, and they were less happy while their minds wandered.</a:t>
-            </a:r>
-          </a:p>
-          <a:p>
-            <a:pPr algn="l">
-              <a:spcAft>
-                <a:spcPts val="585"/>
-              </a:spcAft>
-            </a:pPr>
-            <a:r>
-              <a:rPr sz="1050" b="0" i="0">
-                <a:solidFill>
-                  <a:srgbClr val="5D5A54"/>
-                </a:solidFill>
-                <a:latin typeface="Inter Tight"/>
-              </a:rPr>
-              <a:t>Killingsworth &amp; Gilbert, Science, 2010 (about 2,250 adults, smartphone sampling)</a:t>
-            </a:r>
-          </a:p>
-          <a:p>
-            <a:pPr algn="l">
-              <a:spcAft>
-                <a:spcPts val="585"/>
-              </a:spcAft>
-            </a:pPr>
-            <a:r>
-              <a:rPr sz="1300" b="0" i="0">
-                <a:solidFill>
-                  <a:srgbClr val="1C1B19"/>
-                </a:solidFill>
-                <a:latin typeface="Source Serif 4"/>
-              </a:rPr>
-              <a:t>Putting a feeling into words reduced activity in the amygdala, the brain's alarm center, and increased activity in a region that helps regulate emotion.</a:t>
-            </a:r>
-          </a:p>
-          <a:p>
-            <a:pPr algn="l">
-              <a:spcAft>
-                <a:spcPts val="585"/>
-              </a:spcAft>
-            </a:pPr>
-            <a:r>
-              <a:rPr sz="1050" b="0" i="0">
-                <a:solidFill>
-                  <a:srgbClr val="5D5A54"/>
-                </a:solidFill>
-                <a:latin typeface="Inter Tight"/>
-              </a:rPr>
-              <a:t>Lieberman et al., Psychological Science, 2007</a:t>
-            </a:r>
-          </a:p>
-          <a:p>
-            <a:pPr algn="l">
-              <a:spcAft>
-                <a:spcPts val="585"/>
-              </a:spcAft>
-            </a:pPr>
-            <a:r>
-              <a:rPr sz="1300" b="0" i="0">
-                <a:solidFill>
-                  <a:srgbClr val="1C1B19"/>
-                </a:solidFill>
-                <a:latin typeface="Source Serif 4"/>
-              </a:rPr>
-              <a:t>Experienced meditators showed less activity in the default mode network, the brain's mind-wandering system, during practice.</a:t>
-            </a:r>
-          </a:p>
-          <a:p>
-            <a:pPr algn="l">
-              <a:spcAft>
-                <a:spcPts val="585"/>
-              </a:spcAft>
-            </a:pPr>
-            <a:r>
-              <a:rPr sz="1050" b="0" i="0">
-                <a:solidFill>
-                  <a:srgbClr val="5D5A54"/>
-                </a:solidFill>
-                <a:latin typeface="Inter Tight"/>
-              </a:rPr>
-              <a:t>Brewer et al., PNAS, 2011</a:t>
-            </a:r>
-          </a:p>
-          <a:p>
-            <a:pPr algn="l">
-              <a:spcAft>
-                <a:spcPts val="585"/>
-              </a:spcAft>
-            </a:pPr>
-            <a:r>
-              <a:rPr sz="1300" b="0" i="0">
-                <a:solidFill>
-                  <a:srgbClr val="1C1B19"/>
-                </a:solidFill>
-                <a:latin typeface="Source Serif 4"/>
-              </a:rPr>
-              <a:t>Across studies, practice is linked to changes in attention control, emotion regulation and self-awareness networks. Most studies are small and on adults.</a:t>
-            </a:r>
-          </a:p>
-          <a:p>
-            <a:pPr algn="l">
-              <a:spcAft>
-                <a:spcPts val="585"/>
-              </a:spcAft>
-            </a:pPr>
-            <a:r>
-              <a:rPr sz="1050" b="0" i="0">
-                <a:solidFill>
-                  <a:srgbClr val="5D5A54"/>
-                </a:solidFill>
-                <a:latin typeface="Inter Tight"/>
-              </a:rPr>
-              <a:t>Tang, Hölzel &amp; Posner, Nature Reviews Neuroscience, 2015</a:t>
-            </a:r>
-          </a:p>
-          <a:p>
-            <a:pPr algn="l">
-              <a:spcAft>
-                <a:spcPts val="585"/>
-              </a:spcAft>
-            </a:pPr>
-            <a:r>
-              <a:rPr sz="1300" b="0" i="0">
-                <a:solidFill>
-                  <a:srgbClr val="1C1B19"/>
-                </a:solidFill>
-                <a:latin typeface="Source Serif 4"/>
-              </a:rPr>
-              <a:t>An eight-week course increased gray-matter density in some regions in a study of 16 adults. The largest controlled trial since (more than 200 adults) found no structural brain changes.</a:t>
-            </a:r>
-          </a:p>
-          <a:p>
-            <a:pPr algn="l">
-              <a:spcAft>
-                <a:spcPts val="585"/>
-              </a:spcAft>
-            </a:pPr>
-            <a:r>
-              <a:rPr sz="1050" b="0" i="0">
-                <a:solidFill>
-                  <a:srgbClr val="5D5A54"/>
-                </a:solidFill>
-                <a:latin typeface="Inter Tight"/>
-              </a:rPr>
-              <a:t>Hölzel et al., Psychiatry Research: Neuroimaging, 2011; Kral et al., Science Advances, 2022</a:t>
-            </a:r>
-          </a:p>
-        </p:txBody>
-      </p:sp>
-      <p:sp>
-        <p:nvSpPr>
-          <p:cNvPr id="6" name="TextBox 5"/>
-          <p:cNvSpPr txBox="1"/>
-          <p:nvPr/>
-        </p:nvSpPr>
-        <p:spPr>
-          <a:xfrm>
-            <a:off x="6217920" y="1463040"/>
-            <a:ext cx="5394960" cy="4937760"/>
-          </a:xfrm>
-          <a:prstGeom prst="rect">
-            <a:avLst/>
-          </a:prstGeom>
-          <a:noFill/>
-        </p:spPr>
-        <p:txBody>
-          <a:bodyPr wrap="square" anchor="t" lIns="0" rIns="0" tIns="0" bIns="0">
-            <a:spAutoFit/>
-          </a:bodyPr>
-          <a:lstStyle/>
-          <a:p>
-            <a:pPr algn="l">
-              <a:spcAft>
-                <a:spcPts val="585"/>
-              </a:spcAft>
-            </a:pPr>
-            <a:r>
-              <a:rPr sz="1300" b="0" i="0">
-                <a:solidFill>
-                  <a:srgbClr val="1C1B19"/>
-                </a:solidFill>
-                <a:latin typeface="Source Serif 4"/>
-              </a:rPr>
-              <a:t>In 84 UK schools and over 8,000 students aged 11 to 16, a mindfulness curriculum was no better than usual social-emotional teaching at preventing mental health problems. Few students kept practicing.</a:t>
-            </a:r>
-          </a:p>
-          <a:p>
-            <a:pPr algn="l">
-              <a:spcAft>
-                <a:spcPts val="585"/>
-              </a:spcAft>
-            </a:pPr>
-            <a:r>
-              <a:rPr sz="1050" b="0" i="0">
-                <a:solidFill>
-                  <a:srgbClr val="5D5A54"/>
-                </a:solidFill>
-                <a:latin typeface="Inter Tight"/>
-              </a:rPr>
-              <a:t>Kuyken et al. (MYRIAD), Evidence-Based Mental Health, 2022</a:t>
-            </a:r>
-          </a:p>
-          <a:p>
-            <a:pPr algn="l">
-              <a:spcAft>
-                <a:spcPts val="585"/>
-              </a:spcAft>
-            </a:pPr>
-            <a:r>
-              <a:rPr sz="1300" b="0" i="0">
-                <a:solidFill>
-                  <a:srgbClr val="1C1B19"/>
-                </a:solidFill>
-                <a:latin typeface="Source Serif 4"/>
-              </a:rPr>
-              <a:t>Across 33 trials with young people, mindfulness programs had small benefits for attention, stress and mood, mostly smaller when compared with other active programs.</a:t>
-            </a:r>
-          </a:p>
-          <a:p>
-            <a:pPr algn="l">
-              <a:spcAft>
-                <a:spcPts val="585"/>
-              </a:spcAft>
-            </a:pPr>
-            <a:r>
-              <a:rPr sz="1050" b="0" i="0">
-                <a:solidFill>
-                  <a:srgbClr val="5D5A54"/>
-                </a:solidFill>
-                <a:latin typeface="Inter Tight"/>
-              </a:rPr>
-              <a:t>Dunning et al., Journal of Child Psychology and Psychiatry, 2019</a:t>
-            </a:r>
-          </a:p>
-          <a:p>
-            <a:pPr algn="l">
-              <a:spcAft>
-                <a:spcPts val="585"/>
-              </a:spcAft>
-            </a:pPr>
-            <a:r>
-              <a:rPr sz="1300" b="0" i="0">
-                <a:solidFill>
-                  <a:srgbClr val="1C1B19"/>
-                </a:solidFill>
-                <a:latin typeface="Source Serif 4"/>
-              </a:rPr>
-              <a:t>Five minutes a day of slow, sighing breaths improved mood and lowered breathing rate more than five minutes of mindfulness meditation, over one month.</a:t>
-            </a:r>
-          </a:p>
-          <a:p>
-            <a:pPr algn="l">
-              <a:spcAft>
-                <a:spcPts val="585"/>
-              </a:spcAft>
-            </a:pPr>
-            <a:r>
-              <a:rPr sz="1050" b="0" i="0">
-                <a:solidFill>
-                  <a:srgbClr val="5D5A54"/>
-                </a:solidFill>
-                <a:latin typeface="Inter Tight"/>
-              </a:rPr>
-              <a:t>Balban et al., Cell Reports Medicine, 2023</a:t>
-            </a:r>
-          </a:p>
-          <a:p>
-            <a:pPr algn="l">
-              <a:spcAft>
-                <a:spcPts val="585"/>
-              </a:spcAft>
-            </a:pPr>
-            <a:r>
-              <a:rPr sz="1300" b="0" i="0">
-                <a:solidFill>
-                  <a:srgbClr val="1C1B19"/>
-                </a:solidFill>
-                <a:latin typeface="Source Serif 4"/>
-              </a:rPr>
-              <a:t>Mindfulness can have side effects for some people, including anxiety and re-experiencing trauma, especially with long or intense practice.</a:t>
-            </a:r>
-          </a:p>
-          <a:p>
-            <a:pPr algn="l">
-              <a:spcAft>
-                <a:spcPts val="585"/>
-              </a:spcAft>
-            </a:pPr>
-            <a:r>
-              <a:rPr sz="1050" b="0" i="0">
-                <a:solidFill>
-                  <a:srgbClr val="5D5A54"/>
-                </a:solidFill>
-                <a:latin typeface="Inter Tight"/>
-              </a:rPr>
-              <a:t>Britton, Current Opinion in Psychology, 2019; Treleaven, Trauma-Sensitive Mindfulness, 2018</a:t>
-            </a:r>
-          </a:p>
-        </p:txBody>
-      </p:sp>
-    </p:spTree>
-  </p:cSld>
-  <p:clrMapOvr>
-    <a:masterClrMapping/>
-  </p:clrMapOvr>
-</p:sld>
-</file>
-
-<file path=ppt/slides/slide5.xml><?xml version="1.0" encoding="utf-8"?>
-<p:sld xmlns:a="http://schemas.openxmlformats.org/drawingml/2006/main" xmlns:p="http://schemas.openxmlformats.org/presentationml/2006/main" xmlns:r="http://schemas.openxmlformats.org/officeDocument/2006/relationships">
-  <p:cSld>
-    <p:bg>
-      <p:bgPr>
-        <a:solidFill>
-          <a:srgbClr val="0B2D5B"/>
-        </a:solidFill>
-        <a:effectLst/>
-      </p:bgPr>
-    </p:bg>
-    <p:spTree>
-      <p:nvGrpSpPr>
-        <p:cNvPr id="1" name=""/>
-        <p:cNvGrpSpPr/>
-        <p:nvPr/>
-      </p:nvGrpSpPr>
-      <p:grpSpPr/>
-      <p:sp>
-        <p:nvSpPr>
-          <p:cNvPr id="2" name="Rectangle 1"/>
-          <p:cNvSpPr/>
-          <p:nvPr/>
-        </p:nvSpPr>
-        <p:spPr>
-          <a:xfrm>
-            <a:off x="548640" y="502920"/>
-            <a:ext cx="457200" cy="54864"/>
-          </a:xfrm>
-          <a:prstGeom prst="rect">
-            <a:avLst/>
-          </a:prstGeom>
-          <a:solidFill>
-            <a:srgbClr val="F47B20"/>
-          </a:solidFill>
-          <a:ln>
-            <a:noFill/>
-          </a:ln>
-          <a:effectLst/>
-        </p:spPr>
-        <p:style>
-          <a:lnRef idx="1">
-            <a:schemeClr val="accent1"/>
-          </a:lnRef>
-          <a:fillRef idx="3">
-            <a:schemeClr val="accent1"/>
-          </a:fillRef>
-          <a:effectRef idx="2">
-            <a:schemeClr val="accent1"/>
-          </a:effectRef>
-          <a:fontRef idx="minor">
-            <a:schemeClr val="lt1"/>
-          </a:fontRef>
-        </p:style>
-        <p:txBody>
-          <a:bodyPr rtlCol="0" anchor="ctr"/>
-          <a:lstStyle/>
-          <a:p>
-            <a:pPr algn="ctr"/>
-          </a:p>
-        </p:txBody>
-      </p:sp>
-      <p:sp>
-        <p:nvSpPr>
-          <p:cNvPr id="3" name="TextBox 2"/>
-          <p:cNvSpPr txBox="1"/>
-          <p:nvPr/>
-        </p:nvSpPr>
-        <p:spPr>
-          <a:xfrm>
-            <a:off x="1143000" y="393192"/>
-            <a:ext cx="8229600" cy="274320"/>
-          </a:xfrm>
-          <a:prstGeom prst="rect">
-            <a:avLst/>
-          </a:prstGeom>
-          <a:noFill/>
-        </p:spPr>
-        <p:txBody>
-          <a:bodyPr wrap="square" anchor="t" lIns="0" rIns="0" tIns="0" bIns="0">
-            <a:spAutoFit/>
-          </a:bodyPr>
-          <a:lstStyle/>
-          <a:p>
-            <a:pPr algn="l">
-              <a:spcAft>
-                <a:spcPts val="540"/>
-              </a:spcAft>
-            </a:pPr>
-            <a:r>
-              <a:rPr sz="1200" b="1" i="0">
-                <a:solidFill>
-                  <a:srgbClr val="5D5A54"/>
-                </a:solidFill>
-                <a:latin typeface="Inter Tight"/>
-              </a:rPr>
-              <a:t>TRAIN YOUR ATTENTION</a:t>
-            </a:r>
-          </a:p>
-        </p:txBody>
-      </p:sp>
-      <p:sp>
-        <p:nvSpPr>
-          <p:cNvPr id="4" name="TextBox 3"/>
-          <p:cNvSpPr txBox="1"/>
-          <p:nvPr/>
-        </p:nvSpPr>
-        <p:spPr>
-          <a:xfrm>
-            <a:off x="8229600" y="6400800"/>
-            <a:ext cx="3410712" cy="274320"/>
-          </a:xfrm>
-          <a:prstGeom prst="rect">
-            <a:avLst/>
-          </a:prstGeom>
-          <a:noFill/>
-        </p:spPr>
-        <p:txBody>
-          <a:bodyPr wrap="square" anchor="t" lIns="0" rIns="0" tIns="0" bIns="0">
-            <a:spAutoFit/>
-          </a:bodyPr>
-          <a:lstStyle/>
-          <a:p>
-            <a:pPr algn="r">
-              <a:spcAft>
-                <a:spcPts val="450"/>
-              </a:spcAft>
-            </a:pPr>
-            <a:r>
-              <a:rPr sz="1000" b="0" i="0">
-                <a:solidFill>
-                  <a:srgbClr val="5D5A54"/>
-                </a:solidFill>
-                <a:latin typeface="Inter Tight"/>
-              </a:rPr>
-              <a:t>train-your-attention Counseling</a:t>
-            </a:r>
-          </a:p>
-        </p:txBody>
-      </p:sp>
-      <p:sp>
-        <p:nvSpPr>
-          <p:cNvPr id="5" name="TextBox 4"/>
-          <p:cNvSpPr txBox="1"/>
-          <p:nvPr/>
-        </p:nvSpPr>
-        <p:spPr>
-          <a:xfrm>
-            <a:off x="822960" y="2011680"/>
-            <a:ext cx="10515600" cy="1463040"/>
-          </a:xfrm>
-          <a:prstGeom prst="rect">
-            <a:avLst/>
-          </a:prstGeom>
-          <a:noFill/>
-        </p:spPr>
-        <p:txBody>
-          <a:bodyPr wrap="square" anchor="b" lIns="0" rIns="0" tIns="0" bIns="0">
-            <a:spAutoFit/>
-          </a:bodyPr>
-          <a:lstStyle/>
-          <a:p>
-            <a:pPr algn="l">
-              <a:spcAft>
-                <a:spcPts val="2700"/>
-              </a:spcAft>
-            </a:pPr>
-            <a:r>
-              <a:rPr sz="6000" b="1" i="0">
-                <a:solidFill>
-                  <a:srgbClr val="FFFFFF"/>
-                </a:solidFill>
-                <a:latin typeface="Source Serif 4"/>
-              </a:rPr>
-              <a:t>Train Your Attention</a:t>
-            </a:r>
-          </a:p>
-        </p:txBody>
-      </p:sp>
-      <p:sp>
-        <p:nvSpPr>
-          <p:cNvPr id="6" name="TextBox 5"/>
-          <p:cNvSpPr txBox="1"/>
-          <p:nvPr/>
-        </p:nvSpPr>
-        <p:spPr>
-          <a:xfrm>
-            <a:off x="822960" y="3611880"/>
-            <a:ext cx="10515600" cy="914400"/>
-          </a:xfrm>
-          <a:prstGeom prst="rect">
-            <a:avLst/>
-          </a:prstGeom>
-          <a:noFill/>
-        </p:spPr>
-        <p:txBody>
-          <a:bodyPr wrap="square" anchor="t" lIns="0" rIns="0" tIns="0" bIns="0">
-            <a:spAutoFit/>
-          </a:bodyPr>
-          <a:lstStyle/>
-          <a:p>
-            <a:pPr algn="l">
-              <a:spcAft>
-                <a:spcPts val="1080"/>
-              </a:spcAft>
-            </a:pPr>
-            <a:r>
-              <a:rPr sz="2400" b="0" i="1">
-                <a:solidFill>
-                  <a:srgbClr val="E8E4DA"/>
-                </a:solidFill>
-                <a:latin typeface="Source Serif 4"/>
-              </a:rPr>
-              <a:t>Your mind wanders about half the time. What can a few minutes of noticing actually do?</a:t>
-            </a:r>
-          </a:p>
-        </p:txBody>
-      </p:sp>
-      <p:sp>
-        <p:nvSpPr>
-          <p:cNvPr id="7" name="TextBox 6"/>
-          <p:cNvSpPr txBox="1"/>
-          <p:nvPr/>
-        </p:nvSpPr>
-        <p:spPr>
-          <a:xfrm>
-            <a:off x="822960" y="6035040"/>
-            <a:ext cx="7315200" cy="365760"/>
-          </a:xfrm>
-          <a:prstGeom prst="rect">
-            <a:avLst/>
-          </a:prstGeom>
-          <a:noFill/>
-        </p:spPr>
-        <p:txBody>
-          <a:bodyPr wrap="square" anchor="t" lIns="0" rIns="0" tIns="0" bIns="0">
-            <a:spAutoFit/>
-          </a:bodyPr>
-          <a:lstStyle/>
-          <a:p>
-            <a:pPr algn="l">
-              <a:spcAft>
-                <a:spcPts val="585"/>
-              </a:spcAft>
-            </a:pPr>
-            <a:r>
-              <a:rPr sz="1300" b="0" i="0">
-                <a:solidFill>
-                  <a:srgbClr val="E8E4DA"/>
-                </a:solidFill>
-                <a:latin typeface="Inter Tight"/>
-              </a:rPr>
-              <a:t>train-your-attention Upper School · Counseling</a:t>
+                <a:latin typeface="Source Serif 4"/>
+              </a:rPr>
+              <a:t>Wandering is normal. Noticing it is the skill.</a:t>
             </a:r>
           </a:p>
         </p:txBody>
@@ -8540,7 +8562,7 @@
                 </a:solidFill>
                 <a:latin typeface="Inter Tight"/>
               </a:rPr>
-              <a:t>ONE MINUTE</a:t>
+              <a:t>YOUR BRAIN</a:t>
             </a:r>
           </a:p>
         </p:txBody>
@@ -8579,21 +8601,186 @@
                 </a:solidFill>
                 <a:latin typeface="Inter Tight"/>
               </a:rPr>
-              <a:t>train-your-attention Counseling</a:t>
-            </a:r>
-          </a:p>
-        </p:txBody>
-      </p:sp>
-      <p:sp>
-        <p:nvSpPr>
-          <p:cNvPr id="5" name="Rectangle 4"/>
+              <a:t>Beaver Counseling</a:t>
+            </a:r>
+          </a:p>
+        </p:txBody>
+      </p:sp>
+      <p:sp>
+        <p:nvSpPr>
+          <p:cNvPr id="5" name="TextBox 4"/>
+          <p:cNvSpPr txBox="1"/>
+          <p:nvPr/>
+        </p:nvSpPr>
+        <p:spPr>
+          <a:xfrm>
+            <a:off x="822960" y="914400"/>
+            <a:ext cx="10515600" cy="365760"/>
+          </a:xfrm>
+          <a:prstGeom prst="rect">
+            <a:avLst/>
+          </a:prstGeom>
+          <a:noFill/>
+        </p:spPr>
+        <p:txBody>
+          <a:bodyPr wrap="square" anchor="t" lIns="0" rIns="0" tIns="0" bIns="0">
+            <a:spAutoFit/>
+          </a:bodyPr>
+          <a:lstStyle/>
+          <a:p>
+            <a:pPr algn="l">
+              <a:spcAft>
+                <a:spcPts val="630"/>
+              </a:spcAft>
+            </a:pPr>
+            <a:r>
+              <a:rPr sz="1400" b="1" i="0">
+                <a:solidFill>
+                  <a:srgbClr val="0B2D5B"/>
+                </a:solidFill>
+                <a:latin typeface="Inter Tight"/>
+              </a:rPr>
+              <a:t>Lieberman 2007  ·  Brewer 2011  ·  Tang, Hölzel &amp; Posner 2015  ·  Kral 2022</a:t>
+            </a:r>
+          </a:p>
+        </p:txBody>
+      </p:sp>
+      <p:sp>
+        <p:nvSpPr>
+          <p:cNvPr id="6" name="TextBox 5"/>
+          <p:cNvSpPr txBox="1"/>
+          <p:nvPr/>
+        </p:nvSpPr>
+        <p:spPr>
+          <a:xfrm>
+            <a:off x="822960" y="1325880"/>
+            <a:ext cx="10515600" cy="1097280"/>
+          </a:xfrm>
+          <a:prstGeom prst="rect">
+            <a:avLst/>
+          </a:prstGeom>
+          <a:noFill/>
+        </p:spPr>
+        <p:txBody>
+          <a:bodyPr wrap="square" anchor="t" lIns="0" rIns="0" tIns="0" bIns="0">
+            <a:spAutoFit/>
+          </a:bodyPr>
+          <a:lstStyle/>
+          <a:p>
+            <a:pPr algn="l">
+              <a:spcAft>
+                <a:spcPts val="1440"/>
+              </a:spcAft>
+            </a:pPr>
+            <a:r>
+              <a:rPr sz="3200" b="1" i="0">
+                <a:solidFill>
+                  <a:srgbClr val="1C1B19"/>
+                </a:solidFill>
+                <a:latin typeface="Source Serif 4"/>
+              </a:rPr>
+              <a:t>Practice changes how the brain works. How much it changes the structure is still argued.</a:t>
+            </a:r>
+          </a:p>
+        </p:txBody>
+      </p:sp>
+      <p:sp>
+        <p:nvSpPr>
+          <p:cNvPr id="7" name="TextBox 6"/>
+          <p:cNvSpPr txBox="1"/>
+          <p:nvPr/>
+        </p:nvSpPr>
+        <p:spPr>
+          <a:xfrm>
+            <a:off x="822960" y="2514600"/>
+            <a:ext cx="10515600" cy="2194560"/>
+          </a:xfrm>
+          <a:prstGeom prst="rect">
+            <a:avLst/>
+          </a:prstGeom>
+          <a:noFill/>
+        </p:spPr>
+        <p:txBody>
+          <a:bodyPr wrap="square" anchor="t" lIns="0" rIns="0" tIns="0" bIns="0">
+            <a:spAutoFit/>
+          </a:bodyPr>
+          <a:lstStyle/>
+          <a:p>
+            <a:pPr algn="l">
+              <a:spcAft>
+                <a:spcPts val="855"/>
+              </a:spcAft>
+            </a:pPr>
+            <a:r>
+              <a:rPr sz="1900" b="0" i="0">
+                <a:solidFill>
+                  <a:srgbClr val="1C1B19"/>
+                </a:solidFill>
+                <a:latin typeface="Source Serif 4"/>
+              </a:rPr>
+              <a:t>•  Naming a feeling ("that's frustration") turns down the brain's alarm center.</a:t>
+            </a:r>
+          </a:p>
+          <a:p>
+            <a:pPr algn="l">
+              <a:spcAft>
+                <a:spcPts val="855"/>
+              </a:spcAft>
+            </a:pPr>
+            <a:r>
+              <a:rPr sz="1900" b="0" i="0">
+                <a:solidFill>
+                  <a:srgbClr val="1C1B19"/>
+                </a:solidFill>
+                <a:latin typeface="Source Serif 4"/>
+              </a:rPr>
+              <a:t>•  People who practice show more activity in attention and emotion networks, and less in the mind-wandering network.</a:t>
+            </a:r>
+          </a:p>
+          <a:p>
+            <a:pPr algn="l">
+              <a:spcAft>
+                <a:spcPts val="855"/>
+              </a:spcAft>
+            </a:pPr>
+            <a:r>
+              <a:rPr sz="1900" b="0" i="0">
+                <a:solidFill>
+                  <a:srgbClr val="1C1B19"/>
+                </a:solidFill>
+                <a:latin typeface="Source Serif 4"/>
+              </a:rPr>
+              <a:t>•  A small study found gray-matter growth after 8 weeks. The largest trial since found none.</a:t>
+            </a:r>
+          </a:p>
+          <a:p>
+            <a:pPr algn="l">
+              <a:spcAft>
+                <a:spcPts val="855"/>
+              </a:spcAft>
+            </a:pPr>
+            <a:r>
+              <a:rPr sz="1900" b="0" i="0">
+                <a:solidFill>
+                  <a:srgbClr val="1C1B19"/>
+                </a:solidFill>
+                <a:latin typeface="Source Serif 4"/>
+              </a:rPr>
+              <a:t>•  Almost all of this is on adults.</a:t>
+            </a:r>
+          </a:p>
+        </p:txBody>
+      </p:sp>
+      <p:sp>
+        <p:nvSpPr>
+          <p:cNvPr id="8" name="Rectangle 7"/>
           <p:cNvSpPr/>
           <p:nvPr/>
         </p:nvSpPr>
         <p:spPr>
           <a:xfrm>
-            <a:off x="822960" y="1371600"/>
-            <a:ext cx="73152" cy="3566160"/>
+            <a:off x="822960" y="4892040"/>
+            <a:ext cx="73152" cy="1097280"/>
           </a:xfrm>
           <a:prstGeom prst="rect">
             <a:avLst/>
@@ -8630,53 +8817,14 @@
       </p:sp>
       <p:sp>
         <p:nvSpPr>
-          <p:cNvPr id="6" name="TextBox 5"/>
+          <p:cNvPr id="9" name="TextBox 8"/>
           <p:cNvSpPr txBox="1"/>
           <p:nvPr/>
         </p:nvSpPr>
         <p:spPr>
           <a:xfrm>
-            <a:off x="1188720" y="1371600"/>
-            <a:ext cx="10058400" cy="3566160"/>
-          </a:xfrm>
-          <a:prstGeom prst="rect">
-            <a:avLst/>
-          </a:prstGeom>
-          <a:noFill/>
-        </p:spPr>
-        <p:txBody>
-          <a:bodyPr wrap="square" anchor="ctr" lIns="0" rIns="0" tIns="0" bIns="0">
-            <a:spAutoFit/>
-          </a:bodyPr>
-          <a:lstStyle/>
-          <a:p>
-            <a:pPr algn="l">
-              <a:spcAft>
-                <a:spcPts val="1800"/>
-              </a:spcAft>
-            </a:pPr>
-            <a:r>
-              <a:rPr sz="4000" b="0" i="1">
-                <a:solidFill>
-                  <a:srgbClr val="1C1B19"/>
-                </a:solidFill>
-                <a:latin typeface="Source Serif 4"/>
-              </a:rPr>
-              <a:t>Sit for one minute. Each time your mind wanders, make a tally mark.</a:t>
-            </a:r>
-          </a:p>
-        </p:txBody>
-      </p:sp>
-      <p:sp>
-        <p:nvSpPr>
-          <p:cNvPr id="7" name="TextBox 6"/>
-          <p:cNvSpPr txBox="1"/>
-          <p:nvPr/>
-        </p:nvSpPr>
-        <p:spPr>
-          <a:xfrm>
-            <a:off x="1188720" y="5120640"/>
-            <a:ext cx="10058400" cy="914400"/>
+            <a:off x="1097280" y="4892040"/>
+            <a:ext cx="10241280" cy="1188720"/>
           </a:xfrm>
           <a:prstGeom prst="rect">
             <a:avLst/>
@@ -8691,17 +8839,33 @@
           <a:p>
             <a:pPr algn="l">
               <a:spcAft>
-                <a:spcPts val="810"/>
-              </a:spcAft>
-            </a:pPr>
-            <a:r>
-              <a:rPr sz="1800" b="0" i="0">
-                <a:solidFill>
-                  <a:srgbClr val="5D5A54"/>
+                <a:spcPts val="855"/>
+              </a:spcAft>
+            </a:pPr>
+            <a:r>
+              <a:rPr sz="1200" b="1" i="0">
+                <a:solidFill>
+                  <a:srgbClr val="F47B20"/>
                 </a:solidFill>
                 <a:latin typeface="Inter Tight"/>
               </a:rPr>
-              <a:t>Eyes open or closed. No right number.</a:t>
+              <a:t>IN CLASS</a:t>
+            </a:r>
+          </a:p>
+          <a:p>
+            <a:pPr algn="l">
+              <a:spcAft>
+                <a:spcPts val="855"/>
+              </a:spcAft>
+            </a:pPr>
+            <a:r>
+              <a:rPr sz="1900" b="0" i="0">
+                <a:solidFill>
+                  <a:srgbClr val="1C1B19"/>
+                </a:solidFill>
+                <a:latin typeface="Source Serif 4"/>
+              </a:rPr>
+              <a:t>The brain rewires around what you practice, like an instrument or a sport. Attention is one more thing you can practice.</a:t>
             </a:r>
           </a:p>
         </p:txBody>
@@ -8810,7 +8974,7 @@
                 </a:solidFill>
                 <a:latin typeface="Inter Tight"/>
               </a:rPr>
-              <a:t>WHAT IT IS</a:t>
+              <a:t>IN SCHOOLS</a:t>
             </a:r>
           </a:p>
         </p:txBody>
@@ -8849,7 +9013,7 @@
                 </a:solidFill>
                 <a:latin typeface="Inter Tight"/>
               </a:rPr>
-              <a:t>train-your-attention Counseling</a:t>
+              <a:t>Beaver Counseling</a:t>
             </a:r>
           </a:p>
         </p:txBody>
@@ -8862,8 +9026,8 @@
         </p:nvSpPr>
         <p:spPr>
           <a:xfrm>
-            <a:off x="822960" y="1463040"/>
-            <a:ext cx="10515600" cy="3291840"/>
+            <a:off x="822960" y="914400"/>
+            <a:ext cx="10515600" cy="365760"/>
           </a:xfrm>
           <a:prstGeom prst="rect">
             <a:avLst/>
@@ -8871,24 +9035,24 @@
           <a:noFill/>
         </p:spPr>
         <p:txBody>
-          <a:bodyPr wrap="square" anchor="ctr" lIns="0" rIns="0" tIns="0" bIns="0">
+          <a:bodyPr wrap="square" anchor="t" lIns="0" rIns="0" tIns="0" bIns="0">
             <a:spAutoFit/>
           </a:bodyPr>
           <a:lstStyle/>
           <a:p>
             <a:pPr algn="l">
               <a:spcAft>
-                <a:spcPts val="2070"/>
-              </a:spcAft>
-            </a:pPr>
-            <a:r>
-              <a:rPr sz="4600" b="1" i="0">
-                <a:solidFill>
-                  <a:srgbClr val="1C1B19"/>
-                </a:solidFill>
-                <a:latin typeface="Source Serif 4"/>
-              </a:rPr>
-              <a:t>Mindfulness is paying attention to right now, on purpose, without judging it.</a:t>
+                <a:spcPts val="630"/>
+              </a:spcAft>
+            </a:pPr>
+            <a:r>
+              <a:rPr sz="1400" b="1" i="0">
+                <a:solidFill>
+                  <a:srgbClr val="0B2D5B"/>
+                </a:solidFill>
+                <a:latin typeface="Inter Tight"/>
+              </a:rPr>
+              <a:t>MYRIAD trial, Kuyken et al., 2022  ·  Dunning et al., 2019</a:t>
             </a:r>
           </a:p>
         </p:txBody>
@@ -8901,7 +9065,7 @@
         </p:nvSpPr>
         <p:spPr>
           <a:xfrm>
-            <a:off x="822960" y="4846320"/>
+            <a:off x="822960" y="1325880"/>
             <a:ext cx="10515600" cy="1097280"/>
           </a:xfrm>
           <a:prstGeom prst="rect">
@@ -8917,17 +9081,187 @@
           <a:p>
             <a:pPr algn="l">
               <a:spcAft>
-                <a:spcPts val="990"/>
-              </a:spcAft>
-            </a:pPr>
-            <a:r>
-              <a:rPr sz="2200" b="0" i="1">
-                <a:solidFill>
-                  <a:srgbClr val="5D5A54"/>
-                </a:solidFill>
-                <a:latin typeface="Source Serif 4"/>
-              </a:rPr>
-              <a:t>When your mind wanders, you notice and come back. The coming back is the practice.</a:t>
+                <a:spcPts val="1440"/>
+              </a:spcAft>
+            </a:pPr>
+            <a:r>
+              <a:rPr sz="3200" b="1" i="0">
+                <a:solidFill>
+                  <a:srgbClr val="1C1B19"/>
+                </a:solidFill>
+                <a:latin typeface="Source Serif 4"/>
+              </a:rPr>
+              <a:t>A school course alone isn't a cure.</a:t>
+            </a:r>
+          </a:p>
+        </p:txBody>
+      </p:sp>
+      <p:sp>
+        <p:nvSpPr>
+          <p:cNvPr id="7" name="TextBox 6"/>
+          <p:cNvSpPr txBox="1"/>
+          <p:nvPr/>
+        </p:nvSpPr>
+        <p:spPr>
+          <a:xfrm>
+            <a:off x="822960" y="2514600"/>
+            <a:ext cx="10515600" cy="2194560"/>
+          </a:xfrm>
+          <a:prstGeom prst="rect">
+            <a:avLst/>
+          </a:prstGeom>
+          <a:noFill/>
+        </p:spPr>
+        <p:txBody>
+          <a:bodyPr wrap="square" anchor="t" lIns="0" rIns="0" tIns="0" bIns="0">
+            <a:spAutoFit/>
+          </a:bodyPr>
+          <a:lstStyle/>
+          <a:p>
+            <a:pPr algn="l">
+              <a:spcAft>
+                <a:spcPts val="855"/>
+              </a:spcAft>
+            </a:pPr>
+            <a:r>
+              <a:rPr sz="1900" b="0" i="0">
+                <a:solidFill>
+                  <a:srgbClr val="1C1B19"/>
+                </a:solidFill>
+                <a:latin typeface="Source Serif 4"/>
+              </a:rPr>
+              <a:t>•  8,000+ students in 84 UK schools: mindfulness classes helped about as much as regular wellbeing lessons.</a:t>
+            </a:r>
+          </a:p>
+          <a:p>
+            <a:pPr algn="l">
+              <a:spcAft>
+                <a:spcPts val="855"/>
+              </a:spcAft>
+            </a:pPr>
+            <a:r>
+              <a:rPr sz="1900" b="0" i="0">
+                <a:solidFill>
+                  <a:srgbClr val="1C1B19"/>
+                </a:solidFill>
+                <a:latin typeface="Source Serif 4"/>
+              </a:rPr>
+              <a:t>•  Most students stopped practicing after the course.</a:t>
+            </a:r>
+          </a:p>
+          <a:p>
+            <a:pPr algn="l">
+              <a:spcAft>
+                <a:spcPts val="855"/>
+              </a:spcAft>
+            </a:pPr>
+            <a:r>
+              <a:rPr sz="1900" b="0" i="0">
+                <a:solidFill>
+                  <a:srgbClr val="1C1B19"/>
+                </a:solidFill>
+                <a:latin typeface="Source Serif 4"/>
+              </a:rPr>
+              <a:t>•  Across 33 studies, benefits for attention, stress and mood were small but real.</a:t>
+            </a:r>
+          </a:p>
+        </p:txBody>
+      </p:sp>
+      <p:sp>
+        <p:nvSpPr>
+          <p:cNvPr id="8" name="Rectangle 7"/>
+          <p:cNvSpPr/>
+          <p:nvPr/>
+        </p:nvSpPr>
+        <p:spPr>
+          <a:xfrm>
+            <a:off x="822960" y="4892040"/>
+            <a:ext cx="73152" cy="1097280"/>
+          </a:xfrm>
+          <a:prstGeom prst="rect">
+            <a:avLst/>
+          </a:prstGeom>
+          <a:solidFill>
+            <a:srgbClr val="F47B20"/>
+          </a:solidFill>
+          <a:ln>
+            <a:noFill/>
+          </a:ln>
+          <a:effectLst/>
+        </p:spPr>
+        <p:style>
+          <a:lnRef idx="1">
+            <a:schemeClr val="accent1"/>
+          </a:lnRef>
+          <a:fillRef idx="3">
+            <a:schemeClr val="accent1"/>
+          </a:fillRef>
+          <a:effectRef idx="2">
+            <a:schemeClr val="accent1"/>
+          </a:effectRef>
+          <a:fontRef idx="minor">
+            <a:schemeClr val="lt1"/>
+          </a:fontRef>
+        </p:style>
+        <p:txBody>
+          <a:bodyPr rtlCol="0" anchor="ctr"/>
+          <a:lstStyle/>
+          <a:p>
+            <a:pPr algn="ctr"/>
+          </a:p>
+        </p:txBody>
+      </p:sp>
+      <p:sp>
+        <p:nvSpPr>
+          <p:cNvPr id="9" name="TextBox 8"/>
+          <p:cNvSpPr txBox="1"/>
+          <p:nvPr/>
+        </p:nvSpPr>
+        <p:spPr>
+          <a:xfrm>
+            <a:off x="1097280" y="4892040"/>
+            <a:ext cx="10241280" cy="1188720"/>
+          </a:xfrm>
+          <a:prstGeom prst="rect">
+            <a:avLst/>
+          </a:prstGeom>
+          <a:noFill/>
+        </p:spPr>
+        <p:txBody>
+          <a:bodyPr wrap="square" anchor="t" lIns="0" rIns="0" tIns="0" bIns="0">
+            <a:spAutoFit/>
+          </a:bodyPr>
+          <a:lstStyle/>
+          <a:p>
+            <a:pPr algn="l">
+              <a:spcAft>
+                <a:spcPts val="855"/>
+              </a:spcAft>
+            </a:pPr>
+            <a:r>
+              <a:rPr sz="1200" b="1" i="0">
+                <a:solidFill>
+                  <a:srgbClr val="F47B20"/>
+                </a:solidFill>
+                <a:latin typeface="Inter Tight"/>
+              </a:rPr>
+              <a:t>IN CLASS</a:t>
+            </a:r>
+          </a:p>
+          <a:p>
+            <a:pPr algn="l">
+              <a:spcAft>
+                <a:spcPts val="855"/>
+              </a:spcAft>
+            </a:pPr>
+            <a:r>
+              <a:rPr sz="1900" b="0" i="0">
+                <a:solidFill>
+                  <a:srgbClr val="1C1B19"/>
+                </a:solidFill>
+                <a:latin typeface="Source Serif 4"/>
+              </a:rPr>
+              <a:t>It's a tool. It works best when you pick a practice you like and use it because you want to.</a:t>
             </a:r>
           </a:p>
         </p:txBody>
@@ -9036,7 +9370,7 @@
                 </a:solidFill>
                 <a:latin typeface="Inter Tight"/>
               </a:rPr>
-              <a:t>THE RESEARCH</a:t>
+              <a:t>WHERE IT COMES FROM</a:t>
             </a:r>
           </a:p>
         </p:txBody>
@@ -9075,7 +9409,7 @@
                 </a:solidFill>
                 <a:latin typeface="Inter Tight"/>
               </a:rPr>
-              <a:t>train-your-attention Counseling</a:t>
+              <a:t>Beaver Counseling</a:t>
             </a:r>
           </a:p>
         </p:txBody>
@@ -9088,8 +9422,47 @@
         </p:nvSpPr>
         <p:spPr>
           <a:xfrm>
-            <a:off x="822960" y="914400"/>
-            <a:ext cx="10515600" cy="365760"/>
+            <a:off x="822960" y="1463040"/>
+            <a:ext cx="10515600" cy="3291840"/>
+          </a:xfrm>
+          <a:prstGeom prst="rect">
+            <a:avLst/>
+          </a:prstGeom>
+          <a:noFill/>
+        </p:spPr>
+        <p:txBody>
+          <a:bodyPr wrap="square" anchor="ctr" lIns="0" rIns="0" tIns="0" bIns="0">
+            <a:spAutoFit/>
+          </a:bodyPr>
+          <a:lstStyle/>
+          <a:p>
+            <a:pPr algn="l">
+              <a:spcAft>
+                <a:spcPts val="2070"/>
+              </a:spcAft>
+            </a:pPr>
+            <a:r>
+              <a:rPr sz="4600" b="1" i="0">
+                <a:solidFill>
+                  <a:srgbClr val="1C1B19"/>
+                </a:solidFill>
+                <a:latin typeface="Source Serif 4"/>
+              </a:rPr>
+              <a:t>Mindfulness grew out of Buddhist meditation. Many traditions have their own versions.</a:t>
+            </a:r>
+          </a:p>
+        </p:txBody>
+      </p:sp>
+      <p:sp>
+        <p:nvSpPr>
+          <p:cNvPr id="6" name="TextBox 5"/>
+          <p:cNvSpPr txBox="1"/>
+          <p:nvPr/>
+        </p:nvSpPr>
+        <p:spPr>
+          <a:xfrm>
+            <a:off x="822960" y="4846320"/>
+            <a:ext cx="10515600" cy="1097280"/>
           </a:xfrm>
           <a:prstGeom prst="rect">
             <a:avLst/>
@@ -9104,226 +9477,17 @@
           <a:p>
             <a:pPr algn="l">
               <a:spcAft>
-                <a:spcPts val="630"/>
-              </a:spcAft>
-            </a:pPr>
-            <a:r>
-              <a:rPr sz="1400" b="1" i="0">
-                <a:solidFill>
-                  <a:srgbClr val="0B2D5B"/>
-                </a:solidFill>
-                <a:latin typeface="Inter Tight"/>
-              </a:rPr>
-              <a:t>Killingsworth &amp; Gilbert, 2010</a:t>
-            </a:r>
-          </a:p>
-        </p:txBody>
-      </p:sp>
-      <p:sp>
-        <p:nvSpPr>
-          <p:cNvPr id="6" name="TextBox 5"/>
-          <p:cNvSpPr txBox="1"/>
-          <p:nvPr/>
-        </p:nvSpPr>
-        <p:spPr>
-          <a:xfrm>
-            <a:off x="822960" y="1325880"/>
-            <a:ext cx="10515600" cy="1097280"/>
-          </a:xfrm>
-          <a:prstGeom prst="rect">
-            <a:avLst/>
-          </a:prstGeom>
-          <a:noFill/>
-        </p:spPr>
-        <p:txBody>
-          <a:bodyPr wrap="square" anchor="t" lIns="0" rIns="0" tIns="0" bIns="0">
-            <a:spAutoFit/>
-          </a:bodyPr>
-          <a:lstStyle/>
-          <a:p>
-            <a:pPr algn="l">
-              <a:spcAft>
-                <a:spcPts val="1440"/>
-              </a:spcAft>
-            </a:pPr>
-            <a:r>
-              <a:rPr sz="3200" b="1" i="0">
-                <a:solidFill>
-                  <a:srgbClr val="1C1B19"/>
-                </a:solidFill>
-                <a:latin typeface="Source Serif 4"/>
-              </a:rPr>
-              <a:t>Minds wander almost half the time.</a:t>
-            </a:r>
-          </a:p>
-        </p:txBody>
-      </p:sp>
-      <p:sp>
-        <p:nvSpPr>
-          <p:cNvPr id="7" name="TextBox 6"/>
-          <p:cNvSpPr txBox="1"/>
-          <p:nvPr/>
-        </p:nvSpPr>
-        <p:spPr>
-          <a:xfrm>
-            <a:off x="822960" y="2514600"/>
-            <a:ext cx="10515600" cy="2194560"/>
-          </a:xfrm>
-          <a:prstGeom prst="rect">
-            <a:avLst/>
-          </a:prstGeom>
-          <a:noFill/>
-        </p:spPr>
-        <p:txBody>
-          <a:bodyPr wrap="square" anchor="t" lIns="0" rIns="0" tIns="0" bIns="0">
-            <a:spAutoFit/>
-          </a:bodyPr>
-          <a:lstStyle/>
-          <a:p>
-            <a:pPr algn="l">
-              <a:spcAft>
-                <a:spcPts val="855"/>
-              </a:spcAft>
-            </a:pPr>
-            <a:r>
-              <a:rPr sz="1900" b="0" i="0">
-                <a:solidFill>
-                  <a:srgbClr val="1C1B19"/>
-                </a:solidFill>
-                <a:latin typeface="Source Serif 4"/>
-              </a:rPr>
-              <a:t>•  About 2,250 adults got random phone check-ins: what are you doing, what are you thinking about?</a:t>
-            </a:r>
-          </a:p>
-          <a:p>
-            <a:pPr algn="l">
-              <a:spcAft>
-                <a:spcPts val="855"/>
-              </a:spcAft>
-            </a:pPr>
-            <a:r>
-              <a:rPr sz="1900" b="0" i="0">
-                <a:solidFill>
-                  <a:srgbClr val="1C1B19"/>
-                </a:solidFill>
-                <a:latin typeface="Source Serif 4"/>
-              </a:rPr>
-              <a:t>•  Their minds were somewhere else 47% of the time.</a:t>
-            </a:r>
-          </a:p>
-          <a:p>
-            <a:pPr algn="l">
-              <a:spcAft>
-                <a:spcPts val="855"/>
-              </a:spcAft>
-            </a:pPr>
-            <a:r>
-              <a:rPr sz="1900" b="0" i="0">
-                <a:solidFill>
-                  <a:srgbClr val="1C1B19"/>
-                </a:solidFill>
-                <a:latin typeface="Source Serif 4"/>
-              </a:rPr>
-              <a:t>•  They were less happy while their minds wandered, even during pleasant activities.</a:t>
-            </a:r>
-          </a:p>
-        </p:txBody>
-      </p:sp>
-      <p:sp>
-        <p:nvSpPr>
-          <p:cNvPr id="8" name="Rectangle 7"/>
-          <p:cNvSpPr/>
-          <p:nvPr/>
-        </p:nvSpPr>
-        <p:spPr>
-          <a:xfrm>
-            <a:off x="822960" y="4892040"/>
-            <a:ext cx="73152" cy="1097280"/>
-          </a:xfrm>
-          <a:prstGeom prst="rect">
-            <a:avLst/>
-          </a:prstGeom>
-          <a:solidFill>
-            <a:srgbClr val="F47B20"/>
-          </a:solidFill>
-          <a:ln>
-            <a:noFill/>
-          </a:ln>
-          <a:effectLst/>
-        </p:spPr>
-        <p:style>
-          <a:lnRef idx="1">
-            <a:schemeClr val="accent1"/>
-          </a:lnRef>
-          <a:fillRef idx="3">
-            <a:schemeClr val="accent1"/>
-          </a:fillRef>
-          <a:effectRef idx="2">
-            <a:schemeClr val="accent1"/>
-          </a:effectRef>
-          <a:fontRef idx="minor">
-            <a:schemeClr val="lt1"/>
-          </a:fontRef>
-        </p:style>
-        <p:txBody>
-          <a:bodyPr rtlCol="0" anchor="ctr"/>
-          <a:lstStyle/>
-          <a:p>
-            <a:pPr algn="ctr"/>
-          </a:p>
-        </p:txBody>
-      </p:sp>
-      <p:sp>
-        <p:nvSpPr>
-          <p:cNvPr id="9" name="TextBox 8"/>
-          <p:cNvSpPr txBox="1"/>
-          <p:nvPr/>
-        </p:nvSpPr>
-        <p:spPr>
-          <a:xfrm>
-            <a:off x="1097280" y="4892040"/>
-            <a:ext cx="10241280" cy="1188720"/>
-          </a:xfrm>
-          <a:prstGeom prst="rect">
-            <a:avLst/>
-          </a:prstGeom>
-          <a:noFill/>
-        </p:spPr>
-        <p:txBody>
-          <a:bodyPr wrap="square" anchor="t" lIns="0" rIns="0" tIns="0" bIns="0">
-            <a:spAutoFit/>
-          </a:bodyPr>
-          <a:lstStyle/>
-          <a:p>
-            <a:pPr algn="l">
-              <a:spcAft>
-                <a:spcPts val="855"/>
-              </a:spcAft>
-            </a:pPr>
-            <a:r>
-              <a:rPr sz="1200" b="1" i="0">
-                <a:solidFill>
-                  <a:srgbClr val="F47B20"/>
-                </a:solidFill>
-                <a:latin typeface="Inter Tight"/>
-              </a:rPr>
-              <a:t>IN CLASS</a:t>
-            </a:r>
-          </a:p>
-          <a:p>
-            <a:pPr algn="l">
-              <a:spcAft>
-                <a:spcPts val="855"/>
-              </a:spcAft>
-            </a:pPr>
-            <a:r>
-              <a:rPr sz="1900" b="0" i="0">
-                <a:solidFill>
-                  <a:srgbClr val="1C1B19"/>
-                </a:solidFill>
-                <a:latin typeface="Source Serif 4"/>
-              </a:rPr>
-              <a:t>Wandering is normal. Noticing it is the skill.</a:t>
+                <a:spcPts val="990"/>
+              </a:spcAft>
+            </a:pPr>
+            <a:r>
+              <a:rPr sz="2200" b="0" i="1">
+                <a:solidFill>
+                  <a:srgbClr val="5D5A54"/>
+                </a:solidFill>
+                <a:latin typeface="Source Serif 4"/>
+              </a:rPr>
+              <a:t>Since 1979 it's been taught without religion. That's how we use it here.</a:t>
             </a:r>
           </a:p>
         </p:txBody>
@@ -9432,7 +9596,7 @@
                 </a:solidFill>
                 <a:latin typeface="Inter Tight"/>
               </a:rPr>
-              <a:t>YOUR BRAIN</a:t>
+              <a:t>FIVE WAYS IN</a:t>
             </a:r>
           </a:p>
         </p:txBody>
@@ -9471,7 +9635,7 @@
                 </a:solidFill>
                 <a:latin typeface="Inter Tight"/>
               </a:rPr>
-              <a:t>train-your-attention Counseling</a:t>
+              <a:t>Beaver Counseling</a:t>
             </a:r>
           </a:p>
         </p:txBody>
@@ -9484,8 +9648,8 @@
         </p:nvSpPr>
         <p:spPr>
           <a:xfrm>
-            <a:off x="822960" y="914400"/>
-            <a:ext cx="10515600" cy="365760"/>
+            <a:off x="822960" y="1005840"/>
+            <a:ext cx="10515600" cy="1097280"/>
           </a:xfrm>
           <a:prstGeom prst="rect">
             <a:avLst/>
@@ -9500,17 +9664,17 @@
           <a:p>
             <a:pPr algn="l">
               <a:spcAft>
-                <a:spcPts val="630"/>
-              </a:spcAft>
-            </a:pPr>
-            <a:r>
-              <a:rPr sz="1400" b="1" i="0">
-                <a:solidFill>
-                  <a:srgbClr val="0B2D5B"/>
-                </a:solidFill>
-                <a:latin typeface="Inter Tight"/>
-              </a:rPr>
-              <a:t>Lieberman 2007  ·  Brewer 2011  ·  Tang, Hölzel &amp; Posner 2015  ·  Kral 2022</a:t>
+                <a:spcPts val="1620"/>
+              </a:spcAft>
+            </a:pPr>
+            <a:r>
+              <a:rPr sz="3600" b="1" i="0">
+                <a:solidFill>
+                  <a:srgbClr val="1C1B19"/>
+                </a:solidFill>
+                <a:latin typeface="Source Serif 4"/>
+              </a:rPr>
+              <a:t>Pick the one that fits you.</a:t>
             </a:r>
           </a:p>
         </p:txBody>
@@ -9523,8 +9687,8 @@
         </p:nvSpPr>
         <p:spPr>
           <a:xfrm>
-            <a:off x="822960" y="1325880"/>
-            <a:ext cx="10515600" cy="1097280"/>
+            <a:off x="822960" y="2057400"/>
+            <a:ext cx="548640" cy="804672"/>
           </a:xfrm>
           <a:prstGeom prst="rect">
             <a:avLst/>
@@ -9539,17 +9703,17 @@
           <a:p>
             <a:pPr algn="l">
               <a:spcAft>
-                <a:spcPts val="1440"/>
-              </a:spcAft>
-            </a:pPr>
-            <a:r>
-              <a:rPr sz="3200" b="1" i="0">
-                <a:solidFill>
-                  <a:srgbClr val="1C1B19"/>
-                </a:solidFill>
-                <a:latin typeface="Source Serif 4"/>
-              </a:rPr>
-              <a:t>Practice changes how the brain works. How much it changes the structure is still argued.</a:t>
+                <a:spcPts val="1170"/>
+              </a:spcAft>
+            </a:pPr>
+            <a:r>
+              <a:rPr sz="2600" b="1" i="0">
+                <a:solidFill>
+                  <a:srgbClr val="F47B20"/>
+                </a:solidFill>
+                <a:latin typeface="Source Serif 4"/>
+              </a:rPr>
+              <a:t>1</a:t>
             </a:r>
           </a:p>
         </p:txBody>
@@ -9562,8 +9726,8 @@
         </p:nvSpPr>
         <p:spPr>
           <a:xfrm>
-            <a:off x="822960" y="2514600"/>
-            <a:ext cx="10515600" cy="2194560"/>
+            <a:off x="1463040" y="2093976"/>
+            <a:ext cx="9875520" cy="804672"/>
           </a:xfrm>
           <a:prstGeom prst="rect">
             <a:avLst/>
@@ -9578,110 +9742,73 @@
           <a:p>
             <a:pPr algn="l">
               <a:spcAft>
-                <a:spcPts val="855"/>
-              </a:spcAft>
-            </a:pPr>
-            <a:r>
-              <a:rPr sz="1900" b="0" i="0">
+                <a:spcPts val="945"/>
+              </a:spcAft>
+            </a:pPr>
+            <a:r>
+              <a:rPr sz="2100" b="1" i="0">
                 <a:solidFill>
                   <a:srgbClr val="1C1B19"/>
                 </a:solidFill>
                 <a:latin typeface="Source Serif 4"/>
               </a:rPr>
-              <a:t>•  Naming a feeling ("that's frustration") turns down the brain's alarm center.</a:t>
-            </a:r>
-          </a:p>
-          <a:p>
-            <a:pPr algn="l">
-              <a:spcAft>
-                <a:spcPts val="855"/>
-              </a:spcAft>
-            </a:pPr>
-            <a:r>
-              <a:rPr sz="1900" b="0" i="0">
-                <a:solidFill>
-                  <a:srgbClr val="1C1B19"/>
-                </a:solidFill>
-                <a:latin typeface="Source Serif 4"/>
-              </a:rPr>
-              <a:t>•  People who practice show more activity in attention and emotion networks, and less in the mind-wandering network.</a:t>
-            </a:r>
-          </a:p>
-          <a:p>
-            <a:pPr algn="l">
-              <a:spcAft>
-                <a:spcPts val="855"/>
-              </a:spcAft>
-            </a:pPr>
-            <a:r>
-              <a:rPr sz="1900" b="0" i="0">
-                <a:solidFill>
-                  <a:srgbClr val="1C1B19"/>
-                </a:solidFill>
-                <a:latin typeface="Source Serif 4"/>
-              </a:rPr>
-              <a:t>•  A small study found gray-matter growth after 8 weeks. The largest trial since found none.</a:t>
-            </a:r>
-          </a:p>
-          <a:p>
-            <a:pPr algn="l">
-              <a:spcAft>
-                <a:spcPts val="855"/>
-              </a:spcAft>
-            </a:pPr>
-            <a:r>
-              <a:rPr sz="1900" b="0" i="0">
-                <a:solidFill>
-                  <a:srgbClr val="1C1B19"/>
-                </a:solidFill>
-                <a:latin typeface="Source Serif 4"/>
-              </a:rPr>
-              <a:t>•  Almost all of this is on adults.</a:t>
-            </a:r>
-          </a:p>
-        </p:txBody>
-      </p:sp>
-      <p:sp>
-        <p:nvSpPr>
-          <p:cNvPr id="8" name="Rectangle 7"/>
-          <p:cNvSpPr/>
+              <a:t>Breathe out longer.</a:t>
+            </a:r>
+          </a:p>
+          <a:p>
+            <a:pPr algn="l">
+              <a:spcAft>
+                <a:spcPts val="945"/>
+              </a:spcAft>
+            </a:pPr>
+            <a:r>
+              <a:rPr sz="1600" b="0" i="0">
+                <a:solidFill>
+                  <a:srgbClr val="5D5A54"/>
+                </a:solidFill>
+                <a:latin typeface="Source Serif 4"/>
+              </a:rPr>
+              <a:t>In for 4, out for 6.</a:t>
+            </a:r>
+          </a:p>
+        </p:txBody>
+      </p:sp>
+      <p:sp>
+        <p:nvSpPr>
+          <p:cNvPr id="8" name="TextBox 7"/>
+          <p:cNvSpPr txBox="1"/>
           <p:nvPr/>
         </p:nvSpPr>
         <p:spPr>
           <a:xfrm>
-            <a:off x="822960" y="4892040"/>
-            <a:ext cx="73152" cy="1097280"/>
-          </a:xfrm>
-          <a:prstGeom prst="rect">
-            <a:avLst/>
-          </a:prstGeom>
-          <a:solidFill>
-            <a:srgbClr val="F47B20"/>
-          </a:solidFill>
-          <a:ln>
-            <a:noFill/>
-          </a:ln>
-          <a:effectLst/>
-        </p:spPr>
-        <p:style>
-          <a:lnRef idx="1">
-            <a:schemeClr val="accent1"/>
-          </a:lnRef>
-          <a:fillRef idx="3">
-            <a:schemeClr val="accent1"/>
-          </a:fillRef>
-          <a:effectRef idx="2">
-            <a:schemeClr val="accent1"/>
-          </a:effectRef>
-          <a:fontRef idx="minor">
-            <a:schemeClr val="lt1"/>
-          </a:fontRef>
-        </p:style>
-        <p:txBody>
-          <a:bodyPr rtlCol="0" anchor="ctr"/>
-          <a:lstStyle/>
-          <a:p>
-            <a:pPr algn="ctr"/>
+            <a:off x="822960" y="2862072"/>
+            <a:ext cx="548640" cy="804672"/>
+          </a:xfrm>
+          <a:prstGeom prst="rect">
+            <a:avLst/>
+          </a:prstGeom>
+          <a:noFill/>
+        </p:spPr>
+        <p:txBody>
+          <a:bodyPr wrap="square" anchor="t" lIns="0" rIns="0" tIns="0" bIns="0">
+            <a:spAutoFit/>
+          </a:bodyPr>
+          <a:lstStyle/>
+          <a:p>
+            <a:pPr algn="l">
+              <a:spcAft>
+                <a:spcPts val="1170"/>
+              </a:spcAft>
+            </a:pPr>
+            <a:r>
+              <a:rPr sz="2600" b="1" i="0">
+                <a:solidFill>
+                  <a:srgbClr val="F47B20"/>
+                </a:solidFill>
+                <a:latin typeface="Source Serif 4"/>
+              </a:rPr>
+              <a:t>2</a:t>
+            </a:r>
           </a:p>
         </p:txBody>
       </p:sp>
@@ -9693,8 +9820,8 @@
         </p:nvSpPr>
         <p:spPr>
           <a:xfrm>
-            <a:off x="1097280" y="4892040"/>
-            <a:ext cx="10241280" cy="1188720"/>
+            <a:off x="1463040" y="2898648"/>
+            <a:ext cx="9875520" cy="804672"/>
           </a:xfrm>
           <a:prstGeom prst="rect">
             <a:avLst/>
@@ -9709,33 +9836,315 @@
           <a:p>
             <a:pPr algn="l">
               <a:spcAft>
-                <a:spcPts val="855"/>
-              </a:spcAft>
-            </a:pPr>
-            <a:r>
-              <a:rPr sz="1200" b="1" i="0">
+                <a:spcPts val="945"/>
+              </a:spcAft>
+            </a:pPr>
+            <a:r>
+              <a:rPr sz="2100" b="1" i="0">
+                <a:solidFill>
+                  <a:srgbClr val="1C1B19"/>
+                </a:solidFill>
+                <a:latin typeface="Source Serif 4"/>
+              </a:rPr>
+              <a:t>Move and notice.</a:t>
+            </a:r>
+          </a:p>
+          <a:p>
+            <a:pPr algn="l">
+              <a:spcAft>
+                <a:spcPts val="945"/>
+              </a:spcAft>
+            </a:pPr>
+            <a:r>
+              <a:rPr sz="1600" b="0" i="0">
+                <a:solidFill>
+                  <a:srgbClr val="5D5A54"/>
+                </a:solidFill>
+                <a:latin typeface="Source Serif 4"/>
+              </a:rPr>
+              <a:t>Slow walking, stretching, or the rhythm of cycling, running, swimming.</a:t>
+            </a:r>
+          </a:p>
+        </p:txBody>
+      </p:sp>
+      <p:sp>
+        <p:nvSpPr>
+          <p:cNvPr id="10" name="TextBox 9"/>
+          <p:cNvSpPr txBox="1"/>
+          <p:nvPr/>
+        </p:nvSpPr>
+        <p:spPr>
+          <a:xfrm>
+            <a:off x="822960" y="3666744"/>
+            <a:ext cx="548640" cy="804672"/>
+          </a:xfrm>
+          <a:prstGeom prst="rect">
+            <a:avLst/>
+          </a:prstGeom>
+          <a:noFill/>
+        </p:spPr>
+        <p:txBody>
+          <a:bodyPr wrap="square" anchor="t" lIns="0" rIns="0" tIns="0" bIns="0">
+            <a:spAutoFit/>
+          </a:bodyPr>
+          <a:lstStyle/>
+          <a:p>
+            <a:pPr algn="l">
+              <a:spcAft>
+                <a:spcPts val="1170"/>
+              </a:spcAft>
+            </a:pPr>
+            <a:r>
+              <a:rPr sz="2600" b="1" i="0">
                 <a:solidFill>
                   <a:srgbClr val="F47B20"/>
                 </a:solidFill>
-                <a:latin typeface="Inter Tight"/>
-              </a:rPr>
-              <a:t>IN CLASS</a:t>
-            </a:r>
-          </a:p>
-          <a:p>
-            <a:pPr algn="l">
-              <a:spcAft>
-                <a:spcPts val="855"/>
-              </a:spcAft>
-            </a:pPr>
-            <a:r>
-              <a:rPr sz="1900" b="0" i="0">
+                <a:latin typeface="Source Serif 4"/>
+              </a:rPr>
+              <a:t>3</a:t>
+            </a:r>
+          </a:p>
+        </p:txBody>
+      </p:sp>
+      <p:sp>
+        <p:nvSpPr>
+          <p:cNvPr id="11" name="TextBox 10"/>
+          <p:cNvSpPr txBox="1"/>
+          <p:nvPr/>
+        </p:nvSpPr>
+        <p:spPr>
+          <a:xfrm>
+            <a:off x="1463040" y="3703320"/>
+            <a:ext cx="9875520" cy="804672"/>
+          </a:xfrm>
+          <a:prstGeom prst="rect">
+            <a:avLst/>
+          </a:prstGeom>
+          <a:noFill/>
+        </p:spPr>
+        <p:txBody>
+          <a:bodyPr wrap="square" anchor="t" lIns="0" rIns="0" tIns="0" bIns="0">
+            <a:spAutoFit/>
+          </a:bodyPr>
+          <a:lstStyle/>
+          <a:p>
+            <a:pPr algn="l">
+              <a:spcAft>
+                <a:spcPts val="945"/>
+              </a:spcAft>
+            </a:pPr>
+            <a:r>
+              <a:rPr sz="2100" b="1" i="0">
                 <a:solidFill>
                   <a:srgbClr val="1C1B19"/>
                 </a:solidFill>
                 <a:latin typeface="Source Serif 4"/>
               </a:rPr>
-              <a:t>The brain rewires around what you practice, like an instrument or a sport. Attention is one more thing you can practice.</a:t>
+              <a:t>Five senses.</a:t>
+            </a:r>
+          </a:p>
+          <a:p>
+            <a:pPr algn="l">
+              <a:spcAft>
+                <a:spcPts val="945"/>
+              </a:spcAft>
+            </a:pPr>
+            <a:r>
+              <a:rPr sz="1600" b="0" i="0">
+                <a:solidFill>
+                  <a:srgbClr val="5D5A54"/>
+                </a:solidFill>
+                <a:latin typeface="Source Serif 4"/>
+              </a:rPr>
+              <a:t>5 see, 4 hear, 3 touch, 2 smell, 1 taste.</a:t>
+            </a:r>
+          </a:p>
+        </p:txBody>
+      </p:sp>
+      <p:sp>
+        <p:nvSpPr>
+          <p:cNvPr id="12" name="TextBox 11"/>
+          <p:cNvSpPr txBox="1"/>
+          <p:nvPr/>
+        </p:nvSpPr>
+        <p:spPr>
+          <a:xfrm>
+            <a:off x="822960" y="4471416"/>
+            <a:ext cx="548640" cy="804672"/>
+          </a:xfrm>
+          <a:prstGeom prst="rect">
+            <a:avLst/>
+          </a:prstGeom>
+          <a:noFill/>
+        </p:spPr>
+        <p:txBody>
+          <a:bodyPr wrap="square" anchor="t" lIns="0" rIns="0" tIns="0" bIns="0">
+            <a:spAutoFit/>
+          </a:bodyPr>
+          <a:lstStyle/>
+          <a:p>
+            <a:pPr algn="l">
+              <a:spcAft>
+                <a:spcPts val="1170"/>
+              </a:spcAft>
+            </a:pPr>
+            <a:r>
+              <a:rPr sz="2600" b="1" i="0">
+                <a:solidFill>
+                  <a:srgbClr val="F47B20"/>
+                </a:solidFill>
+                <a:latin typeface="Source Serif 4"/>
+              </a:rPr>
+              <a:t>4</a:t>
+            </a:r>
+          </a:p>
+        </p:txBody>
+      </p:sp>
+      <p:sp>
+        <p:nvSpPr>
+          <p:cNvPr id="13" name="TextBox 12"/>
+          <p:cNvSpPr txBox="1"/>
+          <p:nvPr/>
+        </p:nvSpPr>
+        <p:spPr>
+          <a:xfrm>
+            <a:off x="1463040" y="4507992"/>
+            <a:ext cx="9875520" cy="804672"/>
+          </a:xfrm>
+          <a:prstGeom prst="rect">
+            <a:avLst/>
+          </a:prstGeom>
+          <a:noFill/>
+        </p:spPr>
+        <p:txBody>
+          <a:bodyPr wrap="square" anchor="t" lIns="0" rIns="0" tIns="0" bIns="0">
+            <a:spAutoFit/>
+          </a:bodyPr>
+          <a:lstStyle/>
+          <a:p>
+            <a:pPr algn="l">
+              <a:spcAft>
+                <a:spcPts val="945"/>
+              </a:spcAft>
+            </a:pPr>
+            <a:r>
+              <a:rPr sz="2100" b="1" i="0">
+                <a:solidFill>
+                  <a:srgbClr val="1C1B19"/>
+                </a:solidFill>
+                <a:latin typeface="Source Serif 4"/>
+              </a:rPr>
+              <a:t>Kindness practice.</a:t>
+            </a:r>
+          </a:p>
+          <a:p>
+            <a:pPr algn="l">
+              <a:spcAft>
+                <a:spcPts val="945"/>
+              </a:spcAft>
+            </a:pPr>
+            <a:r>
+              <a:rPr sz="1600" b="0" i="0">
+                <a:solidFill>
+                  <a:srgbClr val="5D5A54"/>
+                </a:solidFill>
+                <a:latin typeface="Source Serif 4"/>
+              </a:rPr>
+              <a:t>Silently wishing yourself and others well.</a:t>
+            </a:r>
+          </a:p>
+        </p:txBody>
+      </p:sp>
+      <p:sp>
+        <p:nvSpPr>
+          <p:cNvPr id="14" name="TextBox 13"/>
+          <p:cNvSpPr txBox="1"/>
+          <p:nvPr/>
+        </p:nvSpPr>
+        <p:spPr>
+          <a:xfrm>
+            <a:off x="822960" y="5276088"/>
+            <a:ext cx="548640" cy="804672"/>
+          </a:xfrm>
+          <a:prstGeom prst="rect">
+            <a:avLst/>
+          </a:prstGeom>
+          <a:noFill/>
+        </p:spPr>
+        <p:txBody>
+          <a:bodyPr wrap="square" anchor="t" lIns="0" rIns="0" tIns="0" bIns="0">
+            <a:spAutoFit/>
+          </a:bodyPr>
+          <a:lstStyle/>
+          <a:p>
+            <a:pPr algn="l">
+              <a:spcAft>
+                <a:spcPts val="1170"/>
+              </a:spcAft>
+            </a:pPr>
+            <a:r>
+              <a:rPr sz="2600" b="1" i="0">
+                <a:solidFill>
+                  <a:srgbClr val="F47B20"/>
+                </a:solidFill>
+                <a:latin typeface="Source Serif 4"/>
+              </a:rPr>
+              <a:t>5</a:t>
+            </a:r>
+          </a:p>
+        </p:txBody>
+      </p:sp>
+      <p:sp>
+        <p:nvSpPr>
+          <p:cNvPr id="15" name="TextBox 14"/>
+          <p:cNvSpPr txBox="1"/>
+          <p:nvPr/>
+        </p:nvSpPr>
+        <p:spPr>
+          <a:xfrm>
+            <a:off x="1463040" y="5312664"/>
+            <a:ext cx="9875520" cy="804672"/>
+          </a:xfrm>
+          <a:prstGeom prst="rect">
+            <a:avLst/>
+          </a:prstGeom>
+          <a:noFill/>
+        </p:spPr>
+        <p:txBody>
+          <a:bodyPr wrap="square" anchor="t" lIns="0" rIns="0" tIns="0" bIns="0">
+            <a:spAutoFit/>
+          </a:bodyPr>
+          <a:lstStyle/>
+          <a:p>
+            <a:pPr algn="l">
+              <a:spcAft>
+                <a:spcPts val="945"/>
+              </a:spcAft>
+            </a:pPr>
+            <a:r>
+              <a:rPr sz="2100" b="1" i="0">
+                <a:solidFill>
+                  <a:srgbClr val="1C1B19"/>
+                </a:solidFill>
+                <a:latin typeface="Source Serif 4"/>
+              </a:rPr>
+              <a:t>Body scan.</a:t>
+            </a:r>
+          </a:p>
+          <a:p>
+            <a:pPr algn="l">
+              <a:spcAft>
+                <a:spcPts val="945"/>
+              </a:spcAft>
+            </a:pPr>
+            <a:r>
+              <a:rPr sz="1600" b="0" i="0">
+                <a:solidFill>
+                  <a:srgbClr val="5D5A54"/>
+                </a:solidFill>
+                <a:latin typeface="Source Serif 4"/>
+              </a:rPr>
+              <a:t>Attention moving slowly from feet to head. Best on your own.</a:t>
             </a:r>
           </a:p>
         </p:txBody>

--- a/decks/train-your-attention-lesson-v2.pptx
+++ b/decks/train-your-attention-lesson-v2.pptx
@@ -7562,6 +7562,45 @@
                 <a:latin typeface="Inter Tight"/>
               </a:rPr>
               <a:t>Beaver Upper School · Counseling</a:t>
+            </a:r>
+          </a:p>
+        </p:txBody>
+      </p:sp>
+      <p:sp>
+        <p:nvSpPr>
+          <p:cNvPr id="8" name="TextBox 7"/>
+          <p:cNvSpPr txBox="1"/>
+          <p:nvPr/>
+        </p:nvSpPr>
+        <p:spPr>
+          <a:xfrm>
+            <a:off x="6766560" y="5897880"/>
+            <a:ext cx="4846320" cy="640080"/>
+          </a:xfrm>
+          <a:prstGeom prst="rect">
+            <a:avLst/>
+          </a:prstGeom>
+          <a:noFill/>
+        </p:spPr>
+        <p:txBody>
+          <a:bodyPr wrap="square" anchor="t" lIns="0" rIns="0" tIns="0" bIns="0">
+            <a:spAutoFit/>
+          </a:bodyPr>
+          <a:lstStyle/>
+          <a:p>
+            <a:pPr algn="r">
+              <a:spcAft>
+                <a:spcPts val="495"/>
+              </a:spcAft>
+            </a:pPr>
+            <a:r>
+              <a:rPr sz="1100" b="0" i="0">
+                <a:solidFill>
+                  <a:srgbClr val="E8E4DA"/>
+                </a:solidFill>
+                <a:latin typeface="Inter Tight"/>
+              </a:rPr>
+              <a:t>Written by Dr. Rick Wilson, with AI-assisted drafting. Every lesson is reviewed and edited by Dr. Wilson.</a:t>
             </a:r>
           </a:p>
         </p:txBody>
